--- a/activities/Activity-02-Plan-the-Infographic-Brief-and-Wireframe/A02-Plan-the-Infographic-Brief-and-Wireframe-Sample.pptx
+++ b/activities/Activity-02-Plan-the-Infographic-Brief-and-Wireframe/A02-Plan-the-Infographic-Brief-and-Wireframe-Sample.pptx
@@ -10,6 +10,7 @@
     <p:sldId id="258" r:id="rId9"/>
     <p:sldId id="259" r:id="rId10"/>
     <p:sldId id="260" r:id="rId11"/>
+    <p:sldId id="261" r:id="rId12"/>
   </p:sldIdLst>
   <p:sldSz cx="12191695" cy="6858000" type="screen4x3"/>
   <p:notesSz cx="6858000" cy="9144000"/>
@@ -3292,7 +3293,7 @@
                 </a:solidFill>
                 <a:latin typeface="Arial"/>
               </a:rPr>
-              <a:t>Plan the Infographic Brief and Wireframe</a:t>
+              <a:t>Prompt an Evidence-Led Infographic Brief</a:t>
             </a:r>
           </a:p>
         </p:txBody>
@@ -3442,7 +3443,7 @@
                 </a:solidFill>
                 <a:latin typeface="Arial"/>
               </a:rPr>
-              <a:t>PowerPoint + Excel</a:t>
+              <a:t>Approved AI assistant + PowerPoint</a:t>
             </a:r>
           </a:p>
         </p:txBody>
@@ -3525,6 +3526,246 @@
             <a:avLst/>
           </a:prstGeom>
           <a:solidFill>
+            <a:srgbClr val="7C3AED"/>
+          </a:solidFill>
+          <a:ln>
+            <a:solidFill>
+              <a:srgbClr val="7C3AED"/>
+            </a:solidFill>
+          </a:ln>
+        </p:spPr>
+        <p:style>
+          <a:lnRef idx="1">
+            <a:schemeClr val="accent1"/>
+          </a:lnRef>
+          <a:fillRef idx="3">
+            <a:schemeClr val="accent1"/>
+          </a:fillRef>
+          <a:effectRef idx="2">
+            <a:schemeClr val="accent1"/>
+          </a:effectRef>
+          <a:fontRef idx="minor">
+            <a:schemeClr val="lt1"/>
+          </a:fontRef>
+        </p:style>
+        <p:txBody>
+          <a:bodyPr rtlCol="0" anchor="ctr"/>
+          <a:lstStyle/>
+          <a:p>
+            <a:pPr algn="ctr"/>
+          </a:p>
+        </p:txBody>
+      </p:sp>
+      <p:sp>
+        <p:nvSpPr>
+          <p:cNvPr id="4" name="TextBox 3"/>
+          <p:cNvSpPr txBox="1"/>
+          <p:nvPr/>
+        </p:nvSpPr>
+        <p:spPr>
+          <a:xfrm>
+            <a:off x="658368" y="384048"/>
+            <a:ext cx="10789920" cy="320040"/>
+          </a:xfrm>
+          <a:prstGeom prst="rect">
+            <a:avLst/>
+          </a:prstGeom>
+          <a:noFill/>
+        </p:spPr>
+        <p:txBody>
+          <a:bodyPr wrap="square" anchor="t">
+            <a:spAutoFit/>
+          </a:bodyPr>
+          <a:lstStyle/>
+          <a:p>
+            <a:pPr algn="l"/>
+            <a:r>
+              <a:rPr sz="1100" b="1">
+                <a:solidFill>
+                  <a:srgbClr val="7C3AED"/>
+                </a:solidFill>
+                <a:latin typeface="Arial"/>
+              </a:rPr>
+              <a:t>ACTIVITY 02 · FULL COPY-READY TEXT IN PROMPTS.MD AND AI PROMPT LAB</a:t>
+            </a:r>
+          </a:p>
+        </p:txBody>
+      </p:sp>
+      <p:sp>
+        <p:nvSpPr>
+          <p:cNvPr id="5" name="TextBox 4"/>
+          <p:cNvSpPr txBox="1"/>
+          <p:nvPr/>
+        </p:nvSpPr>
+        <p:spPr>
+          <a:xfrm>
+            <a:off x="658368" y="749808"/>
+            <a:ext cx="10789920" cy="658368"/>
+          </a:xfrm>
+          <a:prstGeom prst="rect">
+            <a:avLst/>
+          </a:prstGeom>
+          <a:noFill/>
+        </p:spPr>
+        <p:txBody>
+          <a:bodyPr wrap="square" anchor="t">
+            <a:spAutoFit/>
+          </a:bodyPr>
+          <a:lstStyle/>
+          <a:p>
+            <a:pPr algn="l"/>
+            <a:r>
+              <a:rPr sz="2700" b="1">
+                <a:solidFill>
+                  <a:srgbClr val="161B26"/>
+                </a:solidFill>
+                <a:latin typeface="Arial"/>
+              </a:rPr>
+              <a:t>AI Prompt Starters</a:t>
+            </a:r>
+          </a:p>
+        </p:txBody>
+      </p:sp>
+      <p:sp>
+        <p:nvSpPr>
+          <p:cNvPr id="6" name="Rectangle 5"/>
+          <p:cNvSpPr/>
+          <p:nvPr/>
+        </p:nvSpPr>
+        <p:spPr>
+          <a:xfrm>
+            <a:off x="658368" y="1444752"/>
+            <a:ext cx="10881360" cy="18288"/>
+          </a:xfrm>
+          <a:prstGeom prst="rect">
+            <a:avLst/>
+          </a:prstGeom>
+          <a:solidFill>
+            <a:srgbClr val="E2E8F0"/>
+          </a:solidFill>
+          <a:ln>
+            <a:solidFill>
+              <a:srgbClr val="E2E8F0"/>
+            </a:solidFill>
+          </a:ln>
+        </p:spPr>
+        <p:style>
+          <a:lnRef idx="1">
+            <a:schemeClr val="accent1"/>
+          </a:lnRef>
+          <a:fillRef idx="3">
+            <a:schemeClr val="accent1"/>
+          </a:fillRef>
+          <a:effectRef idx="2">
+            <a:schemeClr val="accent1"/>
+          </a:effectRef>
+          <a:fontRef idx="minor">
+            <a:schemeClr val="lt1"/>
+          </a:fontRef>
+        </p:style>
+        <p:txBody>
+          <a:bodyPr rtlCol="0" anchor="ctr"/>
+          <a:lstStyle/>
+          <a:p>
+            <a:pPr algn="ctr"/>
+          </a:p>
+        </p:txBody>
+      </p:sp>
+      <p:sp>
+        <p:nvSpPr>
+          <p:cNvPr id="7" name="TextBox 6"/>
+          <p:cNvSpPr txBox="1"/>
+          <p:nvPr/>
+        </p:nvSpPr>
+        <p:spPr>
+          <a:xfrm>
+            <a:off x="658368" y="6473952"/>
+            <a:ext cx="9875520" cy="201168"/>
+          </a:xfrm>
+          <a:prstGeom prst="rect">
+            <a:avLst/>
+          </a:prstGeom>
+          <a:noFill/>
+        </p:spPr>
+        <p:txBody>
+          <a:bodyPr wrap="square" anchor="t">
+            <a:spAutoFit/>
+          </a:bodyPr>
+          <a:lstStyle/>
+          <a:p>
+            <a:pPr algn="l"/>
+            <a:r>
+              <a:rPr sz="800" b="0">
+                <a:solidFill>
+                  <a:srgbClr val="5B6372"/>
+                </a:solidFill>
+                <a:latin typeface="Arial"/>
+              </a:rPr>
+              <a:t>TGS-2026064178 · ACTIVITY PRACTICE · Tertiary Infotech Academy Pte Ltd</a:t>
+            </a:r>
+          </a:p>
+        </p:txBody>
+      </p:sp>
+      <p:sp>
+        <p:nvSpPr>
+          <p:cNvPr id="8" name="Rounded Rectangle 7"/>
+          <p:cNvSpPr/>
+          <p:nvPr/>
+        </p:nvSpPr>
+        <p:spPr>
+          <a:xfrm>
+            <a:off x="731520" y="1755648"/>
+            <a:ext cx="5166360" cy="1847088"/>
+          </a:xfrm>
+          <a:prstGeom prst="roundRect">
+            <a:avLst/>
+          </a:prstGeom>
+          <a:solidFill>
+            <a:srgbClr val="F5F8FC"/>
+          </a:solidFill>
+          <a:ln>
+            <a:solidFill>
+              <a:srgbClr val="E2E8F0"/>
+            </a:solidFill>
+          </a:ln>
+        </p:spPr>
+        <p:style>
+          <a:lnRef idx="1">
+            <a:schemeClr val="accent1"/>
+          </a:lnRef>
+          <a:fillRef idx="3">
+            <a:schemeClr val="accent1"/>
+          </a:fillRef>
+          <a:effectRef idx="2">
+            <a:schemeClr val="accent1"/>
+          </a:effectRef>
+          <a:fontRef idx="minor">
+            <a:schemeClr val="lt1"/>
+          </a:fontRef>
+        </p:style>
+        <p:txBody>
+          <a:bodyPr rtlCol="0" anchor="ctr"/>
+          <a:lstStyle/>
+          <a:p>
+            <a:pPr algn="ctr"/>
+          </a:p>
+        </p:txBody>
+      </p:sp>
+      <p:sp>
+        <p:nvSpPr>
+          <p:cNvPr id="9" name="Rectangle 8"/>
+          <p:cNvSpPr/>
+          <p:nvPr/>
+        </p:nvSpPr>
+        <p:spPr>
+          <a:xfrm>
+            <a:off x="731520" y="1755648"/>
+            <a:ext cx="73152" cy="1847088"/>
+          </a:xfrm>
+          <a:prstGeom prst="rect">
+            <a:avLst/>
+          </a:prstGeom>
+          <a:solidFill>
             <a:srgbClr val="1F6FEB"/>
           </a:solidFill>
           <a:ln>
@@ -3557,14 +3798,94 @@
       </p:sp>
       <p:sp>
         <p:nvSpPr>
-          <p:cNvPr id="4" name="TextBox 3"/>
+          <p:cNvPr id="10" name="Rounded Rectangle 9"/>
+          <p:cNvSpPr/>
+          <p:nvPr/>
+        </p:nvSpPr>
+        <p:spPr>
+          <a:xfrm>
+            <a:off x="932688" y="1975104"/>
+            <a:ext cx="438912" cy="438912"/>
+          </a:xfrm>
+          <a:prstGeom prst="roundRect">
+            <a:avLst/>
+          </a:prstGeom>
+          <a:solidFill>
+            <a:srgbClr val="1F6FEB"/>
+          </a:solidFill>
+          <a:ln>
+            <a:solidFill>
+              <a:srgbClr val="1F6FEB"/>
+            </a:solidFill>
+          </a:ln>
+        </p:spPr>
+        <p:style>
+          <a:lnRef idx="1">
+            <a:schemeClr val="accent1"/>
+          </a:lnRef>
+          <a:fillRef idx="3">
+            <a:schemeClr val="accent1"/>
+          </a:fillRef>
+          <a:effectRef idx="2">
+            <a:schemeClr val="accent1"/>
+          </a:effectRef>
+          <a:fontRef idx="minor">
+            <a:schemeClr val="lt1"/>
+          </a:fontRef>
+        </p:style>
+        <p:txBody>
+          <a:bodyPr rtlCol="0" anchor="ctr"/>
+          <a:lstStyle/>
+          <a:p>
+            <a:pPr algn="ctr"/>
+          </a:p>
+        </p:txBody>
+      </p:sp>
+      <p:sp>
+        <p:nvSpPr>
+          <p:cNvPr id="11" name="TextBox 10"/>
           <p:cNvSpPr txBox="1"/>
           <p:nvPr/>
         </p:nvSpPr>
         <p:spPr>
           <a:xfrm>
-            <a:off x="658368" y="384048"/>
-            <a:ext cx="10789920" cy="320040"/>
+            <a:off x="932688" y="1984248"/>
+            <a:ext cx="438912" cy="420624"/>
+          </a:xfrm>
+          <a:prstGeom prst="rect">
+            <a:avLst/>
+          </a:prstGeom>
+          <a:noFill/>
+        </p:spPr>
+        <p:txBody>
+          <a:bodyPr wrap="square" anchor="ctr">
+            <a:spAutoFit/>
+          </a:bodyPr>
+          <a:lstStyle/>
+          <a:p>
+            <a:pPr algn="ctr"/>
+            <a:r>
+              <a:rPr sz="1400" b="1">
+                <a:solidFill>
+                  <a:srgbClr val="FFFFFF"/>
+                </a:solidFill>
+                <a:latin typeface="Arial"/>
+              </a:rPr>
+              <a:t>1</a:t>
+            </a:r>
+          </a:p>
+        </p:txBody>
+      </p:sp>
+      <p:sp>
+        <p:nvSpPr>
+          <p:cNvPr id="12" name="TextBox 11"/>
+          <p:cNvSpPr txBox="1"/>
+          <p:nvPr/>
+        </p:nvSpPr>
+        <p:spPr>
+          <a:xfrm>
+            <a:off x="1536192" y="1938528"/>
+            <a:ext cx="4178808" cy="329184"/>
           </a:xfrm>
           <a:prstGeom prst="rect">
             <a:avLst/>
@@ -3579,27 +3900,27 @@
           <a:p>
             <a:pPr algn="l"/>
             <a:r>
-              <a:rPr sz="1100" b="1">
+              <a:rPr sz="1400" b="1">
                 <a:solidFill>
                   <a:srgbClr val="1F6FEB"/>
                 </a:solidFill>
                 <a:latin typeface="Arial"/>
               </a:rPr>
-              <a:t>ACTIVITY 02 · CONTEXT</a:t>
-            </a:r>
-          </a:p>
-        </p:txBody>
-      </p:sp>
-      <p:sp>
-        <p:nvSpPr>
-          <p:cNvPr id="5" name="TextBox 4"/>
+              <a:t>Data analyst</a:t>
+            </a:r>
+          </a:p>
+        </p:txBody>
+      </p:sp>
+      <p:sp>
+        <p:nvSpPr>
+          <p:cNvPr id="13" name="TextBox 12"/>
           <p:cNvSpPr txBox="1"/>
           <p:nvPr/>
         </p:nvSpPr>
         <p:spPr>
           <a:xfrm>
-            <a:off x="658368" y="749808"/>
-            <a:ext cx="10789920" cy="658368"/>
+            <a:off x="1536192" y="2322576"/>
+            <a:ext cx="4178808" cy="1133856"/>
           </a:xfrm>
           <a:prstGeom prst="rect">
             <a:avLst/>
@@ -3614,33 +3935,33 @@
           <a:p>
             <a:pPr algn="l"/>
             <a:r>
-              <a:rPr sz="2700" b="1">
+              <a:rPr sz="1150" b="0">
                 <a:solidFill>
                   <a:srgbClr val="161B26"/>
                 </a:solidFill>
                 <a:latin typeface="Arial"/>
               </a:rPr>
-              <a:t>The Scenario</a:t>
-            </a:r>
-          </a:p>
-        </p:txBody>
-      </p:sp>
-      <p:sp>
-        <p:nvSpPr>
-          <p:cNvPr id="6" name="Rectangle 5"/>
+              <a:t>Using only the attached approved sources, create a source register, identify duplicates or conflicting definitions, clean the table, show formulas or transformations, and return five candidate insights with citations, caveats and a con…</a:t>
+            </a:r>
+          </a:p>
+        </p:txBody>
+      </p:sp>
+      <p:sp>
+        <p:nvSpPr>
+          <p:cNvPr id="14" name="Rounded Rectangle 13"/>
           <p:cNvSpPr/>
           <p:nvPr/>
         </p:nvSpPr>
         <p:spPr>
           <a:xfrm>
-            <a:off x="658368" y="1444752"/>
-            <a:ext cx="10881360" cy="18288"/>
-          </a:xfrm>
-          <a:prstGeom prst="rect">
-            <a:avLst/>
-          </a:prstGeom>
-          <a:solidFill>
-            <a:srgbClr val="E2E8F0"/>
+            <a:off x="6144768" y="1755648"/>
+            <a:ext cx="5166360" cy="1847088"/>
+          </a:xfrm>
+          <a:prstGeom prst="roundRect">
+            <a:avLst/>
+          </a:prstGeom>
+          <a:solidFill>
+            <a:srgbClr val="F5F8FC"/>
           </a:solidFill>
           <a:ln>
             <a:solidFill>
@@ -3672,14 +3993,139 @@
       </p:sp>
       <p:sp>
         <p:nvSpPr>
-          <p:cNvPr id="7" name="TextBox 6"/>
+          <p:cNvPr id="15" name="Rectangle 14"/>
+          <p:cNvSpPr/>
+          <p:nvPr/>
+        </p:nvSpPr>
+        <p:spPr>
+          <a:xfrm>
+            <a:off x="6144768" y="1755648"/>
+            <a:ext cx="73152" cy="1847088"/>
+          </a:xfrm>
+          <a:prstGeom prst="rect">
+            <a:avLst/>
+          </a:prstGeom>
+          <a:solidFill>
+            <a:srgbClr val="10B981"/>
+          </a:solidFill>
+          <a:ln>
+            <a:solidFill>
+              <a:srgbClr val="10B981"/>
+            </a:solidFill>
+          </a:ln>
+        </p:spPr>
+        <p:style>
+          <a:lnRef idx="1">
+            <a:schemeClr val="accent1"/>
+          </a:lnRef>
+          <a:fillRef idx="3">
+            <a:schemeClr val="accent1"/>
+          </a:fillRef>
+          <a:effectRef idx="2">
+            <a:schemeClr val="accent1"/>
+          </a:effectRef>
+          <a:fontRef idx="minor">
+            <a:schemeClr val="lt1"/>
+          </a:fontRef>
+        </p:style>
+        <p:txBody>
+          <a:bodyPr rtlCol="0" anchor="ctr"/>
+          <a:lstStyle/>
+          <a:p>
+            <a:pPr algn="ctr"/>
+          </a:p>
+        </p:txBody>
+      </p:sp>
+      <p:sp>
+        <p:nvSpPr>
+          <p:cNvPr id="16" name="Rounded Rectangle 15"/>
+          <p:cNvSpPr/>
+          <p:nvPr/>
+        </p:nvSpPr>
+        <p:spPr>
+          <a:xfrm>
+            <a:off x="6345936" y="1975104"/>
+            <a:ext cx="438912" cy="438912"/>
+          </a:xfrm>
+          <a:prstGeom prst="roundRect">
+            <a:avLst/>
+          </a:prstGeom>
+          <a:solidFill>
+            <a:srgbClr val="10B981"/>
+          </a:solidFill>
+          <a:ln>
+            <a:solidFill>
+              <a:srgbClr val="10B981"/>
+            </a:solidFill>
+          </a:ln>
+        </p:spPr>
+        <p:style>
+          <a:lnRef idx="1">
+            <a:schemeClr val="accent1"/>
+          </a:lnRef>
+          <a:fillRef idx="3">
+            <a:schemeClr val="accent1"/>
+          </a:fillRef>
+          <a:effectRef idx="2">
+            <a:schemeClr val="accent1"/>
+          </a:effectRef>
+          <a:fontRef idx="minor">
+            <a:schemeClr val="lt1"/>
+          </a:fontRef>
+        </p:style>
+        <p:txBody>
+          <a:bodyPr rtlCol="0" anchor="ctr"/>
+          <a:lstStyle/>
+          <a:p>
+            <a:pPr algn="ctr"/>
+          </a:p>
+        </p:txBody>
+      </p:sp>
+      <p:sp>
+        <p:nvSpPr>
+          <p:cNvPr id="17" name="TextBox 16"/>
           <p:cNvSpPr txBox="1"/>
           <p:nvPr/>
         </p:nvSpPr>
         <p:spPr>
           <a:xfrm>
-            <a:off x="658368" y="6473952"/>
-            <a:ext cx="9875520" cy="201168"/>
+            <a:off x="6345936" y="1984248"/>
+            <a:ext cx="438912" cy="420624"/>
+          </a:xfrm>
+          <a:prstGeom prst="rect">
+            <a:avLst/>
+          </a:prstGeom>
+          <a:noFill/>
+        </p:spPr>
+        <p:txBody>
+          <a:bodyPr wrap="square" anchor="ctr">
+            <a:spAutoFit/>
+          </a:bodyPr>
+          <a:lstStyle/>
+          <a:p>
+            <a:pPr algn="ctr"/>
+            <a:r>
+              <a:rPr sz="1400" b="1">
+                <a:solidFill>
+                  <a:srgbClr val="FFFFFF"/>
+                </a:solidFill>
+                <a:latin typeface="Arial"/>
+              </a:rPr>
+              <a:t>2</a:t>
+            </a:r>
+          </a:p>
+        </p:txBody>
+      </p:sp>
+      <p:sp>
+        <p:nvSpPr>
+          <p:cNvPr id="18" name="TextBox 17"/>
+          <p:cNvSpPr txBox="1"/>
+          <p:nvPr/>
+        </p:nvSpPr>
+        <p:spPr>
+          <a:xfrm>
+            <a:off x="6949440" y="1938528"/>
+            <a:ext cx="4178808" cy="329184"/>
           </a:xfrm>
           <a:prstGeom prst="rect">
             <a:avLst/>
@@ -3694,27 +4140,62 @@
           <a:p>
             <a:pPr algn="l"/>
             <a:r>
-              <a:rPr sz="800" b="0">
-                <a:solidFill>
-                  <a:srgbClr val="5B6372"/>
+              <a:rPr sz="1400" b="1">
+                <a:solidFill>
+                  <a:srgbClr val="10B981"/>
                 </a:solidFill>
                 <a:latin typeface="Arial"/>
               </a:rPr>
-              <a:t>TGS-2024048310 · ACTIVITY PRACTICE · Tertiary Infotech Academy Pte Ltd</a:t>
-            </a:r>
-          </a:p>
-        </p:txBody>
-      </p:sp>
-      <p:sp>
-        <p:nvSpPr>
-          <p:cNvPr id="8" name="Rounded Rectangle 7"/>
+              <a:t>Infographic</a:t>
+            </a:r>
+          </a:p>
+        </p:txBody>
+      </p:sp>
+      <p:sp>
+        <p:nvSpPr>
+          <p:cNvPr id="19" name="TextBox 18"/>
+          <p:cNvSpPr txBox="1"/>
+          <p:nvPr/>
+        </p:nvSpPr>
+        <p:spPr>
+          <a:xfrm>
+            <a:off x="6949440" y="2322576"/>
+            <a:ext cx="4178808" cy="1133856"/>
+          </a:xfrm>
+          <a:prstGeom prst="rect">
+            <a:avLst/>
+          </a:prstGeom>
+          <a:noFill/>
+        </p:spPr>
+        <p:txBody>
+          <a:bodyPr wrap="square" anchor="t">
+            <a:spAutoFit/>
+          </a:bodyPr>
+          <a:lstStyle/>
+          <a:p>
+            <a:pPr algn="l"/>
+            <a:r>
+              <a:rPr sz="1150" b="0">
+                <a:solidFill>
+                  <a:srgbClr val="161B26"/>
+                </a:solidFill>
+                <a:latin typeface="Arial"/>
+              </a:rPr>
+              <a:t>Create a one-page executive infographic for Singapore retail managers. Lead with one decision insight, show three supporting metrics, include a five-stage flow and a source footer. Use a clean professional style, strong hierarchy and n…</a:t>
+            </a:r>
+          </a:p>
+        </p:txBody>
+      </p:sp>
+      <p:sp>
+        <p:nvSpPr>
+          <p:cNvPr id="20" name="Rounded Rectangle 19"/>
           <p:cNvSpPr/>
           <p:nvPr/>
         </p:nvSpPr>
         <p:spPr>
           <a:xfrm>
-            <a:off x="731520" y="1783080"/>
-            <a:ext cx="10698480" cy="1691640"/>
+            <a:off x="731520" y="3877056"/>
+            <a:ext cx="5166360" cy="1847088"/>
           </a:xfrm>
           <a:prstGeom prst="roundRect">
             <a:avLst/>
@@ -3752,24 +4233,24 @@
       </p:sp>
       <p:sp>
         <p:nvSpPr>
-          <p:cNvPr id="9" name="Rectangle 8"/>
+          <p:cNvPr id="21" name="Rectangle 20"/>
           <p:cNvSpPr/>
           <p:nvPr/>
         </p:nvSpPr>
         <p:spPr>
           <a:xfrm>
-            <a:off x="731520" y="1783080"/>
-            <a:ext cx="73152" cy="1691640"/>
-          </a:xfrm>
-          <a:prstGeom prst="rect">
-            <a:avLst/>
-          </a:prstGeom>
-          <a:solidFill>
-            <a:srgbClr val="1F6FEB"/>
+            <a:off x="731520" y="3877056"/>
+            <a:ext cx="73152" cy="1847088"/>
+          </a:xfrm>
+          <a:prstGeom prst="rect">
+            <a:avLst/>
+          </a:prstGeom>
+          <a:solidFill>
+            <a:srgbClr val="7C3AED"/>
           </a:solidFill>
           <a:ln>
             <a:solidFill>
-              <a:srgbClr val="1F6FEB"/>
+              <a:srgbClr val="7C3AED"/>
             </a:solidFill>
           </a:ln>
         </p:spPr>
@@ -3797,24 +4278,24 @@
       </p:sp>
       <p:sp>
         <p:nvSpPr>
-          <p:cNvPr id="10" name="Rounded Rectangle 9"/>
+          <p:cNvPr id="22" name="Rounded Rectangle 21"/>
           <p:cNvSpPr/>
           <p:nvPr/>
         </p:nvSpPr>
         <p:spPr>
           <a:xfrm>
-            <a:off x="932688" y="2002536"/>
+            <a:off x="932688" y="4096512"/>
             <a:ext cx="438912" cy="438912"/>
           </a:xfrm>
           <a:prstGeom prst="roundRect">
             <a:avLst/>
           </a:prstGeom>
           <a:solidFill>
-            <a:srgbClr val="1F6FEB"/>
+            <a:srgbClr val="7C3AED"/>
           </a:solidFill>
           <a:ln>
             <a:solidFill>
-              <a:srgbClr val="1F6FEB"/>
+              <a:srgbClr val="7C3AED"/>
             </a:solidFill>
           </a:ln>
         </p:spPr>
@@ -3842,13 +4323,13 @@
       </p:sp>
       <p:sp>
         <p:nvSpPr>
-          <p:cNvPr id="11" name="TextBox 10"/>
+          <p:cNvPr id="23" name="TextBox 22"/>
           <p:cNvSpPr txBox="1"/>
           <p:nvPr/>
         </p:nvSpPr>
         <p:spPr>
           <a:xfrm>
-            <a:off x="932688" y="2011680"/>
+            <a:off x="932688" y="4105656"/>
             <a:ext cx="438912" cy="420624"/>
           </a:xfrm>
           <a:prstGeom prst="rect">
@@ -3870,21 +4351,21 @@
                 </a:solidFill>
                 <a:latin typeface="Arial"/>
               </a:rPr>
-              <a:t>1</a:t>
-            </a:r>
-          </a:p>
-        </p:txBody>
-      </p:sp>
-      <p:sp>
-        <p:nvSpPr>
-          <p:cNvPr id="12" name="TextBox 11"/>
+              <a:t>3</a:t>
+            </a:r>
+          </a:p>
+        </p:txBody>
+      </p:sp>
+      <p:sp>
+        <p:nvSpPr>
+          <p:cNvPr id="24" name="TextBox 23"/>
           <p:cNvSpPr txBox="1"/>
           <p:nvPr/>
         </p:nvSpPr>
         <p:spPr>
           <a:xfrm>
-            <a:off x="1536192" y="1965960"/>
-            <a:ext cx="9710928" cy="329184"/>
+            <a:off x="1536192" y="4059936"/>
+            <a:ext cx="4178808" cy="329184"/>
           </a:xfrm>
           <a:prstGeom prst="rect">
             <a:avLst/>
@@ -3901,25 +4382,25 @@
             <a:r>
               <a:rPr sz="1400" b="1">
                 <a:solidFill>
-                  <a:srgbClr val="1F6FEB"/>
+                  <a:srgbClr val="7C3AED"/>
                 </a:solidFill>
                 <a:latin typeface="Arial"/>
               </a:rPr>
-              <a:t>Context</a:t>
-            </a:r>
-          </a:p>
-        </p:txBody>
-      </p:sp>
-      <p:sp>
-        <p:nvSpPr>
-          <p:cNvPr id="13" name="TextBox 12"/>
+              <a:t>Text to image</a:t>
+            </a:r>
+          </a:p>
+        </p:txBody>
+      </p:sp>
+      <p:sp>
+        <p:nvSpPr>
+          <p:cNvPr id="25" name="TextBox 24"/>
           <p:cNvSpPr txBox="1"/>
           <p:nvPr/>
         </p:nvSpPr>
         <p:spPr>
           <a:xfrm>
-            <a:off x="1536192" y="2350008"/>
-            <a:ext cx="9710928" cy="978408"/>
+            <a:off x="1536192" y="4443984"/>
+            <a:ext cx="4178808" cy="1133856"/>
           </a:xfrm>
           <a:prstGeom prst="rect">
             <a:avLst/>
@@ -3940,21 +4421,21 @@
                 </a:solidFill>
                 <a:latin typeface="Arial"/>
               </a:rPr>
-              <a:t>Northstar plans a sustainable-delivery campaign. The communication manager needs a portrait infographic showing the customer journey from order to low-emission delivery.</a:t>
-            </a:r>
-          </a:p>
-        </p:txBody>
-      </p:sp>
-      <p:sp>
-        <p:nvSpPr>
-          <p:cNvPr id="14" name="Rounded Rectangle 13"/>
+              <a:t>Create a clean vector-like sustainability delivery illustration for a PowerPoint infographic: one electric van, one reusable parcel, a simple route and a feedback symbol. Transparent background, consistent blue/teal/violet/amber palett…</a:t>
+            </a:r>
+          </a:p>
+        </p:txBody>
+      </p:sp>
+      <p:sp>
+        <p:nvSpPr>
+          <p:cNvPr id="26" name="Rounded Rectangle 25"/>
           <p:cNvSpPr/>
           <p:nvPr/>
         </p:nvSpPr>
         <p:spPr>
           <a:xfrm>
-            <a:off x="731520" y="3776472"/>
-            <a:ext cx="10698480" cy="1691640"/>
+            <a:off x="6144768" y="3877056"/>
+            <a:ext cx="5166360" cy="1847088"/>
           </a:xfrm>
           <a:prstGeom prst="roundRect">
             <a:avLst/>
@@ -3992,24 +4473,24 @@
       </p:sp>
       <p:sp>
         <p:nvSpPr>
-          <p:cNvPr id="15" name="Rectangle 14"/>
+          <p:cNvPr id="27" name="Rectangle 26"/>
           <p:cNvSpPr/>
           <p:nvPr/>
         </p:nvSpPr>
         <p:spPr>
           <a:xfrm>
-            <a:off x="731520" y="3776472"/>
-            <a:ext cx="73152" cy="1691640"/>
-          </a:xfrm>
-          <a:prstGeom prst="rect">
-            <a:avLst/>
-          </a:prstGeom>
-          <a:solidFill>
-            <a:srgbClr val="10B981"/>
+            <a:off x="6144768" y="3877056"/>
+            <a:ext cx="73152" cy="1847088"/>
+          </a:xfrm>
+          <a:prstGeom prst="rect">
+            <a:avLst/>
+          </a:prstGeom>
+          <a:solidFill>
+            <a:srgbClr val="F59E0B"/>
           </a:solidFill>
           <a:ln>
             <a:solidFill>
-              <a:srgbClr val="10B981"/>
+              <a:srgbClr val="F59E0B"/>
             </a:solidFill>
           </a:ln>
         </p:spPr>
@@ -4037,24 +4518,24 @@
       </p:sp>
       <p:sp>
         <p:nvSpPr>
-          <p:cNvPr id="16" name="Rounded Rectangle 15"/>
+          <p:cNvPr id="28" name="Rounded Rectangle 27"/>
           <p:cNvSpPr/>
           <p:nvPr/>
         </p:nvSpPr>
         <p:spPr>
           <a:xfrm>
-            <a:off x="932688" y="3995928"/>
+            <a:off x="6345936" y="4096512"/>
             <a:ext cx="438912" cy="438912"/>
           </a:xfrm>
           <a:prstGeom prst="roundRect">
             <a:avLst/>
           </a:prstGeom>
           <a:solidFill>
-            <a:srgbClr val="10B981"/>
+            <a:srgbClr val="F59E0B"/>
           </a:solidFill>
           <a:ln>
             <a:solidFill>
-              <a:srgbClr val="10B981"/>
+              <a:srgbClr val="F59E0B"/>
             </a:solidFill>
           </a:ln>
         </p:spPr>
@@ -4082,13 +4563,13 @@
       </p:sp>
       <p:sp>
         <p:nvSpPr>
-          <p:cNvPr id="17" name="TextBox 16"/>
+          <p:cNvPr id="29" name="TextBox 28"/>
           <p:cNvSpPr txBox="1"/>
           <p:nvPr/>
         </p:nvSpPr>
         <p:spPr>
           <a:xfrm>
-            <a:off x="932688" y="4005072"/>
+            <a:off x="6345936" y="4105656"/>
             <a:ext cx="438912" cy="420624"/>
           </a:xfrm>
           <a:prstGeom prst="rect">
@@ -4110,21 +4591,21 @@
                 </a:solidFill>
                 <a:latin typeface="Arial"/>
               </a:rPr>
-              <a:t>2</a:t>
-            </a:r>
-          </a:p>
-        </p:txBody>
-      </p:sp>
-      <p:sp>
-        <p:nvSpPr>
-          <p:cNvPr id="18" name="TextBox 17"/>
+              <a:t>4</a:t>
+            </a:r>
+          </a:p>
+        </p:txBody>
+      </p:sp>
+      <p:sp>
+        <p:nvSpPr>
+          <p:cNvPr id="30" name="TextBox 29"/>
           <p:cNvSpPr txBox="1"/>
           <p:nvPr/>
         </p:nvSpPr>
         <p:spPr>
           <a:xfrm>
-            <a:off x="1536192" y="3959352"/>
-            <a:ext cx="9710928" cy="329184"/>
+            <a:off x="6949440" y="4059936"/>
+            <a:ext cx="4178808" cy="329184"/>
           </a:xfrm>
           <a:prstGeom prst="rect">
             <a:avLst/>
@@ -4141,25 +4622,25 @@
             <a:r>
               <a:rPr sz="1400" b="1">
                 <a:solidFill>
-                  <a:srgbClr val="10B981"/>
+                  <a:srgbClr val="F59E0B"/>
                 </a:solidFill>
                 <a:latin typeface="Arial"/>
               </a:rPr>
-              <a:t>Decision pressure</a:t>
-            </a:r>
-          </a:p>
-        </p:txBody>
-      </p:sp>
-      <p:sp>
-        <p:nvSpPr>
-          <p:cNvPr id="19" name="TextBox 18"/>
+              <a:t>Gemini Notebook deck</a:t>
+            </a:r>
+          </a:p>
+        </p:txBody>
+      </p:sp>
+      <p:sp>
+        <p:nvSpPr>
+          <p:cNvPr id="31" name="TextBox 30"/>
           <p:cNvSpPr txBox="1"/>
           <p:nvPr/>
         </p:nvSpPr>
         <p:spPr>
           <a:xfrm>
-            <a:off x="1536192" y="4343400"/>
-            <a:ext cx="9710928" cy="978408"/>
+            <a:off x="6949440" y="4443984"/>
+            <a:ext cx="4178808" cy="1133856"/>
           </a:xfrm>
           <a:prstGeom prst="rect">
             <a:avLst/>
@@ -4180,7 +4661,7 @@
                 </a:solidFill>
                 <a:latin typeface="Arial"/>
               </a:rPr>
-              <a:t>Create a wireframe that can later be built manually, from a Microsoft infographic template or with AI assistance without changing the approved message.</a:t>
+              <a:t>Create Presenter Slides for business stakeholders. Focus on the verified decision insight, use a concise professional style, include source-grounded comparisons and a final recommendation. Avoid claims not supported by selected sources…</a:t>
             </a:r>
           </a:p>
         </p:txBody>
@@ -4263,6 +4744,486 @@
             <a:avLst/>
           </a:prstGeom>
           <a:solidFill>
+            <a:srgbClr val="1F6FEB"/>
+          </a:solidFill>
+          <a:ln>
+            <a:solidFill>
+              <a:srgbClr val="1F6FEB"/>
+            </a:solidFill>
+          </a:ln>
+        </p:spPr>
+        <p:style>
+          <a:lnRef idx="1">
+            <a:schemeClr val="accent1"/>
+          </a:lnRef>
+          <a:fillRef idx="3">
+            <a:schemeClr val="accent1"/>
+          </a:fillRef>
+          <a:effectRef idx="2">
+            <a:schemeClr val="accent1"/>
+          </a:effectRef>
+          <a:fontRef idx="minor">
+            <a:schemeClr val="lt1"/>
+          </a:fontRef>
+        </p:style>
+        <p:txBody>
+          <a:bodyPr rtlCol="0" anchor="ctr"/>
+          <a:lstStyle/>
+          <a:p>
+            <a:pPr algn="ctr"/>
+          </a:p>
+        </p:txBody>
+      </p:sp>
+      <p:sp>
+        <p:nvSpPr>
+          <p:cNvPr id="4" name="TextBox 3"/>
+          <p:cNvSpPr txBox="1"/>
+          <p:nvPr/>
+        </p:nvSpPr>
+        <p:spPr>
+          <a:xfrm>
+            <a:off x="658368" y="384048"/>
+            <a:ext cx="10789920" cy="320040"/>
+          </a:xfrm>
+          <a:prstGeom prst="rect">
+            <a:avLst/>
+          </a:prstGeom>
+          <a:noFill/>
+        </p:spPr>
+        <p:txBody>
+          <a:bodyPr wrap="square" anchor="t">
+            <a:spAutoFit/>
+          </a:bodyPr>
+          <a:lstStyle/>
+          <a:p>
+            <a:pPr algn="l"/>
+            <a:r>
+              <a:rPr sz="1100" b="1">
+                <a:solidFill>
+                  <a:srgbClr val="1F6FEB"/>
+                </a:solidFill>
+                <a:latin typeface="Arial"/>
+              </a:rPr>
+              <a:t>ACTIVITY 02 · CONTEXT</a:t>
+            </a:r>
+          </a:p>
+        </p:txBody>
+      </p:sp>
+      <p:sp>
+        <p:nvSpPr>
+          <p:cNvPr id="5" name="TextBox 4"/>
+          <p:cNvSpPr txBox="1"/>
+          <p:nvPr/>
+        </p:nvSpPr>
+        <p:spPr>
+          <a:xfrm>
+            <a:off x="658368" y="749808"/>
+            <a:ext cx="10789920" cy="658368"/>
+          </a:xfrm>
+          <a:prstGeom prst="rect">
+            <a:avLst/>
+          </a:prstGeom>
+          <a:noFill/>
+        </p:spPr>
+        <p:txBody>
+          <a:bodyPr wrap="square" anchor="t">
+            <a:spAutoFit/>
+          </a:bodyPr>
+          <a:lstStyle/>
+          <a:p>
+            <a:pPr algn="l"/>
+            <a:r>
+              <a:rPr sz="2700" b="1">
+                <a:solidFill>
+                  <a:srgbClr val="161B26"/>
+                </a:solidFill>
+                <a:latin typeface="Arial"/>
+              </a:rPr>
+              <a:t>The Scenario</a:t>
+            </a:r>
+          </a:p>
+        </p:txBody>
+      </p:sp>
+      <p:sp>
+        <p:nvSpPr>
+          <p:cNvPr id="6" name="Rectangle 5"/>
+          <p:cNvSpPr/>
+          <p:nvPr/>
+        </p:nvSpPr>
+        <p:spPr>
+          <a:xfrm>
+            <a:off x="658368" y="1444752"/>
+            <a:ext cx="10881360" cy="18288"/>
+          </a:xfrm>
+          <a:prstGeom prst="rect">
+            <a:avLst/>
+          </a:prstGeom>
+          <a:solidFill>
+            <a:srgbClr val="E2E8F0"/>
+          </a:solidFill>
+          <a:ln>
+            <a:solidFill>
+              <a:srgbClr val="E2E8F0"/>
+            </a:solidFill>
+          </a:ln>
+        </p:spPr>
+        <p:style>
+          <a:lnRef idx="1">
+            <a:schemeClr val="accent1"/>
+          </a:lnRef>
+          <a:fillRef idx="3">
+            <a:schemeClr val="accent1"/>
+          </a:fillRef>
+          <a:effectRef idx="2">
+            <a:schemeClr val="accent1"/>
+          </a:effectRef>
+          <a:fontRef idx="minor">
+            <a:schemeClr val="lt1"/>
+          </a:fontRef>
+        </p:style>
+        <p:txBody>
+          <a:bodyPr rtlCol="0" anchor="ctr"/>
+          <a:lstStyle/>
+          <a:p>
+            <a:pPr algn="ctr"/>
+          </a:p>
+        </p:txBody>
+      </p:sp>
+      <p:sp>
+        <p:nvSpPr>
+          <p:cNvPr id="7" name="TextBox 6"/>
+          <p:cNvSpPr txBox="1"/>
+          <p:nvPr/>
+        </p:nvSpPr>
+        <p:spPr>
+          <a:xfrm>
+            <a:off x="658368" y="6473952"/>
+            <a:ext cx="9875520" cy="201168"/>
+          </a:xfrm>
+          <a:prstGeom prst="rect">
+            <a:avLst/>
+          </a:prstGeom>
+          <a:noFill/>
+        </p:spPr>
+        <p:txBody>
+          <a:bodyPr wrap="square" anchor="t">
+            <a:spAutoFit/>
+          </a:bodyPr>
+          <a:lstStyle/>
+          <a:p>
+            <a:pPr algn="l"/>
+            <a:r>
+              <a:rPr sz="800" b="0">
+                <a:solidFill>
+                  <a:srgbClr val="5B6372"/>
+                </a:solidFill>
+                <a:latin typeface="Arial"/>
+              </a:rPr>
+              <a:t>TGS-2026064178 · ACTIVITY PRACTICE · Tertiary Infotech Academy Pte Ltd</a:t>
+            </a:r>
+          </a:p>
+        </p:txBody>
+      </p:sp>
+      <p:sp>
+        <p:nvSpPr>
+          <p:cNvPr id="8" name="Rounded Rectangle 7"/>
+          <p:cNvSpPr/>
+          <p:nvPr/>
+        </p:nvSpPr>
+        <p:spPr>
+          <a:xfrm>
+            <a:off x="731520" y="1783080"/>
+            <a:ext cx="10698480" cy="1691640"/>
+          </a:xfrm>
+          <a:prstGeom prst="roundRect">
+            <a:avLst/>
+          </a:prstGeom>
+          <a:solidFill>
+            <a:srgbClr val="F5F8FC"/>
+          </a:solidFill>
+          <a:ln>
+            <a:solidFill>
+              <a:srgbClr val="E2E8F0"/>
+            </a:solidFill>
+          </a:ln>
+        </p:spPr>
+        <p:style>
+          <a:lnRef idx="1">
+            <a:schemeClr val="accent1"/>
+          </a:lnRef>
+          <a:fillRef idx="3">
+            <a:schemeClr val="accent1"/>
+          </a:fillRef>
+          <a:effectRef idx="2">
+            <a:schemeClr val="accent1"/>
+          </a:effectRef>
+          <a:fontRef idx="minor">
+            <a:schemeClr val="lt1"/>
+          </a:fontRef>
+        </p:style>
+        <p:txBody>
+          <a:bodyPr rtlCol="0" anchor="ctr"/>
+          <a:lstStyle/>
+          <a:p>
+            <a:pPr algn="ctr"/>
+          </a:p>
+        </p:txBody>
+      </p:sp>
+      <p:sp>
+        <p:nvSpPr>
+          <p:cNvPr id="9" name="Rectangle 8"/>
+          <p:cNvSpPr/>
+          <p:nvPr/>
+        </p:nvSpPr>
+        <p:spPr>
+          <a:xfrm>
+            <a:off x="731520" y="1783080"/>
+            <a:ext cx="73152" cy="1691640"/>
+          </a:xfrm>
+          <a:prstGeom prst="rect">
+            <a:avLst/>
+          </a:prstGeom>
+          <a:solidFill>
+            <a:srgbClr val="1F6FEB"/>
+          </a:solidFill>
+          <a:ln>
+            <a:solidFill>
+              <a:srgbClr val="1F6FEB"/>
+            </a:solidFill>
+          </a:ln>
+        </p:spPr>
+        <p:style>
+          <a:lnRef idx="1">
+            <a:schemeClr val="accent1"/>
+          </a:lnRef>
+          <a:fillRef idx="3">
+            <a:schemeClr val="accent1"/>
+          </a:fillRef>
+          <a:effectRef idx="2">
+            <a:schemeClr val="accent1"/>
+          </a:effectRef>
+          <a:fontRef idx="minor">
+            <a:schemeClr val="lt1"/>
+          </a:fontRef>
+        </p:style>
+        <p:txBody>
+          <a:bodyPr rtlCol="0" anchor="ctr"/>
+          <a:lstStyle/>
+          <a:p>
+            <a:pPr algn="ctr"/>
+          </a:p>
+        </p:txBody>
+      </p:sp>
+      <p:sp>
+        <p:nvSpPr>
+          <p:cNvPr id="10" name="Rounded Rectangle 9"/>
+          <p:cNvSpPr/>
+          <p:nvPr/>
+        </p:nvSpPr>
+        <p:spPr>
+          <a:xfrm>
+            <a:off x="932688" y="2002536"/>
+            <a:ext cx="438912" cy="438912"/>
+          </a:xfrm>
+          <a:prstGeom prst="roundRect">
+            <a:avLst/>
+          </a:prstGeom>
+          <a:solidFill>
+            <a:srgbClr val="1F6FEB"/>
+          </a:solidFill>
+          <a:ln>
+            <a:solidFill>
+              <a:srgbClr val="1F6FEB"/>
+            </a:solidFill>
+          </a:ln>
+        </p:spPr>
+        <p:style>
+          <a:lnRef idx="1">
+            <a:schemeClr val="accent1"/>
+          </a:lnRef>
+          <a:fillRef idx="3">
+            <a:schemeClr val="accent1"/>
+          </a:fillRef>
+          <a:effectRef idx="2">
+            <a:schemeClr val="accent1"/>
+          </a:effectRef>
+          <a:fontRef idx="minor">
+            <a:schemeClr val="lt1"/>
+          </a:fontRef>
+        </p:style>
+        <p:txBody>
+          <a:bodyPr rtlCol="0" anchor="ctr"/>
+          <a:lstStyle/>
+          <a:p>
+            <a:pPr algn="ctr"/>
+          </a:p>
+        </p:txBody>
+      </p:sp>
+      <p:sp>
+        <p:nvSpPr>
+          <p:cNvPr id="11" name="TextBox 10"/>
+          <p:cNvSpPr txBox="1"/>
+          <p:nvPr/>
+        </p:nvSpPr>
+        <p:spPr>
+          <a:xfrm>
+            <a:off x="932688" y="2011680"/>
+            <a:ext cx="438912" cy="420624"/>
+          </a:xfrm>
+          <a:prstGeom prst="rect">
+            <a:avLst/>
+          </a:prstGeom>
+          <a:noFill/>
+        </p:spPr>
+        <p:txBody>
+          <a:bodyPr wrap="square" anchor="ctr">
+            <a:spAutoFit/>
+          </a:bodyPr>
+          <a:lstStyle/>
+          <a:p>
+            <a:pPr algn="ctr"/>
+            <a:r>
+              <a:rPr sz="1400" b="1">
+                <a:solidFill>
+                  <a:srgbClr val="FFFFFF"/>
+                </a:solidFill>
+                <a:latin typeface="Arial"/>
+              </a:rPr>
+              <a:t>1</a:t>
+            </a:r>
+          </a:p>
+        </p:txBody>
+      </p:sp>
+      <p:sp>
+        <p:nvSpPr>
+          <p:cNvPr id="12" name="TextBox 11"/>
+          <p:cNvSpPr txBox="1"/>
+          <p:nvPr/>
+        </p:nvSpPr>
+        <p:spPr>
+          <a:xfrm>
+            <a:off x="1536192" y="1965960"/>
+            <a:ext cx="9710928" cy="329184"/>
+          </a:xfrm>
+          <a:prstGeom prst="rect">
+            <a:avLst/>
+          </a:prstGeom>
+          <a:noFill/>
+        </p:spPr>
+        <p:txBody>
+          <a:bodyPr wrap="square" anchor="t">
+            <a:spAutoFit/>
+          </a:bodyPr>
+          <a:lstStyle/>
+          <a:p>
+            <a:pPr algn="l"/>
+            <a:r>
+              <a:rPr sz="1400" b="1">
+                <a:solidFill>
+                  <a:srgbClr val="1F6FEB"/>
+                </a:solidFill>
+                <a:latin typeface="Arial"/>
+              </a:rPr>
+              <a:t>Context</a:t>
+            </a:r>
+          </a:p>
+        </p:txBody>
+      </p:sp>
+      <p:sp>
+        <p:nvSpPr>
+          <p:cNvPr id="13" name="TextBox 12"/>
+          <p:cNvSpPr txBox="1"/>
+          <p:nvPr/>
+        </p:nvSpPr>
+        <p:spPr>
+          <a:xfrm>
+            <a:off x="1536192" y="2350008"/>
+            <a:ext cx="9710928" cy="978408"/>
+          </a:xfrm>
+          <a:prstGeom prst="rect">
+            <a:avLst/>
+          </a:prstGeom>
+          <a:noFill/>
+        </p:spPr>
+        <p:txBody>
+          <a:bodyPr wrap="square" anchor="t">
+            <a:spAutoFit/>
+          </a:bodyPr>
+          <a:lstStyle/>
+          <a:p>
+            <a:pPr algn="l"/>
+            <a:r>
+              <a:rPr sz="1150" b="0">
+                <a:solidFill>
+                  <a:srgbClr val="161B26"/>
+                </a:solidFill>
+                <a:latin typeface="Arial"/>
+              </a:rPr>
+              <a:t>Northstar plans a sustainable-delivery campaign. The communication manager needs a portrait infographic showing the customer journey from order to low-emission delivery.</a:t>
+            </a:r>
+          </a:p>
+        </p:txBody>
+      </p:sp>
+      <p:sp>
+        <p:nvSpPr>
+          <p:cNvPr id="14" name="Rounded Rectangle 13"/>
+          <p:cNvSpPr/>
+          <p:nvPr/>
+        </p:nvSpPr>
+        <p:spPr>
+          <a:xfrm>
+            <a:off x="731520" y="3776472"/>
+            <a:ext cx="10698480" cy="1691640"/>
+          </a:xfrm>
+          <a:prstGeom prst="roundRect">
+            <a:avLst/>
+          </a:prstGeom>
+          <a:solidFill>
+            <a:srgbClr val="F5F8FC"/>
+          </a:solidFill>
+          <a:ln>
+            <a:solidFill>
+              <a:srgbClr val="E2E8F0"/>
+            </a:solidFill>
+          </a:ln>
+        </p:spPr>
+        <p:style>
+          <a:lnRef idx="1">
+            <a:schemeClr val="accent1"/>
+          </a:lnRef>
+          <a:fillRef idx="3">
+            <a:schemeClr val="accent1"/>
+          </a:fillRef>
+          <a:effectRef idx="2">
+            <a:schemeClr val="accent1"/>
+          </a:effectRef>
+          <a:fontRef idx="minor">
+            <a:schemeClr val="lt1"/>
+          </a:fontRef>
+        </p:style>
+        <p:txBody>
+          <a:bodyPr rtlCol="0" anchor="ctr"/>
+          <a:lstStyle/>
+          <a:p>
+            <a:pPr algn="ctr"/>
+          </a:p>
+        </p:txBody>
+      </p:sp>
+      <p:sp>
+        <p:nvSpPr>
+          <p:cNvPr id="15" name="Rectangle 14"/>
+          <p:cNvSpPr/>
+          <p:nvPr/>
+        </p:nvSpPr>
+        <p:spPr>
+          <a:xfrm>
+            <a:off x="731520" y="3776472"/>
+            <a:ext cx="73152" cy="1691640"/>
+          </a:xfrm>
+          <a:prstGeom prst="rect">
+            <a:avLst/>
+          </a:prstGeom>
+          <a:solidFill>
             <a:srgbClr val="10B981"/>
           </a:solidFill>
           <a:ln>
@@ -4295,94 +5256,24 @@
       </p:sp>
       <p:sp>
         <p:nvSpPr>
-          <p:cNvPr id="4" name="TextBox 3"/>
-          <p:cNvSpPr txBox="1"/>
-          <p:nvPr/>
-        </p:nvSpPr>
-        <p:spPr>
-          <a:xfrm>
-            <a:off x="658368" y="384048"/>
-            <a:ext cx="10789920" cy="320040"/>
-          </a:xfrm>
-          <a:prstGeom prst="rect">
-            <a:avLst/>
-          </a:prstGeom>
-          <a:noFill/>
-        </p:spPr>
-        <p:txBody>
-          <a:bodyPr wrap="square" anchor="t">
-            <a:spAutoFit/>
-          </a:bodyPr>
-          <a:lstStyle/>
-          <a:p>
-            <a:pPr algn="l"/>
-            <a:r>
-              <a:rPr sz="1100" b="1">
-                <a:solidFill>
-                  <a:srgbClr val="10B981"/>
-                </a:solidFill>
-                <a:latin typeface="Arial"/>
-              </a:rPr>
-              <a:t>ACTIVITY 02 · FRAMEWORK</a:t>
-            </a:r>
-          </a:p>
-        </p:txBody>
-      </p:sp>
-      <p:sp>
-        <p:nvSpPr>
-          <p:cNvPr id="5" name="TextBox 4"/>
-          <p:cNvSpPr txBox="1"/>
-          <p:nvPr/>
-        </p:nvSpPr>
-        <p:spPr>
-          <a:xfrm>
-            <a:off x="658368" y="749808"/>
-            <a:ext cx="10789920" cy="658368"/>
-          </a:xfrm>
-          <a:prstGeom prst="rect">
-            <a:avLst/>
-          </a:prstGeom>
-          <a:noFill/>
-        </p:spPr>
-        <p:txBody>
-          <a:bodyPr wrap="square" anchor="t">
-            <a:spAutoFit/>
-          </a:bodyPr>
-          <a:lstStyle/>
-          <a:p>
-            <a:pPr algn="l"/>
-            <a:r>
-              <a:rPr sz="2700" b="1">
-                <a:solidFill>
-                  <a:srgbClr val="161B26"/>
-                </a:solidFill>
-                <a:latin typeface="Arial"/>
-              </a:rPr>
-              <a:t>Plan Before Styling</a:t>
-            </a:r>
-          </a:p>
-        </p:txBody>
-      </p:sp>
-      <p:sp>
-        <p:nvSpPr>
-          <p:cNvPr id="6" name="Rectangle 5"/>
+          <p:cNvPr id="16" name="Rounded Rectangle 15"/>
           <p:cNvSpPr/>
           <p:nvPr/>
         </p:nvSpPr>
         <p:spPr>
           <a:xfrm>
-            <a:off x="658368" y="1444752"/>
-            <a:ext cx="10881360" cy="18288"/>
-          </a:xfrm>
-          <a:prstGeom prst="rect">
-            <a:avLst/>
-          </a:prstGeom>
-          <a:solidFill>
-            <a:srgbClr val="E2E8F0"/>
+            <a:off x="932688" y="3995928"/>
+            <a:ext cx="438912" cy="438912"/>
+          </a:xfrm>
+          <a:prstGeom prst="roundRect">
+            <a:avLst/>
+          </a:prstGeom>
+          <a:solidFill>
+            <a:srgbClr val="10B981"/>
           </a:solidFill>
           <a:ln>
             <a:solidFill>
-              <a:srgbClr val="E2E8F0"/>
+              <a:srgbClr val="10B981"/>
             </a:solidFill>
           </a:ln>
         </p:spPr>
@@ -4410,14 +5301,49 @@
       </p:sp>
       <p:sp>
         <p:nvSpPr>
-          <p:cNvPr id="7" name="TextBox 6"/>
+          <p:cNvPr id="17" name="TextBox 16"/>
           <p:cNvSpPr txBox="1"/>
           <p:nvPr/>
         </p:nvSpPr>
         <p:spPr>
           <a:xfrm>
-            <a:off x="658368" y="6473952"/>
-            <a:ext cx="9875520" cy="201168"/>
+            <a:off x="932688" y="4005072"/>
+            <a:ext cx="438912" cy="420624"/>
+          </a:xfrm>
+          <a:prstGeom prst="rect">
+            <a:avLst/>
+          </a:prstGeom>
+          <a:noFill/>
+        </p:spPr>
+        <p:txBody>
+          <a:bodyPr wrap="square" anchor="ctr">
+            <a:spAutoFit/>
+          </a:bodyPr>
+          <a:lstStyle/>
+          <a:p>
+            <a:pPr algn="ctr"/>
+            <a:r>
+              <a:rPr sz="1400" b="1">
+                <a:solidFill>
+                  <a:srgbClr val="FFFFFF"/>
+                </a:solidFill>
+                <a:latin typeface="Arial"/>
+              </a:rPr>
+              <a:t>2</a:t>
+            </a:r>
+          </a:p>
+        </p:txBody>
+      </p:sp>
+      <p:sp>
+        <p:nvSpPr>
+          <p:cNvPr id="18" name="TextBox 17"/>
+          <p:cNvSpPr txBox="1"/>
+          <p:nvPr/>
+        </p:nvSpPr>
+        <p:spPr>
+          <a:xfrm>
+            <a:off x="1536192" y="3959352"/>
+            <a:ext cx="9710928" cy="329184"/>
           </a:xfrm>
           <a:prstGeom prst="rect">
             <a:avLst/>
@@ -4432,197 +5358,27 @@
           <a:p>
             <a:pPr algn="l"/>
             <a:r>
-              <a:rPr sz="800" b="0">
-                <a:solidFill>
-                  <a:srgbClr val="5B6372"/>
+              <a:rPr sz="1400" b="1">
+                <a:solidFill>
+                  <a:srgbClr val="10B981"/>
                 </a:solidFill>
                 <a:latin typeface="Arial"/>
               </a:rPr>
-              <a:t>TGS-2024048310 · ACTIVITY PRACTICE · Tertiary Infotech Academy Pte Ltd</a:t>
-            </a:r>
-          </a:p>
-        </p:txBody>
-      </p:sp>
-      <p:sp>
-        <p:nvSpPr>
-          <p:cNvPr id="8" name="Rounded Rectangle 7"/>
-          <p:cNvSpPr/>
-          <p:nvPr/>
-        </p:nvSpPr>
-        <p:spPr>
-          <a:xfrm>
-            <a:off x="685800" y="1920240"/>
-            <a:ext cx="1997049" cy="3566160"/>
-          </a:xfrm>
-          <a:prstGeom prst="roundRect">
-            <a:avLst/>
-          </a:prstGeom>
-          <a:solidFill>
-            <a:srgbClr val="F5F8FC"/>
-          </a:solidFill>
-          <a:ln>
-            <a:solidFill>
-              <a:srgbClr val="E2E8F0"/>
-            </a:solidFill>
-          </a:ln>
-        </p:spPr>
-        <p:style>
-          <a:lnRef idx="1">
-            <a:schemeClr val="accent1"/>
-          </a:lnRef>
-          <a:fillRef idx="3">
-            <a:schemeClr val="accent1"/>
-          </a:fillRef>
-          <a:effectRef idx="2">
-            <a:schemeClr val="accent1"/>
-          </a:effectRef>
-          <a:fontRef idx="minor">
-            <a:schemeClr val="lt1"/>
-          </a:fontRef>
-        </p:style>
-        <p:txBody>
-          <a:bodyPr rtlCol="0" anchor="ctr"/>
-          <a:lstStyle/>
-          <a:p>
-            <a:pPr algn="ctr"/>
-          </a:p>
-        </p:txBody>
-      </p:sp>
-      <p:sp>
-        <p:nvSpPr>
-          <p:cNvPr id="9" name="Rectangle 8"/>
-          <p:cNvSpPr/>
-          <p:nvPr/>
-        </p:nvSpPr>
-        <p:spPr>
-          <a:xfrm>
-            <a:off x="685800" y="1920240"/>
-            <a:ext cx="73152" cy="3566160"/>
-          </a:xfrm>
-          <a:prstGeom prst="rect">
-            <a:avLst/>
-          </a:prstGeom>
-          <a:solidFill>
-            <a:srgbClr val="1F6FEB"/>
-          </a:solidFill>
-          <a:ln>
-            <a:solidFill>
-              <a:srgbClr val="1F6FEB"/>
-            </a:solidFill>
-          </a:ln>
-        </p:spPr>
-        <p:style>
-          <a:lnRef idx="1">
-            <a:schemeClr val="accent1"/>
-          </a:lnRef>
-          <a:fillRef idx="3">
-            <a:schemeClr val="accent1"/>
-          </a:fillRef>
-          <a:effectRef idx="2">
-            <a:schemeClr val="accent1"/>
-          </a:effectRef>
-          <a:fontRef idx="minor">
-            <a:schemeClr val="lt1"/>
-          </a:fontRef>
-        </p:style>
-        <p:txBody>
-          <a:bodyPr rtlCol="0" anchor="ctr"/>
-          <a:lstStyle/>
-          <a:p>
-            <a:pPr algn="ctr"/>
-          </a:p>
-        </p:txBody>
-      </p:sp>
-      <p:sp>
-        <p:nvSpPr>
-          <p:cNvPr id="10" name="Rounded Rectangle 9"/>
-          <p:cNvSpPr/>
-          <p:nvPr/>
-        </p:nvSpPr>
-        <p:spPr>
-          <a:xfrm>
-            <a:off x="886968" y="2139696"/>
-            <a:ext cx="438912" cy="438912"/>
-          </a:xfrm>
-          <a:prstGeom prst="roundRect">
-            <a:avLst/>
-          </a:prstGeom>
-          <a:solidFill>
-            <a:srgbClr val="1F6FEB"/>
-          </a:solidFill>
-          <a:ln>
-            <a:solidFill>
-              <a:srgbClr val="1F6FEB"/>
-            </a:solidFill>
-          </a:ln>
-        </p:spPr>
-        <p:style>
-          <a:lnRef idx="1">
-            <a:schemeClr val="accent1"/>
-          </a:lnRef>
-          <a:fillRef idx="3">
-            <a:schemeClr val="accent1"/>
-          </a:fillRef>
-          <a:effectRef idx="2">
-            <a:schemeClr val="accent1"/>
-          </a:effectRef>
-          <a:fontRef idx="minor">
-            <a:schemeClr val="lt1"/>
-          </a:fontRef>
-        </p:style>
-        <p:txBody>
-          <a:bodyPr rtlCol="0" anchor="ctr"/>
-          <a:lstStyle/>
-          <a:p>
-            <a:pPr algn="ctr"/>
-          </a:p>
-        </p:txBody>
-      </p:sp>
-      <p:sp>
-        <p:nvSpPr>
-          <p:cNvPr id="11" name="TextBox 10"/>
+              <a:t>Decision pressure</a:t>
+            </a:r>
+          </a:p>
+        </p:txBody>
+      </p:sp>
+      <p:sp>
+        <p:nvSpPr>
+          <p:cNvPr id="19" name="TextBox 18"/>
           <p:cNvSpPr txBox="1"/>
           <p:nvPr/>
         </p:nvSpPr>
         <p:spPr>
           <a:xfrm>
-            <a:off x="886968" y="2148840"/>
-            <a:ext cx="438912" cy="420624"/>
-          </a:xfrm>
-          <a:prstGeom prst="rect">
-            <a:avLst/>
-          </a:prstGeom>
-          <a:noFill/>
-        </p:spPr>
-        <p:txBody>
-          <a:bodyPr wrap="square" anchor="ctr">
-            <a:spAutoFit/>
-          </a:bodyPr>
-          <a:lstStyle/>
-          <a:p>
-            <a:pPr algn="ctr"/>
-            <a:r>
-              <a:rPr sz="1400" b="1">
-                <a:solidFill>
-                  <a:srgbClr val="FFFFFF"/>
-                </a:solidFill>
-                <a:latin typeface="Arial"/>
-              </a:rPr>
-              <a:t>1</a:t>
-            </a:r>
-          </a:p>
-        </p:txBody>
-      </p:sp>
-      <p:sp>
-        <p:nvSpPr>
-          <p:cNvPr id="12" name="TextBox 11"/>
-          <p:cNvSpPr txBox="1"/>
-          <p:nvPr/>
-        </p:nvSpPr>
-        <p:spPr>
-          <a:xfrm>
-            <a:off x="1490472" y="2103120"/>
-            <a:ext cx="1009497" cy="329184"/>
+            <a:off x="1536192" y="4343400"/>
+            <a:ext cx="9710928" cy="978408"/>
           </a:xfrm>
           <a:prstGeom prst="rect">
             <a:avLst/>
@@ -4637,1008 +5393,13 @@
           <a:p>
             <a:pPr algn="l"/>
             <a:r>
-              <a:rPr sz="1400" b="1">
-                <a:solidFill>
-                  <a:srgbClr val="1F6FEB"/>
+              <a:rPr sz="1150" b="0">
+                <a:solidFill>
+                  <a:srgbClr val="161B26"/>
                 </a:solidFill>
                 <a:latin typeface="Arial"/>
               </a:rPr>
-              <a:t>Define</a:t>
-            </a:r>
-          </a:p>
-        </p:txBody>
-      </p:sp>
-      <p:sp>
-        <p:nvSpPr>
-          <p:cNvPr id="13" name="TextBox 12"/>
-          <p:cNvSpPr txBox="1"/>
-          <p:nvPr/>
-        </p:nvSpPr>
-        <p:spPr>
-          <a:xfrm>
-            <a:off x="1490472" y="2487168"/>
-            <a:ext cx="1009497" cy="2852928"/>
-          </a:xfrm>
-          <a:prstGeom prst="rect">
-            <a:avLst/>
-          </a:prstGeom>
-          <a:noFill/>
-        </p:spPr>
-        <p:txBody>
-          <a:bodyPr wrap="square" anchor="t">
-            <a:spAutoFit/>
-          </a:bodyPr>
-          <a:lstStyle/>
-          <a:p>
-            <a:pPr algn="l"/>
-            <a:r>
-              <a:rPr sz="1150" b="0">
-                <a:solidFill>
-                  <a:srgbClr val="161B26"/>
-                </a:solidFill>
-                <a:latin typeface="Arial"/>
-              </a:rPr>
-              <a:t>Write the objective and audience question.</a:t>
-            </a:r>
-          </a:p>
-        </p:txBody>
-      </p:sp>
-      <p:sp>
-        <p:nvSpPr>
-          <p:cNvPr id="14" name="Rounded Rectangle 13"/>
-          <p:cNvSpPr/>
-          <p:nvPr/>
-        </p:nvSpPr>
-        <p:spPr>
-          <a:xfrm>
-            <a:off x="2884017" y="1920240"/>
-            <a:ext cx="1997049" cy="3566160"/>
-          </a:xfrm>
-          <a:prstGeom prst="roundRect">
-            <a:avLst/>
-          </a:prstGeom>
-          <a:solidFill>
-            <a:srgbClr val="F5F8FC"/>
-          </a:solidFill>
-          <a:ln>
-            <a:solidFill>
-              <a:srgbClr val="E2E8F0"/>
-            </a:solidFill>
-          </a:ln>
-        </p:spPr>
-        <p:style>
-          <a:lnRef idx="1">
-            <a:schemeClr val="accent1"/>
-          </a:lnRef>
-          <a:fillRef idx="3">
-            <a:schemeClr val="accent1"/>
-          </a:fillRef>
-          <a:effectRef idx="2">
-            <a:schemeClr val="accent1"/>
-          </a:effectRef>
-          <a:fontRef idx="minor">
-            <a:schemeClr val="lt1"/>
-          </a:fontRef>
-        </p:style>
-        <p:txBody>
-          <a:bodyPr rtlCol="0" anchor="ctr"/>
-          <a:lstStyle/>
-          <a:p>
-            <a:pPr algn="ctr"/>
-          </a:p>
-        </p:txBody>
-      </p:sp>
-      <p:sp>
-        <p:nvSpPr>
-          <p:cNvPr id="15" name="Rectangle 14"/>
-          <p:cNvSpPr/>
-          <p:nvPr/>
-        </p:nvSpPr>
-        <p:spPr>
-          <a:xfrm>
-            <a:off x="2884017" y="1920240"/>
-            <a:ext cx="73152" cy="3566160"/>
-          </a:xfrm>
-          <a:prstGeom prst="rect">
-            <a:avLst/>
-          </a:prstGeom>
-          <a:solidFill>
-            <a:srgbClr val="10B981"/>
-          </a:solidFill>
-          <a:ln>
-            <a:solidFill>
-              <a:srgbClr val="10B981"/>
-            </a:solidFill>
-          </a:ln>
-        </p:spPr>
-        <p:style>
-          <a:lnRef idx="1">
-            <a:schemeClr val="accent1"/>
-          </a:lnRef>
-          <a:fillRef idx="3">
-            <a:schemeClr val="accent1"/>
-          </a:fillRef>
-          <a:effectRef idx="2">
-            <a:schemeClr val="accent1"/>
-          </a:effectRef>
-          <a:fontRef idx="minor">
-            <a:schemeClr val="lt1"/>
-          </a:fontRef>
-        </p:style>
-        <p:txBody>
-          <a:bodyPr rtlCol="0" anchor="ctr"/>
-          <a:lstStyle/>
-          <a:p>
-            <a:pPr algn="ctr"/>
-          </a:p>
-        </p:txBody>
-      </p:sp>
-      <p:sp>
-        <p:nvSpPr>
-          <p:cNvPr id="16" name="Rounded Rectangle 15"/>
-          <p:cNvSpPr/>
-          <p:nvPr/>
-        </p:nvSpPr>
-        <p:spPr>
-          <a:xfrm>
-            <a:off x="3085185" y="2139696"/>
-            <a:ext cx="438912" cy="438912"/>
-          </a:xfrm>
-          <a:prstGeom prst="roundRect">
-            <a:avLst/>
-          </a:prstGeom>
-          <a:solidFill>
-            <a:srgbClr val="10B981"/>
-          </a:solidFill>
-          <a:ln>
-            <a:solidFill>
-              <a:srgbClr val="10B981"/>
-            </a:solidFill>
-          </a:ln>
-        </p:spPr>
-        <p:style>
-          <a:lnRef idx="1">
-            <a:schemeClr val="accent1"/>
-          </a:lnRef>
-          <a:fillRef idx="3">
-            <a:schemeClr val="accent1"/>
-          </a:fillRef>
-          <a:effectRef idx="2">
-            <a:schemeClr val="accent1"/>
-          </a:effectRef>
-          <a:fontRef idx="minor">
-            <a:schemeClr val="lt1"/>
-          </a:fontRef>
-        </p:style>
-        <p:txBody>
-          <a:bodyPr rtlCol="0" anchor="ctr"/>
-          <a:lstStyle/>
-          <a:p>
-            <a:pPr algn="ctr"/>
-          </a:p>
-        </p:txBody>
-      </p:sp>
-      <p:sp>
-        <p:nvSpPr>
-          <p:cNvPr id="17" name="TextBox 16"/>
-          <p:cNvSpPr txBox="1"/>
-          <p:nvPr/>
-        </p:nvSpPr>
-        <p:spPr>
-          <a:xfrm>
-            <a:off x="3085185" y="2148840"/>
-            <a:ext cx="438912" cy="420624"/>
-          </a:xfrm>
-          <a:prstGeom prst="rect">
-            <a:avLst/>
-          </a:prstGeom>
-          <a:noFill/>
-        </p:spPr>
-        <p:txBody>
-          <a:bodyPr wrap="square" anchor="ctr">
-            <a:spAutoFit/>
-          </a:bodyPr>
-          <a:lstStyle/>
-          <a:p>
-            <a:pPr algn="ctr"/>
-            <a:r>
-              <a:rPr sz="1400" b="1">
-                <a:solidFill>
-                  <a:srgbClr val="FFFFFF"/>
-                </a:solidFill>
-                <a:latin typeface="Arial"/>
-              </a:rPr>
-              <a:t>2</a:t>
-            </a:r>
-          </a:p>
-        </p:txBody>
-      </p:sp>
-      <p:sp>
-        <p:nvSpPr>
-          <p:cNvPr id="18" name="TextBox 17"/>
-          <p:cNvSpPr txBox="1"/>
-          <p:nvPr/>
-        </p:nvSpPr>
-        <p:spPr>
-          <a:xfrm>
-            <a:off x="3688689" y="2103120"/>
-            <a:ext cx="1009497" cy="329184"/>
-          </a:xfrm>
-          <a:prstGeom prst="rect">
-            <a:avLst/>
-          </a:prstGeom>
-          <a:noFill/>
-        </p:spPr>
-        <p:txBody>
-          <a:bodyPr wrap="square" anchor="t">
-            <a:spAutoFit/>
-          </a:bodyPr>
-          <a:lstStyle/>
-          <a:p>
-            <a:pPr algn="l"/>
-            <a:r>
-              <a:rPr sz="1400" b="1">
-                <a:solidFill>
-                  <a:srgbClr val="10B981"/>
-                </a:solidFill>
-                <a:latin typeface="Arial"/>
-              </a:rPr>
-              <a:t>Curate</a:t>
-            </a:r>
-          </a:p>
-        </p:txBody>
-      </p:sp>
-      <p:sp>
-        <p:nvSpPr>
-          <p:cNvPr id="19" name="TextBox 18"/>
-          <p:cNvSpPr txBox="1"/>
-          <p:nvPr/>
-        </p:nvSpPr>
-        <p:spPr>
-          <a:xfrm>
-            <a:off x="3688689" y="2487168"/>
-            <a:ext cx="1009497" cy="2852928"/>
-          </a:xfrm>
-          <a:prstGeom prst="rect">
-            <a:avLst/>
-          </a:prstGeom>
-          <a:noFill/>
-        </p:spPr>
-        <p:txBody>
-          <a:bodyPr wrap="square" anchor="t">
-            <a:spAutoFit/>
-          </a:bodyPr>
-          <a:lstStyle/>
-          <a:p>
-            <a:pPr algn="l"/>
-            <a:r>
-              <a:rPr sz="1150" b="0">
-                <a:solidFill>
-                  <a:srgbClr val="161B26"/>
-                </a:solidFill>
-                <a:latin typeface="Arial"/>
-              </a:rPr>
-              <a:t>Select accurate, relevant, high-impact content.</a:t>
-            </a:r>
-          </a:p>
-        </p:txBody>
-      </p:sp>
-      <p:sp>
-        <p:nvSpPr>
-          <p:cNvPr id="20" name="Rounded Rectangle 19"/>
-          <p:cNvSpPr/>
-          <p:nvPr/>
-        </p:nvSpPr>
-        <p:spPr>
-          <a:xfrm>
-            <a:off x="5082235" y="1920240"/>
-            <a:ext cx="1997049" cy="3566160"/>
-          </a:xfrm>
-          <a:prstGeom prst="roundRect">
-            <a:avLst/>
-          </a:prstGeom>
-          <a:solidFill>
-            <a:srgbClr val="F5F8FC"/>
-          </a:solidFill>
-          <a:ln>
-            <a:solidFill>
-              <a:srgbClr val="E2E8F0"/>
-            </a:solidFill>
-          </a:ln>
-        </p:spPr>
-        <p:style>
-          <a:lnRef idx="1">
-            <a:schemeClr val="accent1"/>
-          </a:lnRef>
-          <a:fillRef idx="3">
-            <a:schemeClr val="accent1"/>
-          </a:fillRef>
-          <a:effectRef idx="2">
-            <a:schemeClr val="accent1"/>
-          </a:effectRef>
-          <a:fontRef idx="minor">
-            <a:schemeClr val="lt1"/>
-          </a:fontRef>
-        </p:style>
-        <p:txBody>
-          <a:bodyPr rtlCol="0" anchor="ctr"/>
-          <a:lstStyle/>
-          <a:p>
-            <a:pPr algn="ctr"/>
-          </a:p>
-        </p:txBody>
-      </p:sp>
-      <p:sp>
-        <p:nvSpPr>
-          <p:cNvPr id="21" name="Rectangle 20"/>
-          <p:cNvSpPr/>
-          <p:nvPr/>
-        </p:nvSpPr>
-        <p:spPr>
-          <a:xfrm>
-            <a:off x="5082235" y="1920240"/>
-            <a:ext cx="73152" cy="3566160"/>
-          </a:xfrm>
-          <a:prstGeom prst="rect">
-            <a:avLst/>
-          </a:prstGeom>
-          <a:solidFill>
-            <a:srgbClr val="7C3AED"/>
-          </a:solidFill>
-          <a:ln>
-            <a:solidFill>
-              <a:srgbClr val="7C3AED"/>
-            </a:solidFill>
-          </a:ln>
-        </p:spPr>
-        <p:style>
-          <a:lnRef idx="1">
-            <a:schemeClr val="accent1"/>
-          </a:lnRef>
-          <a:fillRef idx="3">
-            <a:schemeClr val="accent1"/>
-          </a:fillRef>
-          <a:effectRef idx="2">
-            <a:schemeClr val="accent1"/>
-          </a:effectRef>
-          <a:fontRef idx="minor">
-            <a:schemeClr val="lt1"/>
-          </a:fontRef>
-        </p:style>
-        <p:txBody>
-          <a:bodyPr rtlCol="0" anchor="ctr"/>
-          <a:lstStyle/>
-          <a:p>
-            <a:pPr algn="ctr"/>
-          </a:p>
-        </p:txBody>
-      </p:sp>
-      <p:sp>
-        <p:nvSpPr>
-          <p:cNvPr id="22" name="Rounded Rectangle 21"/>
-          <p:cNvSpPr/>
-          <p:nvPr/>
-        </p:nvSpPr>
-        <p:spPr>
-          <a:xfrm>
-            <a:off x="5283403" y="2139696"/>
-            <a:ext cx="438912" cy="438912"/>
-          </a:xfrm>
-          <a:prstGeom prst="roundRect">
-            <a:avLst/>
-          </a:prstGeom>
-          <a:solidFill>
-            <a:srgbClr val="7C3AED"/>
-          </a:solidFill>
-          <a:ln>
-            <a:solidFill>
-              <a:srgbClr val="7C3AED"/>
-            </a:solidFill>
-          </a:ln>
-        </p:spPr>
-        <p:style>
-          <a:lnRef idx="1">
-            <a:schemeClr val="accent1"/>
-          </a:lnRef>
-          <a:fillRef idx="3">
-            <a:schemeClr val="accent1"/>
-          </a:fillRef>
-          <a:effectRef idx="2">
-            <a:schemeClr val="accent1"/>
-          </a:effectRef>
-          <a:fontRef idx="minor">
-            <a:schemeClr val="lt1"/>
-          </a:fontRef>
-        </p:style>
-        <p:txBody>
-          <a:bodyPr rtlCol="0" anchor="ctr"/>
-          <a:lstStyle/>
-          <a:p>
-            <a:pPr algn="ctr"/>
-          </a:p>
-        </p:txBody>
-      </p:sp>
-      <p:sp>
-        <p:nvSpPr>
-          <p:cNvPr id="23" name="TextBox 22"/>
-          <p:cNvSpPr txBox="1"/>
-          <p:nvPr/>
-        </p:nvSpPr>
-        <p:spPr>
-          <a:xfrm>
-            <a:off x="5283403" y="2148840"/>
-            <a:ext cx="438912" cy="420624"/>
-          </a:xfrm>
-          <a:prstGeom prst="rect">
-            <a:avLst/>
-          </a:prstGeom>
-          <a:noFill/>
-        </p:spPr>
-        <p:txBody>
-          <a:bodyPr wrap="square" anchor="ctr">
-            <a:spAutoFit/>
-          </a:bodyPr>
-          <a:lstStyle/>
-          <a:p>
-            <a:pPr algn="ctr"/>
-            <a:r>
-              <a:rPr sz="1400" b="1">
-                <a:solidFill>
-                  <a:srgbClr val="FFFFFF"/>
-                </a:solidFill>
-                <a:latin typeface="Arial"/>
-              </a:rPr>
-              <a:t>3</a:t>
-            </a:r>
-          </a:p>
-        </p:txBody>
-      </p:sp>
-      <p:sp>
-        <p:nvSpPr>
-          <p:cNvPr id="24" name="TextBox 23"/>
-          <p:cNvSpPr txBox="1"/>
-          <p:nvPr/>
-        </p:nvSpPr>
-        <p:spPr>
-          <a:xfrm>
-            <a:off x="5886907" y="2103120"/>
-            <a:ext cx="1009497" cy="329184"/>
-          </a:xfrm>
-          <a:prstGeom prst="rect">
-            <a:avLst/>
-          </a:prstGeom>
-          <a:noFill/>
-        </p:spPr>
-        <p:txBody>
-          <a:bodyPr wrap="square" anchor="t">
-            <a:spAutoFit/>
-          </a:bodyPr>
-          <a:lstStyle/>
-          <a:p>
-            <a:pPr algn="l"/>
-            <a:r>
-              <a:rPr sz="1400" b="1">
-                <a:solidFill>
-                  <a:srgbClr val="7C3AED"/>
-                </a:solidFill>
-                <a:latin typeface="Arial"/>
-              </a:rPr>
-              <a:t>Choose</a:t>
-            </a:r>
-          </a:p>
-        </p:txBody>
-      </p:sp>
-      <p:sp>
-        <p:nvSpPr>
-          <p:cNvPr id="25" name="TextBox 24"/>
-          <p:cNvSpPr txBox="1"/>
-          <p:nvPr/>
-        </p:nvSpPr>
-        <p:spPr>
-          <a:xfrm>
-            <a:off x="5886907" y="2487168"/>
-            <a:ext cx="1009497" cy="2852928"/>
-          </a:xfrm>
-          <a:prstGeom prst="rect">
-            <a:avLst/>
-          </a:prstGeom>
-          <a:noFill/>
-        </p:spPr>
-        <p:txBody>
-          <a:bodyPr wrap="square" anchor="t">
-            <a:spAutoFit/>
-          </a:bodyPr>
-          <a:lstStyle/>
-          <a:p>
-            <a:pPr algn="l"/>
-            <a:r>
-              <a:rPr sz="1150" b="0">
-                <a:solidFill>
-                  <a:srgbClr val="161B26"/>
-                </a:solidFill>
-                <a:latin typeface="Arial"/>
-              </a:rPr>
-              <a:t>Match the infographic type to the relationship.</a:t>
-            </a:r>
-          </a:p>
-        </p:txBody>
-      </p:sp>
-      <p:sp>
-        <p:nvSpPr>
-          <p:cNvPr id="26" name="Rounded Rectangle 25"/>
-          <p:cNvSpPr/>
-          <p:nvPr/>
-        </p:nvSpPr>
-        <p:spPr>
-          <a:xfrm>
-            <a:off x="7280452" y="1920240"/>
-            <a:ext cx="1997049" cy="3566160"/>
-          </a:xfrm>
-          <a:prstGeom prst="roundRect">
-            <a:avLst/>
-          </a:prstGeom>
-          <a:solidFill>
-            <a:srgbClr val="F5F8FC"/>
-          </a:solidFill>
-          <a:ln>
-            <a:solidFill>
-              <a:srgbClr val="E2E8F0"/>
-            </a:solidFill>
-          </a:ln>
-        </p:spPr>
-        <p:style>
-          <a:lnRef idx="1">
-            <a:schemeClr val="accent1"/>
-          </a:lnRef>
-          <a:fillRef idx="3">
-            <a:schemeClr val="accent1"/>
-          </a:fillRef>
-          <a:effectRef idx="2">
-            <a:schemeClr val="accent1"/>
-          </a:effectRef>
-          <a:fontRef idx="minor">
-            <a:schemeClr val="lt1"/>
-          </a:fontRef>
-        </p:style>
-        <p:txBody>
-          <a:bodyPr rtlCol="0" anchor="ctr"/>
-          <a:lstStyle/>
-          <a:p>
-            <a:pPr algn="ctr"/>
-          </a:p>
-        </p:txBody>
-      </p:sp>
-      <p:sp>
-        <p:nvSpPr>
-          <p:cNvPr id="27" name="Rectangle 26"/>
-          <p:cNvSpPr/>
-          <p:nvPr/>
-        </p:nvSpPr>
-        <p:spPr>
-          <a:xfrm>
-            <a:off x="7280452" y="1920240"/>
-            <a:ext cx="73152" cy="3566160"/>
-          </a:xfrm>
-          <a:prstGeom prst="rect">
-            <a:avLst/>
-          </a:prstGeom>
-          <a:solidFill>
-            <a:srgbClr val="F59E0B"/>
-          </a:solidFill>
-          <a:ln>
-            <a:solidFill>
-              <a:srgbClr val="F59E0B"/>
-            </a:solidFill>
-          </a:ln>
-        </p:spPr>
-        <p:style>
-          <a:lnRef idx="1">
-            <a:schemeClr val="accent1"/>
-          </a:lnRef>
-          <a:fillRef idx="3">
-            <a:schemeClr val="accent1"/>
-          </a:fillRef>
-          <a:effectRef idx="2">
-            <a:schemeClr val="accent1"/>
-          </a:effectRef>
-          <a:fontRef idx="minor">
-            <a:schemeClr val="lt1"/>
-          </a:fontRef>
-        </p:style>
-        <p:txBody>
-          <a:bodyPr rtlCol="0" anchor="ctr"/>
-          <a:lstStyle/>
-          <a:p>
-            <a:pPr algn="ctr"/>
-          </a:p>
-        </p:txBody>
-      </p:sp>
-      <p:sp>
-        <p:nvSpPr>
-          <p:cNvPr id="28" name="Rounded Rectangle 27"/>
-          <p:cNvSpPr/>
-          <p:nvPr/>
-        </p:nvSpPr>
-        <p:spPr>
-          <a:xfrm>
-            <a:off x="7481620" y="2139696"/>
-            <a:ext cx="438912" cy="438912"/>
-          </a:xfrm>
-          <a:prstGeom prst="roundRect">
-            <a:avLst/>
-          </a:prstGeom>
-          <a:solidFill>
-            <a:srgbClr val="F59E0B"/>
-          </a:solidFill>
-          <a:ln>
-            <a:solidFill>
-              <a:srgbClr val="F59E0B"/>
-            </a:solidFill>
-          </a:ln>
-        </p:spPr>
-        <p:style>
-          <a:lnRef idx="1">
-            <a:schemeClr val="accent1"/>
-          </a:lnRef>
-          <a:fillRef idx="3">
-            <a:schemeClr val="accent1"/>
-          </a:fillRef>
-          <a:effectRef idx="2">
-            <a:schemeClr val="accent1"/>
-          </a:effectRef>
-          <a:fontRef idx="minor">
-            <a:schemeClr val="lt1"/>
-          </a:fontRef>
-        </p:style>
-        <p:txBody>
-          <a:bodyPr rtlCol="0" anchor="ctr"/>
-          <a:lstStyle/>
-          <a:p>
-            <a:pPr algn="ctr"/>
-          </a:p>
-        </p:txBody>
-      </p:sp>
-      <p:sp>
-        <p:nvSpPr>
-          <p:cNvPr id="29" name="TextBox 28"/>
-          <p:cNvSpPr txBox="1"/>
-          <p:nvPr/>
-        </p:nvSpPr>
-        <p:spPr>
-          <a:xfrm>
-            <a:off x="7481620" y="2148840"/>
-            <a:ext cx="438912" cy="420624"/>
-          </a:xfrm>
-          <a:prstGeom prst="rect">
-            <a:avLst/>
-          </a:prstGeom>
-          <a:noFill/>
-        </p:spPr>
-        <p:txBody>
-          <a:bodyPr wrap="square" anchor="ctr">
-            <a:spAutoFit/>
-          </a:bodyPr>
-          <a:lstStyle/>
-          <a:p>
-            <a:pPr algn="ctr"/>
-            <a:r>
-              <a:rPr sz="1400" b="1">
-                <a:solidFill>
-                  <a:srgbClr val="FFFFFF"/>
-                </a:solidFill>
-                <a:latin typeface="Arial"/>
-              </a:rPr>
-              <a:t>4</a:t>
-            </a:r>
-          </a:p>
-        </p:txBody>
-      </p:sp>
-      <p:sp>
-        <p:nvSpPr>
-          <p:cNvPr id="30" name="TextBox 29"/>
-          <p:cNvSpPr txBox="1"/>
-          <p:nvPr/>
-        </p:nvSpPr>
-        <p:spPr>
-          <a:xfrm>
-            <a:off x="8085124" y="2103120"/>
-            <a:ext cx="1009497" cy="329184"/>
-          </a:xfrm>
-          <a:prstGeom prst="rect">
-            <a:avLst/>
-          </a:prstGeom>
-          <a:noFill/>
-        </p:spPr>
-        <p:txBody>
-          <a:bodyPr wrap="square" anchor="t">
-            <a:spAutoFit/>
-          </a:bodyPr>
-          <a:lstStyle/>
-          <a:p>
-            <a:pPr algn="l"/>
-            <a:r>
-              <a:rPr sz="1400" b="1">
-                <a:solidFill>
-                  <a:srgbClr val="F59E0B"/>
-                </a:solidFill>
-                <a:latin typeface="Arial"/>
-              </a:rPr>
-              <a:t>Sequence</a:t>
-            </a:r>
-          </a:p>
-        </p:txBody>
-      </p:sp>
-      <p:sp>
-        <p:nvSpPr>
-          <p:cNvPr id="31" name="TextBox 30"/>
-          <p:cNvSpPr txBox="1"/>
-          <p:nvPr/>
-        </p:nvSpPr>
-        <p:spPr>
-          <a:xfrm>
-            <a:off x="8085124" y="2487168"/>
-            <a:ext cx="1009497" cy="2852928"/>
-          </a:xfrm>
-          <a:prstGeom prst="rect">
-            <a:avLst/>
-          </a:prstGeom>
-          <a:noFill/>
-        </p:spPr>
-        <p:txBody>
-          <a:bodyPr wrap="square" anchor="t">
-            <a:spAutoFit/>
-          </a:bodyPr>
-          <a:lstStyle/>
-          <a:p>
-            <a:pPr algn="l"/>
-            <a:r>
-              <a:rPr sz="1150" b="0">
-                <a:solidFill>
-                  <a:srgbClr val="161B26"/>
-                </a:solidFill>
-                <a:latin typeface="Arial"/>
-              </a:rPr>
-              <a:t>Order message, evidence and action.</a:t>
-            </a:r>
-          </a:p>
-        </p:txBody>
-      </p:sp>
-      <p:sp>
-        <p:nvSpPr>
-          <p:cNvPr id="32" name="Rounded Rectangle 31"/>
-          <p:cNvSpPr/>
-          <p:nvPr/>
-        </p:nvSpPr>
-        <p:spPr>
-          <a:xfrm>
-            <a:off x="9478670" y="1920240"/>
-            <a:ext cx="1997049" cy="3566160"/>
-          </a:xfrm>
-          <a:prstGeom prst="roundRect">
-            <a:avLst/>
-          </a:prstGeom>
-          <a:solidFill>
-            <a:srgbClr val="F5F8FC"/>
-          </a:solidFill>
-          <a:ln>
-            <a:solidFill>
-              <a:srgbClr val="E2E8F0"/>
-            </a:solidFill>
-          </a:ln>
-        </p:spPr>
-        <p:style>
-          <a:lnRef idx="1">
-            <a:schemeClr val="accent1"/>
-          </a:lnRef>
-          <a:fillRef idx="3">
-            <a:schemeClr val="accent1"/>
-          </a:fillRef>
-          <a:effectRef idx="2">
-            <a:schemeClr val="accent1"/>
-          </a:effectRef>
-          <a:fontRef idx="minor">
-            <a:schemeClr val="lt1"/>
-          </a:fontRef>
-        </p:style>
-        <p:txBody>
-          <a:bodyPr rtlCol="0" anchor="ctr"/>
-          <a:lstStyle/>
-          <a:p>
-            <a:pPr algn="ctr"/>
-          </a:p>
-        </p:txBody>
-      </p:sp>
-      <p:sp>
-        <p:nvSpPr>
-          <p:cNvPr id="33" name="Rectangle 32"/>
-          <p:cNvSpPr/>
-          <p:nvPr/>
-        </p:nvSpPr>
-        <p:spPr>
-          <a:xfrm>
-            <a:off x="9478670" y="1920240"/>
-            <a:ext cx="73152" cy="3566160"/>
-          </a:xfrm>
-          <a:prstGeom prst="rect">
-            <a:avLst/>
-          </a:prstGeom>
-          <a:solidFill>
-            <a:srgbClr val="1F6FEB"/>
-          </a:solidFill>
-          <a:ln>
-            <a:solidFill>
-              <a:srgbClr val="1F6FEB"/>
-            </a:solidFill>
-          </a:ln>
-        </p:spPr>
-        <p:style>
-          <a:lnRef idx="1">
-            <a:schemeClr val="accent1"/>
-          </a:lnRef>
-          <a:fillRef idx="3">
-            <a:schemeClr val="accent1"/>
-          </a:fillRef>
-          <a:effectRef idx="2">
-            <a:schemeClr val="accent1"/>
-          </a:effectRef>
-          <a:fontRef idx="minor">
-            <a:schemeClr val="lt1"/>
-          </a:fontRef>
-        </p:style>
-        <p:txBody>
-          <a:bodyPr rtlCol="0" anchor="ctr"/>
-          <a:lstStyle/>
-          <a:p>
-            <a:pPr algn="ctr"/>
-          </a:p>
-        </p:txBody>
-      </p:sp>
-      <p:sp>
-        <p:nvSpPr>
-          <p:cNvPr id="34" name="Rounded Rectangle 33"/>
-          <p:cNvSpPr/>
-          <p:nvPr/>
-        </p:nvSpPr>
-        <p:spPr>
-          <a:xfrm>
-            <a:off x="9679838" y="2139696"/>
-            <a:ext cx="438912" cy="438912"/>
-          </a:xfrm>
-          <a:prstGeom prst="roundRect">
-            <a:avLst/>
-          </a:prstGeom>
-          <a:solidFill>
-            <a:srgbClr val="1F6FEB"/>
-          </a:solidFill>
-          <a:ln>
-            <a:solidFill>
-              <a:srgbClr val="1F6FEB"/>
-            </a:solidFill>
-          </a:ln>
-        </p:spPr>
-        <p:style>
-          <a:lnRef idx="1">
-            <a:schemeClr val="accent1"/>
-          </a:lnRef>
-          <a:fillRef idx="3">
-            <a:schemeClr val="accent1"/>
-          </a:fillRef>
-          <a:effectRef idx="2">
-            <a:schemeClr val="accent1"/>
-          </a:effectRef>
-          <a:fontRef idx="minor">
-            <a:schemeClr val="lt1"/>
-          </a:fontRef>
-        </p:style>
-        <p:txBody>
-          <a:bodyPr rtlCol="0" anchor="ctr"/>
-          <a:lstStyle/>
-          <a:p>
-            <a:pPr algn="ctr"/>
-          </a:p>
-        </p:txBody>
-      </p:sp>
-      <p:sp>
-        <p:nvSpPr>
-          <p:cNvPr id="35" name="TextBox 34"/>
-          <p:cNvSpPr txBox="1"/>
-          <p:nvPr/>
-        </p:nvSpPr>
-        <p:spPr>
-          <a:xfrm>
-            <a:off x="9679838" y="2148840"/>
-            <a:ext cx="438912" cy="420624"/>
-          </a:xfrm>
-          <a:prstGeom prst="rect">
-            <a:avLst/>
-          </a:prstGeom>
-          <a:noFill/>
-        </p:spPr>
-        <p:txBody>
-          <a:bodyPr wrap="square" anchor="ctr">
-            <a:spAutoFit/>
-          </a:bodyPr>
-          <a:lstStyle/>
-          <a:p>
-            <a:pPr algn="ctr"/>
-            <a:r>
-              <a:rPr sz="1400" b="1">
-                <a:solidFill>
-                  <a:srgbClr val="FFFFFF"/>
-                </a:solidFill>
-                <a:latin typeface="Arial"/>
-              </a:rPr>
-              <a:t>5</a:t>
-            </a:r>
-          </a:p>
-        </p:txBody>
-      </p:sp>
-      <p:sp>
-        <p:nvSpPr>
-          <p:cNvPr id="36" name="TextBox 35"/>
-          <p:cNvSpPr txBox="1"/>
-          <p:nvPr/>
-        </p:nvSpPr>
-        <p:spPr>
-          <a:xfrm>
-            <a:off x="10283342" y="2103120"/>
-            <a:ext cx="1009497" cy="329184"/>
-          </a:xfrm>
-          <a:prstGeom prst="rect">
-            <a:avLst/>
-          </a:prstGeom>
-          <a:noFill/>
-        </p:spPr>
-        <p:txBody>
-          <a:bodyPr wrap="square" anchor="t">
-            <a:spAutoFit/>
-          </a:bodyPr>
-          <a:lstStyle/>
-          <a:p>
-            <a:pPr algn="l"/>
-            <a:r>
-              <a:rPr sz="1400" b="1">
-                <a:solidFill>
-                  <a:srgbClr val="1F6FEB"/>
-                </a:solidFill>
-                <a:latin typeface="Arial"/>
-              </a:rPr>
-              <a:t>Sketch</a:t>
-            </a:r>
-          </a:p>
-        </p:txBody>
-      </p:sp>
-      <p:sp>
-        <p:nvSpPr>
-          <p:cNvPr id="37" name="TextBox 36"/>
-          <p:cNvSpPr txBox="1"/>
-          <p:nvPr/>
-        </p:nvSpPr>
-        <p:spPr>
-          <a:xfrm>
-            <a:off x="10283342" y="2487168"/>
-            <a:ext cx="1009497" cy="2852928"/>
-          </a:xfrm>
-          <a:prstGeom prst="rect">
-            <a:avLst/>
-          </a:prstGeom>
-          <a:noFill/>
-        </p:spPr>
-        <p:txBody>
-          <a:bodyPr wrap="square" anchor="t">
-            <a:spAutoFit/>
-          </a:bodyPr>
-          <a:lstStyle/>
-          <a:p>
-            <a:pPr algn="l"/>
-            <a:r>
-              <a:rPr sz="1150" b="0">
-                <a:solidFill>
-                  <a:srgbClr val="161B26"/>
-                </a:solidFill>
-                <a:latin typeface="Arial"/>
-              </a:rPr>
-              <a:t>Build the wireframe with boxes, arrows and placeholders.</a:t>
+              <a:t>Use the supplied prompt workbook to ask AI for two wireframe directions. Select one by evidence fit, then preserve it as the control brief for Microsoft 365 Copilot, Gemini Notebook or PowerPoint.</a:t>
             </a:r>
           </a:p>
         </p:txBody>
@@ -5721,6 +5482,726 @@
             <a:avLst/>
           </a:prstGeom>
           <a:solidFill>
+            <a:srgbClr val="10B981"/>
+          </a:solidFill>
+          <a:ln>
+            <a:solidFill>
+              <a:srgbClr val="10B981"/>
+            </a:solidFill>
+          </a:ln>
+        </p:spPr>
+        <p:style>
+          <a:lnRef idx="1">
+            <a:schemeClr val="accent1"/>
+          </a:lnRef>
+          <a:fillRef idx="3">
+            <a:schemeClr val="accent1"/>
+          </a:fillRef>
+          <a:effectRef idx="2">
+            <a:schemeClr val="accent1"/>
+          </a:effectRef>
+          <a:fontRef idx="minor">
+            <a:schemeClr val="lt1"/>
+          </a:fontRef>
+        </p:style>
+        <p:txBody>
+          <a:bodyPr rtlCol="0" anchor="ctr"/>
+          <a:lstStyle/>
+          <a:p>
+            <a:pPr algn="ctr"/>
+          </a:p>
+        </p:txBody>
+      </p:sp>
+      <p:sp>
+        <p:nvSpPr>
+          <p:cNvPr id="4" name="TextBox 3"/>
+          <p:cNvSpPr txBox="1"/>
+          <p:nvPr/>
+        </p:nvSpPr>
+        <p:spPr>
+          <a:xfrm>
+            <a:off x="658368" y="384048"/>
+            <a:ext cx="10789920" cy="320040"/>
+          </a:xfrm>
+          <a:prstGeom prst="rect">
+            <a:avLst/>
+          </a:prstGeom>
+          <a:noFill/>
+        </p:spPr>
+        <p:txBody>
+          <a:bodyPr wrap="square" anchor="t">
+            <a:spAutoFit/>
+          </a:bodyPr>
+          <a:lstStyle/>
+          <a:p>
+            <a:pPr algn="l"/>
+            <a:r>
+              <a:rPr sz="1100" b="1">
+                <a:solidFill>
+                  <a:srgbClr val="10B981"/>
+                </a:solidFill>
+                <a:latin typeface="Arial"/>
+              </a:rPr>
+              <a:t>ACTIVITY 02 · FRAMEWORK</a:t>
+            </a:r>
+          </a:p>
+        </p:txBody>
+      </p:sp>
+      <p:sp>
+        <p:nvSpPr>
+          <p:cNvPr id="5" name="TextBox 4"/>
+          <p:cNvSpPr txBox="1"/>
+          <p:nvPr/>
+        </p:nvSpPr>
+        <p:spPr>
+          <a:xfrm>
+            <a:off x="658368" y="749808"/>
+            <a:ext cx="10789920" cy="658368"/>
+          </a:xfrm>
+          <a:prstGeom prst="rect">
+            <a:avLst/>
+          </a:prstGeom>
+          <a:noFill/>
+        </p:spPr>
+        <p:txBody>
+          <a:bodyPr wrap="square" anchor="t">
+            <a:spAutoFit/>
+          </a:bodyPr>
+          <a:lstStyle/>
+          <a:p>
+            <a:pPr algn="l"/>
+            <a:r>
+              <a:rPr sz="2700" b="1">
+                <a:solidFill>
+                  <a:srgbClr val="161B26"/>
+                </a:solidFill>
+                <a:latin typeface="Arial"/>
+              </a:rPr>
+              <a:t>Brief Before Generation</a:t>
+            </a:r>
+          </a:p>
+        </p:txBody>
+      </p:sp>
+      <p:sp>
+        <p:nvSpPr>
+          <p:cNvPr id="6" name="Rectangle 5"/>
+          <p:cNvSpPr/>
+          <p:nvPr/>
+        </p:nvSpPr>
+        <p:spPr>
+          <a:xfrm>
+            <a:off x="658368" y="1444752"/>
+            <a:ext cx="10881360" cy="18288"/>
+          </a:xfrm>
+          <a:prstGeom prst="rect">
+            <a:avLst/>
+          </a:prstGeom>
+          <a:solidFill>
+            <a:srgbClr val="E2E8F0"/>
+          </a:solidFill>
+          <a:ln>
+            <a:solidFill>
+              <a:srgbClr val="E2E8F0"/>
+            </a:solidFill>
+          </a:ln>
+        </p:spPr>
+        <p:style>
+          <a:lnRef idx="1">
+            <a:schemeClr val="accent1"/>
+          </a:lnRef>
+          <a:fillRef idx="3">
+            <a:schemeClr val="accent1"/>
+          </a:fillRef>
+          <a:effectRef idx="2">
+            <a:schemeClr val="accent1"/>
+          </a:effectRef>
+          <a:fontRef idx="minor">
+            <a:schemeClr val="lt1"/>
+          </a:fontRef>
+        </p:style>
+        <p:txBody>
+          <a:bodyPr rtlCol="0" anchor="ctr"/>
+          <a:lstStyle/>
+          <a:p>
+            <a:pPr algn="ctr"/>
+          </a:p>
+        </p:txBody>
+      </p:sp>
+      <p:sp>
+        <p:nvSpPr>
+          <p:cNvPr id="7" name="TextBox 6"/>
+          <p:cNvSpPr txBox="1"/>
+          <p:nvPr/>
+        </p:nvSpPr>
+        <p:spPr>
+          <a:xfrm>
+            <a:off x="658368" y="6473952"/>
+            <a:ext cx="9875520" cy="201168"/>
+          </a:xfrm>
+          <a:prstGeom prst="rect">
+            <a:avLst/>
+          </a:prstGeom>
+          <a:noFill/>
+        </p:spPr>
+        <p:txBody>
+          <a:bodyPr wrap="square" anchor="t">
+            <a:spAutoFit/>
+          </a:bodyPr>
+          <a:lstStyle/>
+          <a:p>
+            <a:pPr algn="l"/>
+            <a:r>
+              <a:rPr sz="800" b="0">
+                <a:solidFill>
+                  <a:srgbClr val="5B6372"/>
+                </a:solidFill>
+                <a:latin typeface="Arial"/>
+              </a:rPr>
+              <a:t>TGS-2026064178 · ACTIVITY PRACTICE · Tertiary Infotech Academy Pte Ltd</a:t>
+            </a:r>
+          </a:p>
+        </p:txBody>
+      </p:sp>
+      <p:sp>
+        <p:nvSpPr>
+          <p:cNvPr id="8" name="Rounded Rectangle 7"/>
+          <p:cNvSpPr/>
+          <p:nvPr/>
+        </p:nvSpPr>
+        <p:spPr>
+          <a:xfrm>
+            <a:off x="685800" y="1920240"/>
+            <a:ext cx="1997049" cy="3566160"/>
+          </a:xfrm>
+          <a:prstGeom prst="roundRect">
+            <a:avLst/>
+          </a:prstGeom>
+          <a:solidFill>
+            <a:srgbClr val="F5F8FC"/>
+          </a:solidFill>
+          <a:ln>
+            <a:solidFill>
+              <a:srgbClr val="E2E8F0"/>
+            </a:solidFill>
+          </a:ln>
+        </p:spPr>
+        <p:style>
+          <a:lnRef idx="1">
+            <a:schemeClr val="accent1"/>
+          </a:lnRef>
+          <a:fillRef idx="3">
+            <a:schemeClr val="accent1"/>
+          </a:fillRef>
+          <a:effectRef idx="2">
+            <a:schemeClr val="accent1"/>
+          </a:effectRef>
+          <a:fontRef idx="minor">
+            <a:schemeClr val="lt1"/>
+          </a:fontRef>
+        </p:style>
+        <p:txBody>
+          <a:bodyPr rtlCol="0" anchor="ctr"/>
+          <a:lstStyle/>
+          <a:p>
+            <a:pPr algn="ctr"/>
+          </a:p>
+        </p:txBody>
+      </p:sp>
+      <p:sp>
+        <p:nvSpPr>
+          <p:cNvPr id="9" name="Rectangle 8"/>
+          <p:cNvSpPr/>
+          <p:nvPr/>
+        </p:nvSpPr>
+        <p:spPr>
+          <a:xfrm>
+            <a:off x="685800" y="1920240"/>
+            <a:ext cx="73152" cy="3566160"/>
+          </a:xfrm>
+          <a:prstGeom prst="rect">
+            <a:avLst/>
+          </a:prstGeom>
+          <a:solidFill>
+            <a:srgbClr val="1F6FEB"/>
+          </a:solidFill>
+          <a:ln>
+            <a:solidFill>
+              <a:srgbClr val="1F6FEB"/>
+            </a:solidFill>
+          </a:ln>
+        </p:spPr>
+        <p:style>
+          <a:lnRef idx="1">
+            <a:schemeClr val="accent1"/>
+          </a:lnRef>
+          <a:fillRef idx="3">
+            <a:schemeClr val="accent1"/>
+          </a:fillRef>
+          <a:effectRef idx="2">
+            <a:schemeClr val="accent1"/>
+          </a:effectRef>
+          <a:fontRef idx="minor">
+            <a:schemeClr val="lt1"/>
+          </a:fontRef>
+        </p:style>
+        <p:txBody>
+          <a:bodyPr rtlCol="0" anchor="ctr"/>
+          <a:lstStyle/>
+          <a:p>
+            <a:pPr algn="ctr"/>
+          </a:p>
+        </p:txBody>
+      </p:sp>
+      <p:sp>
+        <p:nvSpPr>
+          <p:cNvPr id="10" name="Rounded Rectangle 9"/>
+          <p:cNvSpPr/>
+          <p:nvPr/>
+        </p:nvSpPr>
+        <p:spPr>
+          <a:xfrm>
+            <a:off x="886968" y="2139696"/>
+            <a:ext cx="438912" cy="438912"/>
+          </a:xfrm>
+          <a:prstGeom prst="roundRect">
+            <a:avLst/>
+          </a:prstGeom>
+          <a:solidFill>
+            <a:srgbClr val="1F6FEB"/>
+          </a:solidFill>
+          <a:ln>
+            <a:solidFill>
+              <a:srgbClr val="1F6FEB"/>
+            </a:solidFill>
+          </a:ln>
+        </p:spPr>
+        <p:style>
+          <a:lnRef idx="1">
+            <a:schemeClr val="accent1"/>
+          </a:lnRef>
+          <a:fillRef idx="3">
+            <a:schemeClr val="accent1"/>
+          </a:fillRef>
+          <a:effectRef idx="2">
+            <a:schemeClr val="accent1"/>
+          </a:effectRef>
+          <a:fontRef idx="minor">
+            <a:schemeClr val="lt1"/>
+          </a:fontRef>
+        </p:style>
+        <p:txBody>
+          <a:bodyPr rtlCol="0" anchor="ctr"/>
+          <a:lstStyle/>
+          <a:p>
+            <a:pPr algn="ctr"/>
+          </a:p>
+        </p:txBody>
+      </p:sp>
+      <p:sp>
+        <p:nvSpPr>
+          <p:cNvPr id="11" name="TextBox 10"/>
+          <p:cNvSpPr txBox="1"/>
+          <p:nvPr/>
+        </p:nvSpPr>
+        <p:spPr>
+          <a:xfrm>
+            <a:off x="886968" y="2148840"/>
+            <a:ext cx="438912" cy="420624"/>
+          </a:xfrm>
+          <a:prstGeom prst="rect">
+            <a:avLst/>
+          </a:prstGeom>
+          <a:noFill/>
+        </p:spPr>
+        <p:txBody>
+          <a:bodyPr wrap="square" anchor="ctr">
+            <a:spAutoFit/>
+          </a:bodyPr>
+          <a:lstStyle/>
+          <a:p>
+            <a:pPr algn="ctr"/>
+            <a:r>
+              <a:rPr sz="1400" b="1">
+                <a:solidFill>
+                  <a:srgbClr val="FFFFFF"/>
+                </a:solidFill>
+                <a:latin typeface="Arial"/>
+              </a:rPr>
+              <a:t>1</a:t>
+            </a:r>
+          </a:p>
+        </p:txBody>
+      </p:sp>
+      <p:sp>
+        <p:nvSpPr>
+          <p:cNvPr id="12" name="TextBox 11"/>
+          <p:cNvSpPr txBox="1"/>
+          <p:nvPr/>
+        </p:nvSpPr>
+        <p:spPr>
+          <a:xfrm>
+            <a:off x="1490472" y="2103120"/>
+            <a:ext cx="1009497" cy="329184"/>
+          </a:xfrm>
+          <a:prstGeom prst="rect">
+            <a:avLst/>
+          </a:prstGeom>
+          <a:noFill/>
+        </p:spPr>
+        <p:txBody>
+          <a:bodyPr wrap="square" anchor="t">
+            <a:spAutoFit/>
+          </a:bodyPr>
+          <a:lstStyle/>
+          <a:p>
+            <a:pPr algn="l"/>
+            <a:r>
+              <a:rPr sz="1400" b="1">
+                <a:solidFill>
+                  <a:srgbClr val="1F6FEB"/>
+                </a:solidFill>
+                <a:latin typeface="Arial"/>
+              </a:rPr>
+              <a:t>Define</a:t>
+            </a:r>
+          </a:p>
+        </p:txBody>
+      </p:sp>
+      <p:sp>
+        <p:nvSpPr>
+          <p:cNvPr id="13" name="TextBox 12"/>
+          <p:cNvSpPr txBox="1"/>
+          <p:nvPr/>
+        </p:nvSpPr>
+        <p:spPr>
+          <a:xfrm>
+            <a:off x="1490472" y="2487168"/>
+            <a:ext cx="1009497" cy="2852928"/>
+          </a:xfrm>
+          <a:prstGeom prst="rect">
+            <a:avLst/>
+          </a:prstGeom>
+          <a:noFill/>
+        </p:spPr>
+        <p:txBody>
+          <a:bodyPr wrap="square" anchor="t">
+            <a:spAutoFit/>
+          </a:bodyPr>
+          <a:lstStyle/>
+          <a:p>
+            <a:pPr algn="l"/>
+            <a:r>
+              <a:rPr sz="1150" b="0">
+                <a:solidFill>
+                  <a:srgbClr val="161B26"/>
+                </a:solidFill>
+                <a:latin typeface="Arial"/>
+              </a:rPr>
+              <a:t>Write the objective and audience question.</a:t>
+            </a:r>
+          </a:p>
+        </p:txBody>
+      </p:sp>
+      <p:sp>
+        <p:nvSpPr>
+          <p:cNvPr id="14" name="Rounded Rectangle 13"/>
+          <p:cNvSpPr/>
+          <p:nvPr/>
+        </p:nvSpPr>
+        <p:spPr>
+          <a:xfrm>
+            <a:off x="2884017" y="1920240"/>
+            <a:ext cx="1997049" cy="3566160"/>
+          </a:xfrm>
+          <a:prstGeom prst="roundRect">
+            <a:avLst/>
+          </a:prstGeom>
+          <a:solidFill>
+            <a:srgbClr val="F5F8FC"/>
+          </a:solidFill>
+          <a:ln>
+            <a:solidFill>
+              <a:srgbClr val="E2E8F0"/>
+            </a:solidFill>
+          </a:ln>
+        </p:spPr>
+        <p:style>
+          <a:lnRef idx="1">
+            <a:schemeClr val="accent1"/>
+          </a:lnRef>
+          <a:fillRef idx="3">
+            <a:schemeClr val="accent1"/>
+          </a:fillRef>
+          <a:effectRef idx="2">
+            <a:schemeClr val="accent1"/>
+          </a:effectRef>
+          <a:fontRef idx="minor">
+            <a:schemeClr val="lt1"/>
+          </a:fontRef>
+        </p:style>
+        <p:txBody>
+          <a:bodyPr rtlCol="0" anchor="ctr"/>
+          <a:lstStyle/>
+          <a:p>
+            <a:pPr algn="ctr"/>
+          </a:p>
+        </p:txBody>
+      </p:sp>
+      <p:sp>
+        <p:nvSpPr>
+          <p:cNvPr id="15" name="Rectangle 14"/>
+          <p:cNvSpPr/>
+          <p:nvPr/>
+        </p:nvSpPr>
+        <p:spPr>
+          <a:xfrm>
+            <a:off x="2884017" y="1920240"/>
+            <a:ext cx="73152" cy="3566160"/>
+          </a:xfrm>
+          <a:prstGeom prst="rect">
+            <a:avLst/>
+          </a:prstGeom>
+          <a:solidFill>
+            <a:srgbClr val="10B981"/>
+          </a:solidFill>
+          <a:ln>
+            <a:solidFill>
+              <a:srgbClr val="10B981"/>
+            </a:solidFill>
+          </a:ln>
+        </p:spPr>
+        <p:style>
+          <a:lnRef idx="1">
+            <a:schemeClr val="accent1"/>
+          </a:lnRef>
+          <a:fillRef idx="3">
+            <a:schemeClr val="accent1"/>
+          </a:fillRef>
+          <a:effectRef idx="2">
+            <a:schemeClr val="accent1"/>
+          </a:effectRef>
+          <a:fontRef idx="minor">
+            <a:schemeClr val="lt1"/>
+          </a:fontRef>
+        </p:style>
+        <p:txBody>
+          <a:bodyPr rtlCol="0" anchor="ctr"/>
+          <a:lstStyle/>
+          <a:p>
+            <a:pPr algn="ctr"/>
+          </a:p>
+        </p:txBody>
+      </p:sp>
+      <p:sp>
+        <p:nvSpPr>
+          <p:cNvPr id="16" name="Rounded Rectangle 15"/>
+          <p:cNvSpPr/>
+          <p:nvPr/>
+        </p:nvSpPr>
+        <p:spPr>
+          <a:xfrm>
+            <a:off x="3085185" y="2139696"/>
+            <a:ext cx="438912" cy="438912"/>
+          </a:xfrm>
+          <a:prstGeom prst="roundRect">
+            <a:avLst/>
+          </a:prstGeom>
+          <a:solidFill>
+            <a:srgbClr val="10B981"/>
+          </a:solidFill>
+          <a:ln>
+            <a:solidFill>
+              <a:srgbClr val="10B981"/>
+            </a:solidFill>
+          </a:ln>
+        </p:spPr>
+        <p:style>
+          <a:lnRef idx="1">
+            <a:schemeClr val="accent1"/>
+          </a:lnRef>
+          <a:fillRef idx="3">
+            <a:schemeClr val="accent1"/>
+          </a:fillRef>
+          <a:effectRef idx="2">
+            <a:schemeClr val="accent1"/>
+          </a:effectRef>
+          <a:fontRef idx="minor">
+            <a:schemeClr val="lt1"/>
+          </a:fontRef>
+        </p:style>
+        <p:txBody>
+          <a:bodyPr rtlCol="0" anchor="ctr"/>
+          <a:lstStyle/>
+          <a:p>
+            <a:pPr algn="ctr"/>
+          </a:p>
+        </p:txBody>
+      </p:sp>
+      <p:sp>
+        <p:nvSpPr>
+          <p:cNvPr id="17" name="TextBox 16"/>
+          <p:cNvSpPr txBox="1"/>
+          <p:nvPr/>
+        </p:nvSpPr>
+        <p:spPr>
+          <a:xfrm>
+            <a:off x="3085185" y="2148840"/>
+            <a:ext cx="438912" cy="420624"/>
+          </a:xfrm>
+          <a:prstGeom prst="rect">
+            <a:avLst/>
+          </a:prstGeom>
+          <a:noFill/>
+        </p:spPr>
+        <p:txBody>
+          <a:bodyPr wrap="square" anchor="ctr">
+            <a:spAutoFit/>
+          </a:bodyPr>
+          <a:lstStyle/>
+          <a:p>
+            <a:pPr algn="ctr"/>
+            <a:r>
+              <a:rPr sz="1400" b="1">
+                <a:solidFill>
+                  <a:srgbClr val="FFFFFF"/>
+                </a:solidFill>
+                <a:latin typeface="Arial"/>
+              </a:rPr>
+              <a:t>2</a:t>
+            </a:r>
+          </a:p>
+        </p:txBody>
+      </p:sp>
+      <p:sp>
+        <p:nvSpPr>
+          <p:cNvPr id="18" name="TextBox 17"/>
+          <p:cNvSpPr txBox="1"/>
+          <p:nvPr/>
+        </p:nvSpPr>
+        <p:spPr>
+          <a:xfrm>
+            <a:off x="3688689" y="2103120"/>
+            <a:ext cx="1009497" cy="329184"/>
+          </a:xfrm>
+          <a:prstGeom prst="rect">
+            <a:avLst/>
+          </a:prstGeom>
+          <a:noFill/>
+        </p:spPr>
+        <p:txBody>
+          <a:bodyPr wrap="square" anchor="t">
+            <a:spAutoFit/>
+          </a:bodyPr>
+          <a:lstStyle/>
+          <a:p>
+            <a:pPr algn="l"/>
+            <a:r>
+              <a:rPr sz="1400" b="1">
+                <a:solidFill>
+                  <a:srgbClr val="10B981"/>
+                </a:solidFill>
+                <a:latin typeface="Arial"/>
+              </a:rPr>
+              <a:t>Ground</a:t>
+            </a:r>
+          </a:p>
+        </p:txBody>
+      </p:sp>
+      <p:sp>
+        <p:nvSpPr>
+          <p:cNvPr id="19" name="TextBox 18"/>
+          <p:cNvSpPr txBox="1"/>
+          <p:nvPr/>
+        </p:nvSpPr>
+        <p:spPr>
+          <a:xfrm>
+            <a:off x="3688689" y="2487168"/>
+            <a:ext cx="1009497" cy="2852928"/>
+          </a:xfrm>
+          <a:prstGeom prst="rect">
+            <a:avLst/>
+          </a:prstGeom>
+          <a:noFill/>
+        </p:spPr>
+        <p:txBody>
+          <a:bodyPr wrap="square" anchor="t">
+            <a:spAutoFit/>
+          </a:bodyPr>
+          <a:lstStyle/>
+          <a:p>
+            <a:pPr algn="l"/>
+            <a:r>
+              <a:rPr sz="1150" b="0">
+                <a:solidFill>
+                  <a:srgbClr val="161B26"/>
+                </a:solidFill>
+                <a:latin typeface="Arial"/>
+              </a:rPr>
+              <a:t>Attach only approved sources and verified insights.</a:t>
+            </a:r>
+          </a:p>
+        </p:txBody>
+      </p:sp>
+      <p:sp>
+        <p:nvSpPr>
+          <p:cNvPr id="20" name="Rounded Rectangle 19"/>
+          <p:cNvSpPr/>
+          <p:nvPr/>
+        </p:nvSpPr>
+        <p:spPr>
+          <a:xfrm>
+            <a:off x="5082235" y="1920240"/>
+            <a:ext cx="1997049" cy="3566160"/>
+          </a:xfrm>
+          <a:prstGeom prst="roundRect">
+            <a:avLst/>
+          </a:prstGeom>
+          <a:solidFill>
+            <a:srgbClr val="F5F8FC"/>
+          </a:solidFill>
+          <a:ln>
+            <a:solidFill>
+              <a:srgbClr val="E2E8F0"/>
+            </a:solidFill>
+          </a:ln>
+        </p:spPr>
+        <p:style>
+          <a:lnRef idx="1">
+            <a:schemeClr val="accent1"/>
+          </a:lnRef>
+          <a:fillRef idx="3">
+            <a:schemeClr val="accent1"/>
+          </a:fillRef>
+          <a:effectRef idx="2">
+            <a:schemeClr val="accent1"/>
+          </a:effectRef>
+          <a:fontRef idx="minor">
+            <a:schemeClr val="lt1"/>
+          </a:fontRef>
+        </p:style>
+        <p:txBody>
+          <a:bodyPr rtlCol="0" anchor="ctr"/>
+          <a:lstStyle/>
+          <a:p>
+            <a:pPr algn="ctr"/>
+          </a:p>
+        </p:txBody>
+      </p:sp>
+      <p:sp>
+        <p:nvSpPr>
+          <p:cNvPr id="21" name="Rectangle 20"/>
+          <p:cNvSpPr/>
+          <p:nvPr/>
+        </p:nvSpPr>
+        <p:spPr>
+          <a:xfrm>
+            <a:off x="5082235" y="1920240"/>
+            <a:ext cx="73152" cy="3566160"/>
+          </a:xfrm>
+          <a:prstGeom prst="rect">
+            <a:avLst/>
+          </a:prstGeom>
+          <a:solidFill>
             <a:srgbClr val="7C3AED"/>
           </a:solidFill>
           <a:ln>
@@ -5753,14 +6234,94 @@
       </p:sp>
       <p:sp>
         <p:nvSpPr>
-          <p:cNvPr id="4" name="TextBox 3"/>
+          <p:cNvPr id="22" name="Rounded Rectangle 21"/>
+          <p:cNvSpPr/>
+          <p:nvPr/>
+        </p:nvSpPr>
+        <p:spPr>
+          <a:xfrm>
+            <a:off x="5283403" y="2139696"/>
+            <a:ext cx="438912" cy="438912"/>
+          </a:xfrm>
+          <a:prstGeom prst="roundRect">
+            <a:avLst/>
+          </a:prstGeom>
+          <a:solidFill>
+            <a:srgbClr val="7C3AED"/>
+          </a:solidFill>
+          <a:ln>
+            <a:solidFill>
+              <a:srgbClr val="7C3AED"/>
+            </a:solidFill>
+          </a:ln>
+        </p:spPr>
+        <p:style>
+          <a:lnRef idx="1">
+            <a:schemeClr val="accent1"/>
+          </a:lnRef>
+          <a:fillRef idx="3">
+            <a:schemeClr val="accent1"/>
+          </a:fillRef>
+          <a:effectRef idx="2">
+            <a:schemeClr val="accent1"/>
+          </a:effectRef>
+          <a:fontRef idx="minor">
+            <a:schemeClr val="lt1"/>
+          </a:fontRef>
+        </p:style>
+        <p:txBody>
+          <a:bodyPr rtlCol="0" anchor="ctr"/>
+          <a:lstStyle/>
+          <a:p>
+            <a:pPr algn="ctr"/>
+          </a:p>
+        </p:txBody>
+      </p:sp>
+      <p:sp>
+        <p:nvSpPr>
+          <p:cNvPr id="23" name="TextBox 22"/>
           <p:cNvSpPr txBox="1"/>
           <p:nvPr/>
         </p:nvSpPr>
         <p:spPr>
           <a:xfrm>
-            <a:off x="658368" y="384048"/>
-            <a:ext cx="10789920" cy="320040"/>
+            <a:off x="5283403" y="2148840"/>
+            <a:ext cx="438912" cy="420624"/>
+          </a:xfrm>
+          <a:prstGeom prst="rect">
+            <a:avLst/>
+          </a:prstGeom>
+          <a:noFill/>
+        </p:spPr>
+        <p:txBody>
+          <a:bodyPr wrap="square" anchor="ctr">
+            <a:spAutoFit/>
+          </a:bodyPr>
+          <a:lstStyle/>
+          <a:p>
+            <a:pPr algn="ctr"/>
+            <a:r>
+              <a:rPr sz="1400" b="1">
+                <a:solidFill>
+                  <a:srgbClr val="FFFFFF"/>
+                </a:solidFill>
+                <a:latin typeface="Arial"/>
+              </a:rPr>
+              <a:t>3</a:t>
+            </a:r>
+          </a:p>
+        </p:txBody>
+      </p:sp>
+      <p:sp>
+        <p:nvSpPr>
+          <p:cNvPr id="24" name="TextBox 23"/>
+          <p:cNvSpPr txBox="1"/>
+          <p:nvPr/>
+        </p:nvSpPr>
+        <p:spPr>
+          <a:xfrm>
+            <a:off x="5886907" y="2103120"/>
+            <a:ext cx="1009497" cy="329184"/>
           </a:xfrm>
           <a:prstGeom prst="rect">
             <a:avLst/>
@@ -5775,27 +6336,27 @@
           <a:p>
             <a:pPr algn="l"/>
             <a:r>
-              <a:rPr sz="1100" b="1">
+              <a:rPr sz="1400" b="1">
                 <a:solidFill>
                   <a:srgbClr val="7C3AED"/>
                 </a:solidFill>
                 <a:latin typeface="Arial"/>
               </a:rPr>
-              <a:t>ACTIVITY 02 · EXAMPLE</a:t>
-            </a:r>
-          </a:p>
-        </p:txBody>
-      </p:sp>
-      <p:sp>
-        <p:nvSpPr>
-          <p:cNvPr id="5" name="TextBox 4"/>
+              <a:t>Specify</a:t>
+            </a:r>
+          </a:p>
+        </p:txBody>
+      </p:sp>
+      <p:sp>
+        <p:nvSpPr>
+          <p:cNvPr id="25" name="TextBox 24"/>
           <p:cNvSpPr txBox="1"/>
           <p:nvPr/>
         </p:nvSpPr>
         <p:spPr>
           <a:xfrm>
-            <a:off x="658368" y="749808"/>
-            <a:ext cx="10789920" cy="658368"/>
+            <a:off x="5886907" y="2487168"/>
+            <a:ext cx="1009497" cy="2852928"/>
           </a:xfrm>
           <a:prstGeom prst="rect">
             <a:avLst/>
@@ -5810,33 +6371,33 @@
           <a:p>
             <a:pPr algn="l"/>
             <a:r>
-              <a:rPr sz="2700" b="1">
+              <a:rPr sz="1150" b="0">
                 <a:solidFill>
                   <a:srgbClr val="161B26"/>
                 </a:solidFill>
                 <a:latin typeface="Arial"/>
               </a:rPr>
-              <a:t>Worked Output</a:t>
-            </a:r>
-          </a:p>
-        </p:txBody>
-      </p:sp>
-      <p:sp>
-        <p:nvSpPr>
-          <p:cNvPr id="6" name="Rectangle 5"/>
+              <a:t>Name hierarchy, infographic form, brand and accessibility rules.</a:t>
+            </a:r>
+          </a:p>
+        </p:txBody>
+      </p:sp>
+      <p:sp>
+        <p:nvSpPr>
+          <p:cNvPr id="26" name="Rounded Rectangle 25"/>
           <p:cNvSpPr/>
           <p:nvPr/>
         </p:nvSpPr>
         <p:spPr>
           <a:xfrm>
-            <a:off x="658368" y="1444752"/>
-            <a:ext cx="10881360" cy="18288"/>
-          </a:xfrm>
-          <a:prstGeom prst="rect">
-            <a:avLst/>
-          </a:prstGeom>
-          <a:solidFill>
-            <a:srgbClr val="E2E8F0"/>
+            <a:off x="7280452" y="1920240"/>
+            <a:ext cx="1997049" cy="3566160"/>
+          </a:xfrm>
+          <a:prstGeom prst="roundRect">
+            <a:avLst/>
+          </a:prstGeom>
+          <a:solidFill>
+            <a:srgbClr val="F5F8FC"/>
           </a:solidFill>
           <a:ln>
             <a:solidFill>
@@ -5868,14 +6429,139 @@
       </p:sp>
       <p:sp>
         <p:nvSpPr>
-          <p:cNvPr id="7" name="TextBox 6"/>
+          <p:cNvPr id="27" name="Rectangle 26"/>
+          <p:cNvSpPr/>
+          <p:nvPr/>
+        </p:nvSpPr>
+        <p:spPr>
+          <a:xfrm>
+            <a:off x="7280452" y="1920240"/>
+            <a:ext cx="73152" cy="3566160"/>
+          </a:xfrm>
+          <a:prstGeom prst="rect">
+            <a:avLst/>
+          </a:prstGeom>
+          <a:solidFill>
+            <a:srgbClr val="F59E0B"/>
+          </a:solidFill>
+          <a:ln>
+            <a:solidFill>
+              <a:srgbClr val="F59E0B"/>
+            </a:solidFill>
+          </a:ln>
+        </p:spPr>
+        <p:style>
+          <a:lnRef idx="1">
+            <a:schemeClr val="accent1"/>
+          </a:lnRef>
+          <a:fillRef idx="3">
+            <a:schemeClr val="accent1"/>
+          </a:fillRef>
+          <a:effectRef idx="2">
+            <a:schemeClr val="accent1"/>
+          </a:effectRef>
+          <a:fontRef idx="minor">
+            <a:schemeClr val="lt1"/>
+          </a:fontRef>
+        </p:style>
+        <p:txBody>
+          <a:bodyPr rtlCol="0" anchor="ctr"/>
+          <a:lstStyle/>
+          <a:p>
+            <a:pPr algn="ctr"/>
+          </a:p>
+        </p:txBody>
+      </p:sp>
+      <p:sp>
+        <p:nvSpPr>
+          <p:cNvPr id="28" name="Rounded Rectangle 27"/>
+          <p:cNvSpPr/>
+          <p:nvPr/>
+        </p:nvSpPr>
+        <p:spPr>
+          <a:xfrm>
+            <a:off x="7481620" y="2139696"/>
+            <a:ext cx="438912" cy="438912"/>
+          </a:xfrm>
+          <a:prstGeom prst="roundRect">
+            <a:avLst/>
+          </a:prstGeom>
+          <a:solidFill>
+            <a:srgbClr val="F59E0B"/>
+          </a:solidFill>
+          <a:ln>
+            <a:solidFill>
+              <a:srgbClr val="F59E0B"/>
+            </a:solidFill>
+          </a:ln>
+        </p:spPr>
+        <p:style>
+          <a:lnRef idx="1">
+            <a:schemeClr val="accent1"/>
+          </a:lnRef>
+          <a:fillRef idx="3">
+            <a:schemeClr val="accent1"/>
+          </a:fillRef>
+          <a:effectRef idx="2">
+            <a:schemeClr val="accent1"/>
+          </a:effectRef>
+          <a:fontRef idx="minor">
+            <a:schemeClr val="lt1"/>
+          </a:fontRef>
+        </p:style>
+        <p:txBody>
+          <a:bodyPr rtlCol="0" anchor="ctr"/>
+          <a:lstStyle/>
+          <a:p>
+            <a:pPr algn="ctr"/>
+          </a:p>
+        </p:txBody>
+      </p:sp>
+      <p:sp>
+        <p:nvSpPr>
+          <p:cNvPr id="29" name="TextBox 28"/>
           <p:cNvSpPr txBox="1"/>
           <p:nvPr/>
         </p:nvSpPr>
         <p:spPr>
           <a:xfrm>
-            <a:off x="658368" y="6473952"/>
-            <a:ext cx="9875520" cy="201168"/>
+            <a:off x="7481620" y="2148840"/>
+            <a:ext cx="438912" cy="420624"/>
+          </a:xfrm>
+          <a:prstGeom prst="rect">
+            <a:avLst/>
+          </a:prstGeom>
+          <a:noFill/>
+        </p:spPr>
+        <p:txBody>
+          <a:bodyPr wrap="square" anchor="ctr">
+            <a:spAutoFit/>
+          </a:bodyPr>
+          <a:lstStyle/>
+          <a:p>
+            <a:pPr algn="ctr"/>
+            <a:r>
+              <a:rPr sz="1400" b="1">
+                <a:solidFill>
+                  <a:srgbClr val="FFFFFF"/>
+                </a:solidFill>
+                <a:latin typeface="Arial"/>
+              </a:rPr>
+              <a:t>4</a:t>
+            </a:r>
+          </a:p>
+        </p:txBody>
+      </p:sp>
+      <p:sp>
+        <p:nvSpPr>
+          <p:cNvPr id="30" name="TextBox 29"/>
+          <p:cNvSpPr txBox="1"/>
+          <p:nvPr/>
+        </p:nvSpPr>
+        <p:spPr>
+          <a:xfrm>
+            <a:off x="8085124" y="2103120"/>
+            <a:ext cx="1009497" cy="329184"/>
           </a:xfrm>
           <a:prstGeom prst="rect">
             <a:avLst/>
@@ -5890,27 +6576,62 @@
           <a:p>
             <a:pPr algn="l"/>
             <a:r>
-              <a:rPr sz="800" b="0">
-                <a:solidFill>
-                  <a:srgbClr val="5B6372"/>
+              <a:rPr sz="1400" b="1">
+                <a:solidFill>
+                  <a:srgbClr val="F59E0B"/>
                 </a:solidFill>
                 <a:latin typeface="Arial"/>
               </a:rPr>
-              <a:t>TGS-2024048310 · ACTIVITY PRACTICE · Tertiary Infotech Academy Pte Ltd</a:t>
-            </a:r>
-          </a:p>
-        </p:txBody>
-      </p:sp>
-      <p:sp>
-        <p:nvSpPr>
-          <p:cNvPr id="8" name="Rounded Rectangle 7"/>
+              <a:t>Constrain</a:t>
+            </a:r>
+          </a:p>
+        </p:txBody>
+      </p:sp>
+      <p:sp>
+        <p:nvSpPr>
+          <p:cNvPr id="31" name="TextBox 30"/>
+          <p:cNvSpPr txBox="1"/>
+          <p:nvPr/>
+        </p:nvSpPr>
+        <p:spPr>
+          <a:xfrm>
+            <a:off x="8085124" y="2487168"/>
+            <a:ext cx="1009497" cy="2852928"/>
+          </a:xfrm>
+          <a:prstGeom prst="rect">
+            <a:avLst/>
+          </a:prstGeom>
+          <a:noFill/>
+        </p:spPr>
+        <p:txBody>
+          <a:bodyPr wrap="square" anchor="t">
+            <a:spAutoFit/>
+          </a:bodyPr>
+          <a:lstStyle/>
+          <a:p>
+            <a:pPr algn="l"/>
+            <a:r>
+              <a:rPr sz="1150" b="0">
+                <a:solidFill>
+                  <a:srgbClr val="161B26"/>
+                </a:solidFill>
+                <a:latin typeface="Arial"/>
+              </a:rPr>
+              <a:t>Forbid invented facts, unsupported causation and decorative clutter.</a:t>
+            </a:r>
+          </a:p>
+        </p:txBody>
+      </p:sp>
+      <p:sp>
+        <p:nvSpPr>
+          <p:cNvPr id="32" name="Rounded Rectangle 31"/>
           <p:cNvSpPr/>
           <p:nvPr/>
         </p:nvSpPr>
         <p:spPr>
           <a:xfrm>
-            <a:off x="731520" y="1783080"/>
-            <a:ext cx="3401568" cy="1719072"/>
+            <a:off x="9478670" y="1920240"/>
+            <a:ext cx="1997049" cy="3566160"/>
           </a:xfrm>
           <a:prstGeom prst="roundRect">
             <a:avLst/>
@@ -5948,14 +6669,14 @@
       </p:sp>
       <p:sp>
         <p:nvSpPr>
-          <p:cNvPr id="9" name="Rectangle 8"/>
+          <p:cNvPr id="33" name="Rectangle 32"/>
           <p:cNvSpPr/>
           <p:nvPr/>
         </p:nvSpPr>
         <p:spPr>
           <a:xfrm>
-            <a:off x="731520" y="1783080"/>
-            <a:ext cx="73152" cy="1719072"/>
+            <a:off x="9478670" y="1920240"/>
+            <a:ext cx="73152" cy="3566160"/>
           </a:xfrm>
           <a:prstGeom prst="rect">
             <a:avLst/>
@@ -5993,13 +6714,13 @@
       </p:sp>
       <p:sp>
         <p:nvSpPr>
-          <p:cNvPr id="10" name="Rounded Rectangle 9"/>
+          <p:cNvPr id="34" name="Rounded Rectangle 33"/>
           <p:cNvSpPr/>
           <p:nvPr/>
         </p:nvSpPr>
         <p:spPr>
           <a:xfrm>
-            <a:off x="932688" y="2002536"/>
+            <a:off x="9679838" y="2139696"/>
             <a:ext cx="438912" cy="438912"/>
           </a:xfrm>
           <a:prstGeom prst="roundRect">
@@ -6038,13 +6759,13 @@
       </p:sp>
       <p:sp>
         <p:nvSpPr>
-          <p:cNvPr id="11" name="TextBox 10"/>
+          <p:cNvPr id="35" name="TextBox 34"/>
           <p:cNvSpPr txBox="1"/>
           <p:nvPr/>
         </p:nvSpPr>
         <p:spPr>
           <a:xfrm>
-            <a:off x="932688" y="2011680"/>
+            <a:off x="9679838" y="2148840"/>
             <a:ext cx="438912" cy="420624"/>
           </a:xfrm>
           <a:prstGeom prst="rect">
@@ -6066,21 +6787,21 @@
                 </a:solidFill>
                 <a:latin typeface="Arial"/>
               </a:rPr>
-              <a:t>1</a:t>
-            </a:r>
-          </a:p>
-        </p:txBody>
-      </p:sp>
-      <p:sp>
-        <p:nvSpPr>
-          <p:cNvPr id="12" name="TextBox 11"/>
+              <a:t>5</a:t>
+            </a:r>
+          </a:p>
+        </p:txBody>
+      </p:sp>
+      <p:sp>
+        <p:nvSpPr>
+          <p:cNvPr id="36" name="TextBox 35"/>
           <p:cNvSpPr txBox="1"/>
           <p:nvPr/>
         </p:nvSpPr>
         <p:spPr>
           <a:xfrm>
-            <a:off x="1536192" y="1965960"/>
-            <a:ext cx="2414016" cy="329184"/>
+            <a:off x="10283342" y="2103120"/>
+            <a:ext cx="1009497" cy="329184"/>
           </a:xfrm>
           <a:prstGeom prst="rect">
             <a:avLst/>
@@ -6101,21 +6822,21 @@
                 </a:solidFill>
                 <a:latin typeface="Arial"/>
               </a:rPr>
-              <a:t>Hook</a:t>
-            </a:r>
-          </a:p>
-        </p:txBody>
-      </p:sp>
-      <p:sp>
-        <p:nvSpPr>
-          <p:cNvPr id="13" name="TextBox 12"/>
+              <a:t>Generate</a:t>
+            </a:r>
+          </a:p>
+        </p:txBody>
+      </p:sp>
+      <p:sp>
+        <p:nvSpPr>
+          <p:cNvPr id="37" name="TextBox 36"/>
           <p:cNvSpPr txBox="1"/>
           <p:nvPr/>
         </p:nvSpPr>
         <p:spPr>
           <a:xfrm>
-            <a:off x="1536192" y="2350008"/>
-            <a:ext cx="2414016" cy="1005839"/>
+            <a:off x="10283342" y="2487168"/>
+            <a:ext cx="1009497" cy="2852928"/>
           </a:xfrm>
           <a:prstGeom prst="rect">
             <a:avLst/>
@@ -6136,1207 +6857,7 @@
                 </a:solidFill>
                 <a:latin typeface="Arial"/>
               </a:rPr>
-              <a:t>Title states the audience-relevant message.</a:t>
-            </a:r>
-          </a:p>
-        </p:txBody>
-      </p:sp>
-      <p:sp>
-        <p:nvSpPr>
-          <p:cNvPr id="14" name="Rounded Rectangle 13"/>
-          <p:cNvSpPr/>
-          <p:nvPr/>
-        </p:nvSpPr>
-        <p:spPr>
-          <a:xfrm>
-            <a:off x="4315968" y="1783080"/>
-            <a:ext cx="3401568" cy="1719072"/>
-          </a:xfrm>
-          <a:prstGeom prst="roundRect">
-            <a:avLst/>
-          </a:prstGeom>
-          <a:solidFill>
-            <a:srgbClr val="F5F8FC"/>
-          </a:solidFill>
-          <a:ln>
-            <a:solidFill>
-              <a:srgbClr val="E2E8F0"/>
-            </a:solidFill>
-          </a:ln>
-        </p:spPr>
-        <p:style>
-          <a:lnRef idx="1">
-            <a:schemeClr val="accent1"/>
-          </a:lnRef>
-          <a:fillRef idx="3">
-            <a:schemeClr val="accent1"/>
-          </a:fillRef>
-          <a:effectRef idx="2">
-            <a:schemeClr val="accent1"/>
-          </a:effectRef>
-          <a:fontRef idx="minor">
-            <a:schemeClr val="lt1"/>
-          </a:fontRef>
-        </p:style>
-        <p:txBody>
-          <a:bodyPr rtlCol="0" anchor="ctr"/>
-          <a:lstStyle/>
-          <a:p>
-            <a:pPr algn="ctr"/>
-          </a:p>
-        </p:txBody>
-      </p:sp>
-      <p:sp>
-        <p:nvSpPr>
-          <p:cNvPr id="15" name="Rectangle 14"/>
-          <p:cNvSpPr/>
-          <p:nvPr/>
-        </p:nvSpPr>
-        <p:spPr>
-          <a:xfrm>
-            <a:off x="4315968" y="1783080"/>
-            <a:ext cx="73152" cy="1719072"/>
-          </a:xfrm>
-          <a:prstGeom prst="rect">
-            <a:avLst/>
-          </a:prstGeom>
-          <a:solidFill>
-            <a:srgbClr val="10B981"/>
-          </a:solidFill>
-          <a:ln>
-            <a:solidFill>
-              <a:srgbClr val="10B981"/>
-            </a:solidFill>
-          </a:ln>
-        </p:spPr>
-        <p:style>
-          <a:lnRef idx="1">
-            <a:schemeClr val="accent1"/>
-          </a:lnRef>
-          <a:fillRef idx="3">
-            <a:schemeClr val="accent1"/>
-          </a:fillRef>
-          <a:effectRef idx="2">
-            <a:schemeClr val="accent1"/>
-          </a:effectRef>
-          <a:fontRef idx="minor">
-            <a:schemeClr val="lt1"/>
-          </a:fontRef>
-        </p:style>
-        <p:txBody>
-          <a:bodyPr rtlCol="0" anchor="ctr"/>
-          <a:lstStyle/>
-          <a:p>
-            <a:pPr algn="ctr"/>
-          </a:p>
-        </p:txBody>
-      </p:sp>
-      <p:sp>
-        <p:nvSpPr>
-          <p:cNvPr id="16" name="Rounded Rectangle 15"/>
-          <p:cNvSpPr/>
-          <p:nvPr/>
-        </p:nvSpPr>
-        <p:spPr>
-          <a:xfrm>
-            <a:off x="4517136" y="2002536"/>
-            <a:ext cx="438912" cy="438912"/>
-          </a:xfrm>
-          <a:prstGeom prst="roundRect">
-            <a:avLst/>
-          </a:prstGeom>
-          <a:solidFill>
-            <a:srgbClr val="10B981"/>
-          </a:solidFill>
-          <a:ln>
-            <a:solidFill>
-              <a:srgbClr val="10B981"/>
-            </a:solidFill>
-          </a:ln>
-        </p:spPr>
-        <p:style>
-          <a:lnRef idx="1">
-            <a:schemeClr val="accent1"/>
-          </a:lnRef>
-          <a:fillRef idx="3">
-            <a:schemeClr val="accent1"/>
-          </a:fillRef>
-          <a:effectRef idx="2">
-            <a:schemeClr val="accent1"/>
-          </a:effectRef>
-          <a:fontRef idx="minor">
-            <a:schemeClr val="lt1"/>
-          </a:fontRef>
-        </p:style>
-        <p:txBody>
-          <a:bodyPr rtlCol="0" anchor="ctr"/>
-          <a:lstStyle/>
-          <a:p>
-            <a:pPr algn="ctr"/>
-          </a:p>
-        </p:txBody>
-      </p:sp>
-      <p:sp>
-        <p:nvSpPr>
-          <p:cNvPr id="17" name="TextBox 16"/>
-          <p:cNvSpPr txBox="1"/>
-          <p:nvPr/>
-        </p:nvSpPr>
-        <p:spPr>
-          <a:xfrm>
-            <a:off x="4517136" y="2011680"/>
-            <a:ext cx="438912" cy="420624"/>
-          </a:xfrm>
-          <a:prstGeom prst="rect">
-            <a:avLst/>
-          </a:prstGeom>
-          <a:noFill/>
-        </p:spPr>
-        <p:txBody>
-          <a:bodyPr wrap="square" anchor="ctr">
-            <a:spAutoFit/>
-          </a:bodyPr>
-          <a:lstStyle/>
-          <a:p>
-            <a:pPr algn="ctr"/>
-            <a:r>
-              <a:rPr sz="1400" b="1">
-                <a:solidFill>
-                  <a:srgbClr val="FFFFFF"/>
-                </a:solidFill>
-                <a:latin typeface="Arial"/>
-              </a:rPr>
-              <a:t>2</a:t>
-            </a:r>
-          </a:p>
-        </p:txBody>
-      </p:sp>
-      <p:sp>
-        <p:nvSpPr>
-          <p:cNvPr id="18" name="TextBox 17"/>
-          <p:cNvSpPr txBox="1"/>
-          <p:nvPr/>
-        </p:nvSpPr>
-        <p:spPr>
-          <a:xfrm>
-            <a:off x="5120640" y="1965960"/>
-            <a:ext cx="2414016" cy="329184"/>
-          </a:xfrm>
-          <a:prstGeom prst="rect">
-            <a:avLst/>
-          </a:prstGeom>
-          <a:noFill/>
-        </p:spPr>
-        <p:txBody>
-          <a:bodyPr wrap="square" anchor="t">
-            <a:spAutoFit/>
-          </a:bodyPr>
-          <a:lstStyle/>
-          <a:p>
-            <a:pPr algn="l"/>
-            <a:r>
-              <a:rPr sz="1400" b="1">
-                <a:solidFill>
-                  <a:srgbClr val="10B981"/>
-                </a:solidFill>
-                <a:latin typeface="Arial"/>
-              </a:rPr>
-              <a:t>Context</a:t>
-            </a:r>
-          </a:p>
-        </p:txBody>
-      </p:sp>
-      <p:sp>
-        <p:nvSpPr>
-          <p:cNvPr id="19" name="TextBox 18"/>
-          <p:cNvSpPr txBox="1"/>
-          <p:nvPr/>
-        </p:nvSpPr>
-        <p:spPr>
-          <a:xfrm>
-            <a:off x="5120640" y="2350008"/>
-            <a:ext cx="2414016" cy="1005839"/>
-          </a:xfrm>
-          <a:prstGeom prst="rect">
-            <a:avLst/>
-          </a:prstGeom>
-          <a:noFill/>
-        </p:spPr>
-        <p:txBody>
-          <a:bodyPr wrap="square" anchor="t">
-            <a:spAutoFit/>
-          </a:bodyPr>
-          <a:lstStyle/>
-          <a:p>
-            <a:pPr algn="l"/>
-            <a:r>
-              <a:rPr sz="1150" b="0">
-                <a:solidFill>
-                  <a:srgbClr val="161B26"/>
-                </a:solidFill>
-                <a:latin typeface="Arial"/>
-              </a:rPr>
-              <a:t>Source, timeframe, unit and scope.</a:t>
-            </a:r>
-          </a:p>
-        </p:txBody>
-      </p:sp>
-      <p:sp>
-        <p:nvSpPr>
-          <p:cNvPr id="20" name="Rounded Rectangle 19"/>
-          <p:cNvSpPr/>
-          <p:nvPr/>
-        </p:nvSpPr>
-        <p:spPr>
-          <a:xfrm>
-            <a:off x="7900416" y="1783080"/>
-            <a:ext cx="3401568" cy="1719072"/>
-          </a:xfrm>
-          <a:prstGeom prst="roundRect">
-            <a:avLst/>
-          </a:prstGeom>
-          <a:solidFill>
-            <a:srgbClr val="F5F8FC"/>
-          </a:solidFill>
-          <a:ln>
-            <a:solidFill>
-              <a:srgbClr val="E2E8F0"/>
-            </a:solidFill>
-          </a:ln>
-        </p:spPr>
-        <p:style>
-          <a:lnRef idx="1">
-            <a:schemeClr val="accent1"/>
-          </a:lnRef>
-          <a:fillRef idx="3">
-            <a:schemeClr val="accent1"/>
-          </a:fillRef>
-          <a:effectRef idx="2">
-            <a:schemeClr val="accent1"/>
-          </a:effectRef>
-          <a:fontRef idx="minor">
-            <a:schemeClr val="lt1"/>
-          </a:fontRef>
-        </p:style>
-        <p:txBody>
-          <a:bodyPr rtlCol="0" anchor="ctr"/>
-          <a:lstStyle/>
-          <a:p>
-            <a:pPr algn="ctr"/>
-          </a:p>
-        </p:txBody>
-      </p:sp>
-      <p:sp>
-        <p:nvSpPr>
-          <p:cNvPr id="21" name="Rectangle 20"/>
-          <p:cNvSpPr/>
-          <p:nvPr/>
-        </p:nvSpPr>
-        <p:spPr>
-          <a:xfrm>
-            <a:off x="7900416" y="1783080"/>
-            <a:ext cx="73152" cy="1719072"/>
-          </a:xfrm>
-          <a:prstGeom prst="rect">
-            <a:avLst/>
-          </a:prstGeom>
-          <a:solidFill>
-            <a:srgbClr val="7C3AED"/>
-          </a:solidFill>
-          <a:ln>
-            <a:solidFill>
-              <a:srgbClr val="7C3AED"/>
-            </a:solidFill>
-          </a:ln>
-        </p:spPr>
-        <p:style>
-          <a:lnRef idx="1">
-            <a:schemeClr val="accent1"/>
-          </a:lnRef>
-          <a:fillRef idx="3">
-            <a:schemeClr val="accent1"/>
-          </a:fillRef>
-          <a:effectRef idx="2">
-            <a:schemeClr val="accent1"/>
-          </a:effectRef>
-          <a:fontRef idx="minor">
-            <a:schemeClr val="lt1"/>
-          </a:fontRef>
-        </p:style>
-        <p:txBody>
-          <a:bodyPr rtlCol="0" anchor="ctr"/>
-          <a:lstStyle/>
-          <a:p>
-            <a:pPr algn="ctr"/>
-          </a:p>
-        </p:txBody>
-      </p:sp>
-      <p:sp>
-        <p:nvSpPr>
-          <p:cNvPr id="22" name="Rounded Rectangle 21"/>
-          <p:cNvSpPr/>
-          <p:nvPr/>
-        </p:nvSpPr>
-        <p:spPr>
-          <a:xfrm>
-            <a:off x="8101584" y="2002536"/>
-            <a:ext cx="438912" cy="438912"/>
-          </a:xfrm>
-          <a:prstGeom prst="roundRect">
-            <a:avLst/>
-          </a:prstGeom>
-          <a:solidFill>
-            <a:srgbClr val="7C3AED"/>
-          </a:solidFill>
-          <a:ln>
-            <a:solidFill>
-              <a:srgbClr val="7C3AED"/>
-            </a:solidFill>
-          </a:ln>
-        </p:spPr>
-        <p:style>
-          <a:lnRef idx="1">
-            <a:schemeClr val="accent1"/>
-          </a:lnRef>
-          <a:fillRef idx="3">
-            <a:schemeClr val="accent1"/>
-          </a:fillRef>
-          <a:effectRef idx="2">
-            <a:schemeClr val="accent1"/>
-          </a:effectRef>
-          <a:fontRef idx="minor">
-            <a:schemeClr val="lt1"/>
-          </a:fontRef>
-        </p:style>
-        <p:txBody>
-          <a:bodyPr rtlCol="0" anchor="ctr"/>
-          <a:lstStyle/>
-          <a:p>
-            <a:pPr algn="ctr"/>
-          </a:p>
-        </p:txBody>
-      </p:sp>
-      <p:sp>
-        <p:nvSpPr>
-          <p:cNvPr id="23" name="TextBox 22"/>
-          <p:cNvSpPr txBox="1"/>
-          <p:nvPr/>
-        </p:nvSpPr>
-        <p:spPr>
-          <a:xfrm>
-            <a:off x="8101584" y="2011680"/>
-            <a:ext cx="438912" cy="420624"/>
-          </a:xfrm>
-          <a:prstGeom prst="rect">
-            <a:avLst/>
-          </a:prstGeom>
-          <a:noFill/>
-        </p:spPr>
-        <p:txBody>
-          <a:bodyPr wrap="square" anchor="ctr">
-            <a:spAutoFit/>
-          </a:bodyPr>
-          <a:lstStyle/>
-          <a:p>
-            <a:pPr algn="ctr"/>
-            <a:r>
-              <a:rPr sz="1400" b="1">
-                <a:solidFill>
-                  <a:srgbClr val="FFFFFF"/>
-                </a:solidFill>
-                <a:latin typeface="Arial"/>
-              </a:rPr>
-              <a:t>3</a:t>
-            </a:r>
-          </a:p>
-        </p:txBody>
-      </p:sp>
-      <p:sp>
-        <p:nvSpPr>
-          <p:cNvPr id="24" name="TextBox 23"/>
-          <p:cNvSpPr txBox="1"/>
-          <p:nvPr/>
-        </p:nvSpPr>
-        <p:spPr>
-          <a:xfrm>
-            <a:off x="8705088" y="1965960"/>
-            <a:ext cx="2414016" cy="329184"/>
-          </a:xfrm>
-          <a:prstGeom prst="rect">
-            <a:avLst/>
-          </a:prstGeom>
-          <a:noFill/>
-        </p:spPr>
-        <p:txBody>
-          <a:bodyPr wrap="square" anchor="t">
-            <a:spAutoFit/>
-          </a:bodyPr>
-          <a:lstStyle/>
-          <a:p>
-            <a:pPr algn="l"/>
-            <a:r>
-              <a:rPr sz="1400" b="1">
-                <a:solidFill>
-                  <a:srgbClr val="7C3AED"/>
-                </a:solidFill>
-                <a:latin typeface="Arial"/>
-              </a:rPr>
-              <a:t>Evidence</a:t>
-            </a:r>
-          </a:p>
-        </p:txBody>
-      </p:sp>
-      <p:sp>
-        <p:nvSpPr>
-          <p:cNvPr id="25" name="TextBox 24"/>
-          <p:cNvSpPr txBox="1"/>
-          <p:nvPr/>
-        </p:nvSpPr>
-        <p:spPr>
-          <a:xfrm>
-            <a:off x="8705088" y="2350008"/>
-            <a:ext cx="2414016" cy="1005839"/>
-          </a:xfrm>
-          <a:prstGeom prst="rect">
-            <a:avLst/>
-          </a:prstGeom>
-          <a:noFill/>
-        </p:spPr>
-        <p:txBody>
-          <a:bodyPr wrap="square" anchor="t">
-            <a:spAutoFit/>
-          </a:bodyPr>
-          <a:lstStyle/>
-          <a:p>
-            <a:pPr algn="l"/>
-            <a:r>
-              <a:rPr sz="1150" b="0">
-                <a:solidFill>
-                  <a:srgbClr val="161B26"/>
-                </a:solidFill>
-                <a:latin typeface="Arial"/>
-              </a:rPr>
-              <a:t>One primary chart or process carries the proof.</a:t>
-            </a:r>
-          </a:p>
-        </p:txBody>
-      </p:sp>
-      <p:sp>
-        <p:nvSpPr>
-          <p:cNvPr id="26" name="Rounded Rectangle 25"/>
-          <p:cNvSpPr/>
-          <p:nvPr/>
-        </p:nvSpPr>
-        <p:spPr>
-          <a:xfrm>
-            <a:off x="731520" y="3776472"/>
-            <a:ext cx="3401568" cy="1719072"/>
-          </a:xfrm>
-          <a:prstGeom prst="roundRect">
-            <a:avLst/>
-          </a:prstGeom>
-          <a:solidFill>
-            <a:srgbClr val="F5F8FC"/>
-          </a:solidFill>
-          <a:ln>
-            <a:solidFill>
-              <a:srgbClr val="E2E8F0"/>
-            </a:solidFill>
-          </a:ln>
-        </p:spPr>
-        <p:style>
-          <a:lnRef idx="1">
-            <a:schemeClr val="accent1"/>
-          </a:lnRef>
-          <a:fillRef idx="3">
-            <a:schemeClr val="accent1"/>
-          </a:fillRef>
-          <a:effectRef idx="2">
-            <a:schemeClr val="accent1"/>
-          </a:effectRef>
-          <a:fontRef idx="minor">
-            <a:schemeClr val="lt1"/>
-          </a:fontRef>
-        </p:style>
-        <p:txBody>
-          <a:bodyPr rtlCol="0" anchor="ctr"/>
-          <a:lstStyle/>
-          <a:p>
-            <a:pPr algn="ctr"/>
-          </a:p>
-        </p:txBody>
-      </p:sp>
-      <p:sp>
-        <p:nvSpPr>
-          <p:cNvPr id="27" name="Rectangle 26"/>
-          <p:cNvSpPr/>
-          <p:nvPr/>
-        </p:nvSpPr>
-        <p:spPr>
-          <a:xfrm>
-            <a:off x="731520" y="3776472"/>
-            <a:ext cx="73152" cy="1719072"/>
-          </a:xfrm>
-          <a:prstGeom prst="rect">
-            <a:avLst/>
-          </a:prstGeom>
-          <a:solidFill>
-            <a:srgbClr val="F59E0B"/>
-          </a:solidFill>
-          <a:ln>
-            <a:solidFill>
-              <a:srgbClr val="F59E0B"/>
-            </a:solidFill>
-          </a:ln>
-        </p:spPr>
-        <p:style>
-          <a:lnRef idx="1">
-            <a:schemeClr val="accent1"/>
-          </a:lnRef>
-          <a:fillRef idx="3">
-            <a:schemeClr val="accent1"/>
-          </a:fillRef>
-          <a:effectRef idx="2">
-            <a:schemeClr val="accent1"/>
-          </a:effectRef>
-          <a:fontRef idx="minor">
-            <a:schemeClr val="lt1"/>
-          </a:fontRef>
-        </p:style>
-        <p:txBody>
-          <a:bodyPr rtlCol="0" anchor="ctr"/>
-          <a:lstStyle/>
-          <a:p>
-            <a:pPr algn="ctr"/>
-          </a:p>
-        </p:txBody>
-      </p:sp>
-      <p:sp>
-        <p:nvSpPr>
-          <p:cNvPr id="28" name="Rounded Rectangle 27"/>
-          <p:cNvSpPr/>
-          <p:nvPr/>
-        </p:nvSpPr>
-        <p:spPr>
-          <a:xfrm>
-            <a:off x="932688" y="3995928"/>
-            <a:ext cx="438912" cy="438912"/>
-          </a:xfrm>
-          <a:prstGeom prst="roundRect">
-            <a:avLst/>
-          </a:prstGeom>
-          <a:solidFill>
-            <a:srgbClr val="F59E0B"/>
-          </a:solidFill>
-          <a:ln>
-            <a:solidFill>
-              <a:srgbClr val="F59E0B"/>
-            </a:solidFill>
-          </a:ln>
-        </p:spPr>
-        <p:style>
-          <a:lnRef idx="1">
-            <a:schemeClr val="accent1"/>
-          </a:lnRef>
-          <a:fillRef idx="3">
-            <a:schemeClr val="accent1"/>
-          </a:fillRef>
-          <a:effectRef idx="2">
-            <a:schemeClr val="accent1"/>
-          </a:effectRef>
-          <a:fontRef idx="minor">
-            <a:schemeClr val="lt1"/>
-          </a:fontRef>
-        </p:style>
-        <p:txBody>
-          <a:bodyPr rtlCol="0" anchor="ctr"/>
-          <a:lstStyle/>
-          <a:p>
-            <a:pPr algn="ctr"/>
-          </a:p>
-        </p:txBody>
-      </p:sp>
-      <p:sp>
-        <p:nvSpPr>
-          <p:cNvPr id="29" name="TextBox 28"/>
-          <p:cNvSpPr txBox="1"/>
-          <p:nvPr/>
-        </p:nvSpPr>
-        <p:spPr>
-          <a:xfrm>
-            <a:off x="932688" y="4005072"/>
-            <a:ext cx="438912" cy="420624"/>
-          </a:xfrm>
-          <a:prstGeom prst="rect">
-            <a:avLst/>
-          </a:prstGeom>
-          <a:noFill/>
-        </p:spPr>
-        <p:txBody>
-          <a:bodyPr wrap="square" anchor="ctr">
-            <a:spAutoFit/>
-          </a:bodyPr>
-          <a:lstStyle/>
-          <a:p>
-            <a:pPr algn="ctr"/>
-            <a:r>
-              <a:rPr sz="1400" b="1">
-                <a:solidFill>
-                  <a:srgbClr val="FFFFFF"/>
-                </a:solidFill>
-                <a:latin typeface="Arial"/>
-              </a:rPr>
-              <a:t>4</a:t>
-            </a:r>
-          </a:p>
-        </p:txBody>
-      </p:sp>
-      <p:sp>
-        <p:nvSpPr>
-          <p:cNvPr id="30" name="TextBox 29"/>
-          <p:cNvSpPr txBox="1"/>
-          <p:nvPr/>
-        </p:nvSpPr>
-        <p:spPr>
-          <a:xfrm>
-            <a:off x="1536192" y="3959352"/>
-            <a:ext cx="2414016" cy="329184"/>
-          </a:xfrm>
-          <a:prstGeom prst="rect">
-            <a:avLst/>
-          </a:prstGeom>
-          <a:noFill/>
-        </p:spPr>
-        <p:txBody>
-          <a:bodyPr wrap="square" anchor="t">
-            <a:spAutoFit/>
-          </a:bodyPr>
-          <a:lstStyle/>
-          <a:p>
-            <a:pPr algn="l"/>
-            <a:r>
-              <a:rPr sz="1400" b="1">
-                <a:solidFill>
-                  <a:srgbClr val="F59E0B"/>
-                </a:solidFill>
-                <a:latin typeface="Arial"/>
-              </a:rPr>
-              <a:t>Guidance</a:t>
-            </a:r>
-          </a:p>
-        </p:txBody>
-      </p:sp>
-      <p:sp>
-        <p:nvSpPr>
-          <p:cNvPr id="31" name="TextBox 30"/>
-          <p:cNvSpPr txBox="1"/>
-          <p:nvPr/>
-        </p:nvSpPr>
-        <p:spPr>
-          <a:xfrm>
-            <a:off x="1536192" y="4343400"/>
-            <a:ext cx="2414016" cy="1005839"/>
-          </a:xfrm>
-          <a:prstGeom prst="rect">
-            <a:avLst/>
-          </a:prstGeom>
-          <a:noFill/>
-        </p:spPr>
-        <p:txBody>
-          <a:bodyPr wrap="square" anchor="t">
-            <a:spAutoFit/>
-          </a:bodyPr>
-          <a:lstStyle/>
-          <a:p>
-            <a:pPr algn="l"/>
-            <a:r>
-              <a:rPr sz="1150" b="0">
-                <a:solidFill>
-                  <a:srgbClr val="161B26"/>
-                </a:solidFill>
-                <a:latin typeface="Arial"/>
-              </a:rPr>
-              <a:t>Arrows, order and whitespace control the reading path.</a:t>
-            </a:r>
-          </a:p>
-        </p:txBody>
-      </p:sp>
-      <p:sp>
-        <p:nvSpPr>
-          <p:cNvPr id="32" name="Rounded Rectangle 31"/>
-          <p:cNvSpPr/>
-          <p:nvPr/>
-        </p:nvSpPr>
-        <p:spPr>
-          <a:xfrm>
-            <a:off x="4315968" y="3776472"/>
-            <a:ext cx="3401568" cy="1719072"/>
-          </a:xfrm>
-          <a:prstGeom prst="roundRect">
-            <a:avLst/>
-          </a:prstGeom>
-          <a:solidFill>
-            <a:srgbClr val="F5F8FC"/>
-          </a:solidFill>
-          <a:ln>
-            <a:solidFill>
-              <a:srgbClr val="E2E8F0"/>
-            </a:solidFill>
-          </a:ln>
-        </p:spPr>
-        <p:style>
-          <a:lnRef idx="1">
-            <a:schemeClr val="accent1"/>
-          </a:lnRef>
-          <a:fillRef idx="3">
-            <a:schemeClr val="accent1"/>
-          </a:fillRef>
-          <a:effectRef idx="2">
-            <a:schemeClr val="accent1"/>
-          </a:effectRef>
-          <a:fontRef idx="minor">
-            <a:schemeClr val="lt1"/>
-          </a:fontRef>
-        </p:style>
-        <p:txBody>
-          <a:bodyPr rtlCol="0" anchor="ctr"/>
-          <a:lstStyle/>
-          <a:p>
-            <a:pPr algn="ctr"/>
-          </a:p>
-        </p:txBody>
-      </p:sp>
-      <p:sp>
-        <p:nvSpPr>
-          <p:cNvPr id="33" name="Rectangle 32"/>
-          <p:cNvSpPr/>
-          <p:nvPr/>
-        </p:nvSpPr>
-        <p:spPr>
-          <a:xfrm>
-            <a:off x="4315968" y="3776472"/>
-            <a:ext cx="73152" cy="1719072"/>
-          </a:xfrm>
-          <a:prstGeom prst="rect">
-            <a:avLst/>
-          </a:prstGeom>
-          <a:solidFill>
-            <a:srgbClr val="1F6FEB"/>
-          </a:solidFill>
-          <a:ln>
-            <a:solidFill>
-              <a:srgbClr val="1F6FEB"/>
-            </a:solidFill>
-          </a:ln>
-        </p:spPr>
-        <p:style>
-          <a:lnRef idx="1">
-            <a:schemeClr val="accent1"/>
-          </a:lnRef>
-          <a:fillRef idx="3">
-            <a:schemeClr val="accent1"/>
-          </a:fillRef>
-          <a:effectRef idx="2">
-            <a:schemeClr val="accent1"/>
-          </a:effectRef>
-          <a:fontRef idx="minor">
-            <a:schemeClr val="lt1"/>
-          </a:fontRef>
-        </p:style>
-        <p:txBody>
-          <a:bodyPr rtlCol="0" anchor="ctr"/>
-          <a:lstStyle/>
-          <a:p>
-            <a:pPr algn="ctr"/>
-          </a:p>
-        </p:txBody>
-      </p:sp>
-      <p:sp>
-        <p:nvSpPr>
-          <p:cNvPr id="34" name="Rounded Rectangle 33"/>
-          <p:cNvSpPr/>
-          <p:nvPr/>
-        </p:nvSpPr>
-        <p:spPr>
-          <a:xfrm>
-            <a:off x="4517136" y="3995928"/>
-            <a:ext cx="438912" cy="438912"/>
-          </a:xfrm>
-          <a:prstGeom prst="roundRect">
-            <a:avLst/>
-          </a:prstGeom>
-          <a:solidFill>
-            <a:srgbClr val="1F6FEB"/>
-          </a:solidFill>
-          <a:ln>
-            <a:solidFill>
-              <a:srgbClr val="1F6FEB"/>
-            </a:solidFill>
-          </a:ln>
-        </p:spPr>
-        <p:style>
-          <a:lnRef idx="1">
-            <a:schemeClr val="accent1"/>
-          </a:lnRef>
-          <a:fillRef idx="3">
-            <a:schemeClr val="accent1"/>
-          </a:fillRef>
-          <a:effectRef idx="2">
-            <a:schemeClr val="accent1"/>
-          </a:effectRef>
-          <a:fontRef idx="minor">
-            <a:schemeClr val="lt1"/>
-          </a:fontRef>
-        </p:style>
-        <p:txBody>
-          <a:bodyPr rtlCol="0" anchor="ctr"/>
-          <a:lstStyle/>
-          <a:p>
-            <a:pPr algn="ctr"/>
-          </a:p>
-        </p:txBody>
-      </p:sp>
-      <p:sp>
-        <p:nvSpPr>
-          <p:cNvPr id="35" name="TextBox 34"/>
-          <p:cNvSpPr txBox="1"/>
-          <p:nvPr/>
-        </p:nvSpPr>
-        <p:spPr>
-          <a:xfrm>
-            <a:off x="4517136" y="4005072"/>
-            <a:ext cx="438912" cy="420624"/>
-          </a:xfrm>
-          <a:prstGeom prst="rect">
-            <a:avLst/>
-          </a:prstGeom>
-          <a:noFill/>
-        </p:spPr>
-        <p:txBody>
-          <a:bodyPr wrap="square" anchor="ctr">
-            <a:spAutoFit/>
-          </a:bodyPr>
-          <a:lstStyle/>
-          <a:p>
-            <a:pPr algn="ctr"/>
-            <a:r>
-              <a:rPr sz="1400" b="1">
-                <a:solidFill>
-                  <a:srgbClr val="FFFFFF"/>
-                </a:solidFill>
-                <a:latin typeface="Arial"/>
-              </a:rPr>
-              <a:t>5</a:t>
-            </a:r>
-          </a:p>
-        </p:txBody>
-      </p:sp>
-      <p:sp>
-        <p:nvSpPr>
-          <p:cNvPr id="36" name="TextBox 35"/>
-          <p:cNvSpPr txBox="1"/>
-          <p:nvPr/>
-        </p:nvSpPr>
-        <p:spPr>
-          <a:xfrm>
-            <a:off x="5120640" y="3959352"/>
-            <a:ext cx="2414016" cy="329184"/>
-          </a:xfrm>
-          <a:prstGeom prst="rect">
-            <a:avLst/>
-          </a:prstGeom>
-          <a:noFill/>
-        </p:spPr>
-        <p:txBody>
-          <a:bodyPr wrap="square" anchor="t">
-            <a:spAutoFit/>
-          </a:bodyPr>
-          <a:lstStyle/>
-          <a:p>
-            <a:pPr algn="l"/>
-            <a:r>
-              <a:rPr sz="1400" b="1">
-                <a:solidFill>
-                  <a:srgbClr val="1F6FEB"/>
-                </a:solidFill>
-                <a:latin typeface="Arial"/>
-              </a:rPr>
-              <a:t>Action</a:t>
-            </a:r>
-          </a:p>
-        </p:txBody>
-      </p:sp>
-      <p:sp>
-        <p:nvSpPr>
-          <p:cNvPr id="37" name="TextBox 36"/>
-          <p:cNvSpPr txBox="1"/>
-          <p:nvPr/>
-        </p:nvSpPr>
-        <p:spPr>
-          <a:xfrm>
-            <a:off x="5120640" y="4343400"/>
-            <a:ext cx="2414016" cy="1005839"/>
-          </a:xfrm>
-          <a:prstGeom prst="rect">
-            <a:avLst/>
-          </a:prstGeom>
-          <a:noFill/>
-        </p:spPr>
-        <p:txBody>
-          <a:bodyPr wrap="square" anchor="t">
-            <a:spAutoFit/>
-          </a:bodyPr>
-          <a:lstStyle/>
-          <a:p>
-            <a:pPr algn="l"/>
-            <a:r>
-              <a:rPr sz="1150" b="0">
-                <a:solidFill>
-                  <a:srgbClr val="161B26"/>
-                </a:solidFill>
-                <a:latin typeface="Arial"/>
-              </a:rPr>
-              <a:t>A concise implication or next step.</a:t>
-            </a:r>
-          </a:p>
-        </p:txBody>
-      </p:sp>
-      <p:sp>
-        <p:nvSpPr>
-          <p:cNvPr id="38" name="Rounded Rectangle 37"/>
-          <p:cNvSpPr/>
-          <p:nvPr/>
-        </p:nvSpPr>
-        <p:spPr>
-          <a:xfrm>
-            <a:off x="7900416" y="3776472"/>
-            <a:ext cx="3401568" cy="1719072"/>
-          </a:xfrm>
-          <a:prstGeom prst="roundRect">
-            <a:avLst/>
-          </a:prstGeom>
-          <a:solidFill>
-            <a:srgbClr val="F5F8FC"/>
-          </a:solidFill>
-          <a:ln>
-            <a:solidFill>
-              <a:srgbClr val="E2E8F0"/>
-            </a:solidFill>
-          </a:ln>
-        </p:spPr>
-        <p:style>
-          <a:lnRef idx="1">
-            <a:schemeClr val="accent1"/>
-          </a:lnRef>
-          <a:fillRef idx="3">
-            <a:schemeClr val="accent1"/>
-          </a:fillRef>
-          <a:effectRef idx="2">
-            <a:schemeClr val="accent1"/>
-          </a:effectRef>
-          <a:fontRef idx="minor">
-            <a:schemeClr val="lt1"/>
-          </a:fontRef>
-        </p:style>
-        <p:txBody>
-          <a:bodyPr rtlCol="0" anchor="ctr"/>
-          <a:lstStyle/>
-          <a:p>
-            <a:pPr algn="ctr"/>
-          </a:p>
-        </p:txBody>
-      </p:sp>
-      <p:sp>
-        <p:nvSpPr>
-          <p:cNvPr id="39" name="Rectangle 38"/>
-          <p:cNvSpPr/>
-          <p:nvPr/>
-        </p:nvSpPr>
-        <p:spPr>
-          <a:xfrm>
-            <a:off x="7900416" y="3776472"/>
-            <a:ext cx="73152" cy="1719072"/>
-          </a:xfrm>
-          <a:prstGeom prst="rect">
-            <a:avLst/>
-          </a:prstGeom>
-          <a:solidFill>
-            <a:srgbClr val="10B981"/>
-          </a:solidFill>
-          <a:ln>
-            <a:solidFill>
-              <a:srgbClr val="10B981"/>
-            </a:solidFill>
-          </a:ln>
-        </p:spPr>
-        <p:style>
-          <a:lnRef idx="1">
-            <a:schemeClr val="accent1"/>
-          </a:lnRef>
-          <a:fillRef idx="3">
-            <a:schemeClr val="accent1"/>
-          </a:fillRef>
-          <a:effectRef idx="2">
-            <a:schemeClr val="accent1"/>
-          </a:effectRef>
-          <a:fontRef idx="minor">
-            <a:schemeClr val="lt1"/>
-          </a:fontRef>
-        </p:style>
-        <p:txBody>
-          <a:bodyPr rtlCol="0" anchor="ctr"/>
-          <a:lstStyle/>
-          <a:p>
-            <a:pPr algn="ctr"/>
-          </a:p>
-        </p:txBody>
-      </p:sp>
-      <p:sp>
-        <p:nvSpPr>
-          <p:cNvPr id="40" name="Rounded Rectangle 39"/>
-          <p:cNvSpPr/>
-          <p:nvPr/>
-        </p:nvSpPr>
-        <p:spPr>
-          <a:xfrm>
-            <a:off x="8101584" y="3995928"/>
-            <a:ext cx="438912" cy="438912"/>
-          </a:xfrm>
-          <a:prstGeom prst="roundRect">
-            <a:avLst/>
-          </a:prstGeom>
-          <a:solidFill>
-            <a:srgbClr val="10B981"/>
-          </a:solidFill>
-          <a:ln>
-            <a:solidFill>
-              <a:srgbClr val="10B981"/>
-            </a:solidFill>
-          </a:ln>
-        </p:spPr>
-        <p:style>
-          <a:lnRef idx="1">
-            <a:schemeClr val="accent1"/>
-          </a:lnRef>
-          <a:fillRef idx="3">
-            <a:schemeClr val="accent1"/>
-          </a:fillRef>
-          <a:effectRef idx="2">
-            <a:schemeClr val="accent1"/>
-          </a:effectRef>
-          <a:fontRef idx="minor">
-            <a:schemeClr val="lt1"/>
-          </a:fontRef>
-        </p:style>
-        <p:txBody>
-          <a:bodyPr rtlCol="0" anchor="ctr"/>
-          <a:lstStyle/>
-          <a:p>
-            <a:pPr algn="ctr"/>
-          </a:p>
-        </p:txBody>
-      </p:sp>
-      <p:sp>
-        <p:nvSpPr>
-          <p:cNvPr id="41" name="TextBox 40"/>
-          <p:cNvSpPr txBox="1"/>
-          <p:nvPr/>
-        </p:nvSpPr>
-        <p:spPr>
-          <a:xfrm>
-            <a:off x="8101584" y="4005072"/>
-            <a:ext cx="438912" cy="420624"/>
-          </a:xfrm>
-          <a:prstGeom prst="rect">
-            <a:avLst/>
-          </a:prstGeom>
-          <a:noFill/>
-        </p:spPr>
-        <p:txBody>
-          <a:bodyPr wrap="square" anchor="ctr">
-            <a:spAutoFit/>
-          </a:bodyPr>
-          <a:lstStyle/>
-          <a:p>
-            <a:pPr algn="ctr"/>
-            <a:r>
-              <a:rPr sz="1400" b="1">
-                <a:solidFill>
-                  <a:srgbClr val="FFFFFF"/>
-                </a:solidFill>
-                <a:latin typeface="Arial"/>
-              </a:rPr>
-              <a:t>6</a:t>
-            </a:r>
-          </a:p>
-        </p:txBody>
-      </p:sp>
-      <p:sp>
-        <p:nvSpPr>
-          <p:cNvPr id="42" name="TextBox 41"/>
-          <p:cNvSpPr txBox="1"/>
-          <p:nvPr/>
-        </p:nvSpPr>
-        <p:spPr>
-          <a:xfrm>
-            <a:off x="8705088" y="3959352"/>
-            <a:ext cx="2414016" cy="329184"/>
-          </a:xfrm>
-          <a:prstGeom prst="rect">
-            <a:avLst/>
-          </a:prstGeom>
-          <a:noFill/>
-        </p:spPr>
-        <p:txBody>
-          <a:bodyPr wrap="square" anchor="t">
-            <a:spAutoFit/>
-          </a:bodyPr>
-          <a:lstStyle/>
-          <a:p>
-            <a:pPr algn="l"/>
-            <a:r>
-              <a:rPr sz="1400" b="1">
-                <a:solidFill>
-                  <a:srgbClr val="10B981"/>
-                </a:solidFill>
-                <a:latin typeface="Arial"/>
-              </a:rPr>
-              <a:t>Footer</a:t>
-            </a:r>
-          </a:p>
-        </p:txBody>
-      </p:sp>
-      <p:sp>
-        <p:nvSpPr>
-          <p:cNvPr id="43" name="TextBox 42"/>
-          <p:cNvSpPr txBox="1"/>
-          <p:nvPr/>
-        </p:nvSpPr>
-        <p:spPr>
-          <a:xfrm>
-            <a:off x="8705088" y="4343400"/>
-            <a:ext cx="2414016" cy="1005839"/>
-          </a:xfrm>
-          <a:prstGeom prst="rect">
-            <a:avLst/>
-          </a:prstGeom>
-          <a:noFill/>
-        </p:spPr>
-        <p:txBody>
-          <a:bodyPr wrap="square" anchor="t">
-            <a:spAutoFit/>
-          </a:bodyPr>
-          <a:lstStyle/>
-          <a:p>
-            <a:pPr algn="l"/>
-            <a:r>
-              <a:rPr sz="1150" b="0">
-                <a:solidFill>
-                  <a:srgbClr val="161B26"/>
-                </a:solidFill>
-                <a:latin typeface="Arial"/>
-              </a:rPr>
-              <a:t>Source, owner, date and accessibility notes.</a:t>
+              <a:t>Request two wireframe directions, then select by evidence fit.</a:t>
             </a:r>
           </a:p>
         </p:txBody>
@@ -7419,6 +6940,246 @@
             <a:avLst/>
           </a:prstGeom>
           <a:solidFill>
+            <a:srgbClr val="7C3AED"/>
+          </a:solidFill>
+          <a:ln>
+            <a:solidFill>
+              <a:srgbClr val="7C3AED"/>
+            </a:solidFill>
+          </a:ln>
+        </p:spPr>
+        <p:style>
+          <a:lnRef idx="1">
+            <a:schemeClr val="accent1"/>
+          </a:lnRef>
+          <a:fillRef idx="3">
+            <a:schemeClr val="accent1"/>
+          </a:fillRef>
+          <a:effectRef idx="2">
+            <a:schemeClr val="accent1"/>
+          </a:effectRef>
+          <a:fontRef idx="minor">
+            <a:schemeClr val="lt1"/>
+          </a:fontRef>
+        </p:style>
+        <p:txBody>
+          <a:bodyPr rtlCol="0" anchor="ctr"/>
+          <a:lstStyle/>
+          <a:p>
+            <a:pPr algn="ctr"/>
+          </a:p>
+        </p:txBody>
+      </p:sp>
+      <p:sp>
+        <p:nvSpPr>
+          <p:cNvPr id="4" name="TextBox 3"/>
+          <p:cNvSpPr txBox="1"/>
+          <p:nvPr/>
+        </p:nvSpPr>
+        <p:spPr>
+          <a:xfrm>
+            <a:off x="658368" y="384048"/>
+            <a:ext cx="10789920" cy="320040"/>
+          </a:xfrm>
+          <a:prstGeom prst="rect">
+            <a:avLst/>
+          </a:prstGeom>
+          <a:noFill/>
+        </p:spPr>
+        <p:txBody>
+          <a:bodyPr wrap="square" anchor="t">
+            <a:spAutoFit/>
+          </a:bodyPr>
+          <a:lstStyle/>
+          <a:p>
+            <a:pPr algn="l"/>
+            <a:r>
+              <a:rPr sz="1100" b="1">
+                <a:solidFill>
+                  <a:srgbClr val="7C3AED"/>
+                </a:solidFill>
+                <a:latin typeface="Arial"/>
+              </a:rPr>
+              <a:t>ACTIVITY 02 · EXAMPLE</a:t>
+            </a:r>
+          </a:p>
+        </p:txBody>
+      </p:sp>
+      <p:sp>
+        <p:nvSpPr>
+          <p:cNvPr id="5" name="TextBox 4"/>
+          <p:cNvSpPr txBox="1"/>
+          <p:nvPr/>
+        </p:nvSpPr>
+        <p:spPr>
+          <a:xfrm>
+            <a:off x="658368" y="749808"/>
+            <a:ext cx="10789920" cy="658368"/>
+          </a:xfrm>
+          <a:prstGeom prst="rect">
+            <a:avLst/>
+          </a:prstGeom>
+          <a:noFill/>
+        </p:spPr>
+        <p:txBody>
+          <a:bodyPr wrap="square" anchor="t">
+            <a:spAutoFit/>
+          </a:bodyPr>
+          <a:lstStyle/>
+          <a:p>
+            <a:pPr algn="l"/>
+            <a:r>
+              <a:rPr sz="2700" b="1">
+                <a:solidFill>
+                  <a:srgbClr val="161B26"/>
+                </a:solidFill>
+                <a:latin typeface="Arial"/>
+              </a:rPr>
+              <a:t>Worked Output</a:t>
+            </a:r>
+          </a:p>
+        </p:txBody>
+      </p:sp>
+      <p:sp>
+        <p:nvSpPr>
+          <p:cNvPr id="6" name="Rectangle 5"/>
+          <p:cNvSpPr/>
+          <p:nvPr/>
+        </p:nvSpPr>
+        <p:spPr>
+          <a:xfrm>
+            <a:off x="658368" y="1444752"/>
+            <a:ext cx="10881360" cy="18288"/>
+          </a:xfrm>
+          <a:prstGeom prst="rect">
+            <a:avLst/>
+          </a:prstGeom>
+          <a:solidFill>
+            <a:srgbClr val="E2E8F0"/>
+          </a:solidFill>
+          <a:ln>
+            <a:solidFill>
+              <a:srgbClr val="E2E8F0"/>
+            </a:solidFill>
+          </a:ln>
+        </p:spPr>
+        <p:style>
+          <a:lnRef idx="1">
+            <a:schemeClr val="accent1"/>
+          </a:lnRef>
+          <a:fillRef idx="3">
+            <a:schemeClr val="accent1"/>
+          </a:fillRef>
+          <a:effectRef idx="2">
+            <a:schemeClr val="accent1"/>
+          </a:effectRef>
+          <a:fontRef idx="minor">
+            <a:schemeClr val="lt1"/>
+          </a:fontRef>
+        </p:style>
+        <p:txBody>
+          <a:bodyPr rtlCol="0" anchor="ctr"/>
+          <a:lstStyle/>
+          <a:p>
+            <a:pPr algn="ctr"/>
+          </a:p>
+        </p:txBody>
+      </p:sp>
+      <p:sp>
+        <p:nvSpPr>
+          <p:cNvPr id="7" name="TextBox 6"/>
+          <p:cNvSpPr txBox="1"/>
+          <p:nvPr/>
+        </p:nvSpPr>
+        <p:spPr>
+          <a:xfrm>
+            <a:off x="658368" y="6473952"/>
+            <a:ext cx="9875520" cy="201168"/>
+          </a:xfrm>
+          <a:prstGeom prst="rect">
+            <a:avLst/>
+          </a:prstGeom>
+          <a:noFill/>
+        </p:spPr>
+        <p:txBody>
+          <a:bodyPr wrap="square" anchor="t">
+            <a:spAutoFit/>
+          </a:bodyPr>
+          <a:lstStyle/>
+          <a:p>
+            <a:pPr algn="l"/>
+            <a:r>
+              <a:rPr sz="800" b="0">
+                <a:solidFill>
+                  <a:srgbClr val="5B6372"/>
+                </a:solidFill>
+                <a:latin typeface="Arial"/>
+              </a:rPr>
+              <a:t>TGS-2026064178 · ACTIVITY PRACTICE · Tertiary Infotech Academy Pte Ltd</a:t>
+            </a:r>
+          </a:p>
+        </p:txBody>
+      </p:sp>
+      <p:sp>
+        <p:nvSpPr>
+          <p:cNvPr id="8" name="Rounded Rectangle 7"/>
+          <p:cNvSpPr/>
+          <p:nvPr/>
+        </p:nvSpPr>
+        <p:spPr>
+          <a:xfrm>
+            <a:off x="731520" y="1783080"/>
+            <a:ext cx="3401568" cy="1719072"/>
+          </a:xfrm>
+          <a:prstGeom prst="roundRect">
+            <a:avLst/>
+          </a:prstGeom>
+          <a:solidFill>
+            <a:srgbClr val="F5F8FC"/>
+          </a:solidFill>
+          <a:ln>
+            <a:solidFill>
+              <a:srgbClr val="E2E8F0"/>
+            </a:solidFill>
+          </a:ln>
+        </p:spPr>
+        <p:style>
+          <a:lnRef idx="1">
+            <a:schemeClr val="accent1"/>
+          </a:lnRef>
+          <a:fillRef idx="3">
+            <a:schemeClr val="accent1"/>
+          </a:fillRef>
+          <a:effectRef idx="2">
+            <a:schemeClr val="accent1"/>
+          </a:effectRef>
+          <a:fontRef idx="minor">
+            <a:schemeClr val="lt1"/>
+          </a:fontRef>
+        </p:style>
+        <p:txBody>
+          <a:bodyPr rtlCol="0" anchor="ctr"/>
+          <a:lstStyle/>
+          <a:p>
+            <a:pPr algn="ctr"/>
+          </a:p>
+        </p:txBody>
+      </p:sp>
+      <p:sp>
+        <p:nvSpPr>
+          <p:cNvPr id="9" name="Rectangle 8"/>
+          <p:cNvSpPr/>
+          <p:nvPr/>
+        </p:nvSpPr>
+        <p:spPr>
+          <a:xfrm>
+            <a:off x="731520" y="1783080"/>
+            <a:ext cx="73152" cy="1719072"/>
+          </a:xfrm>
+          <a:prstGeom prst="rect">
+            <a:avLst/>
+          </a:prstGeom>
+          <a:solidFill>
             <a:srgbClr val="1F6FEB"/>
           </a:solidFill>
           <a:ln>
@@ -7451,14 +7212,94 @@
       </p:sp>
       <p:sp>
         <p:nvSpPr>
-          <p:cNvPr id="4" name="TextBox 3"/>
+          <p:cNvPr id="10" name="Rounded Rectangle 9"/>
+          <p:cNvSpPr/>
+          <p:nvPr/>
+        </p:nvSpPr>
+        <p:spPr>
+          <a:xfrm>
+            <a:off x="932688" y="2002536"/>
+            <a:ext cx="438912" cy="438912"/>
+          </a:xfrm>
+          <a:prstGeom prst="roundRect">
+            <a:avLst/>
+          </a:prstGeom>
+          <a:solidFill>
+            <a:srgbClr val="1F6FEB"/>
+          </a:solidFill>
+          <a:ln>
+            <a:solidFill>
+              <a:srgbClr val="1F6FEB"/>
+            </a:solidFill>
+          </a:ln>
+        </p:spPr>
+        <p:style>
+          <a:lnRef idx="1">
+            <a:schemeClr val="accent1"/>
+          </a:lnRef>
+          <a:fillRef idx="3">
+            <a:schemeClr val="accent1"/>
+          </a:fillRef>
+          <a:effectRef idx="2">
+            <a:schemeClr val="accent1"/>
+          </a:effectRef>
+          <a:fontRef idx="minor">
+            <a:schemeClr val="lt1"/>
+          </a:fontRef>
+        </p:style>
+        <p:txBody>
+          <a:bodyPr rtlCol="0" anchor="ctr"/>
+          <a:lstStyle/>
+          <a:p>
+            <a:pPr algn="ctr"/>
+          </a:p>
+        </p:txBody>
+      </p:sp>
+      <p:sp>
+        <p:nvSpPr>
+          <p:cNvPr id="11" name="TextBox 10"/>
           <p:cNvSpPr txBox="1"/>
           <p:nvPr/>
         </p:nvSpPr>
         <p:spPr>
           <a:xfrm>
-            <a:off x="658368" y="384048"/>
-            <a:ext cx="10789920" cy="320040"/>
+            <a:off x="932688" y="2011680"/>
+            <a:ext cx="438912" cy="420624"/>
+          </a:xfrm>
+          <a:prstGeom prst="rect">
+            <a:avLst/>
+          </a:prstGeom>
+          <a:noFill/>
+        </p:spPr>
+        <p:txBody>
+          <a:bodyPr wrap="square" anchor="ctr">
+            <a:spAutoFit/>
+          </a:bodyPr>
+          <a:lstStyle/>
+          <a:p>
+            <a:pPr algn="ctr"/>
+            <a:r>
+              <a:rPr sz="1400" b="1">
+                <a:solidFill>
+                  <a:srgbClr val="FFFFFF"/>
+                </a:solidFill>
+                <a:latin typeface="Arial"/>
+              </a:rPr>
+              <a:t>1</a:t>
+            </a:r>
+          </a:p>
+        </p:txBody>
+      </p:sp>
+      <p:sp>
+        <p:nvSpPr>
+          <p:cNvPr id="12" name="TextBox 11"/>
+          <p:cNvSpPr txBox="1"/>
+          <p:nvPr/>
+        </p:nvSpPr>
+        <p:spPr>
+          <a:xfrm>
+            <a:off x="1536192" y="1965960"/>
+            <a:ext cx="2414016" cy="329184"/>
           </a:xfrm>
           <a:prstGeom prst="rect">
             <a:avLst/>
@@ -7473,27 +7314,27 @@
           <a:p>
             <a:pPr algn="l"/>
             <a:r>
-              <a:rPr sz="1100" b="1">
+              <a:rPr sz="1400" b="1">
                 <a:solidFill>
                   <a:srgbClr val="1F6FEB"/>
                 </a:solidFill>
                 <a:latin typeface="Arial"/>
               </a:rPr>
-              <a:t>ACTIVITY 02 · ACCEPTANCE</a:t>
-            </a:r>
-          </a:p>
-        </p:txBody>
-      </p:sp>
-      <p:sp>
-        <p:nvSpPr>
-          <p:cNvPr id="5" name="TextBox 4"/>
+              <a:t>Hook</a:t>
+            </a:r>
+          </a:p>
+        </p:txBody>
+      </p:sp>
+      <p:sp>
+        <p:nvSpPr>
+          <p:cNvPr id="13" name="TextBox 12"/>
           <p:cNvSpPr txBox="1"/>
           <p:nvPr/>
         </p:nvSpPr>
         <p:spPr>
           <a:xfrm>
-            <a:off x="658368" y="749808"/>
-            <a:ext cx="10789920" cy="658368"/>
+            <a:off x="1536192" y="2350008"/>
+            <a:ext cx="2414016" cy="1005839"/>
           </a:xfrm>
           <a:prstGeom prst="rect">
             <a:avLst/>
@@ -7508,33 +7349,33 @@
           <a:p>
             <a:pPr algn="l"/>
             <a:r>
-              <a:rPr sz="2700" b="1">
+              <a:rPr sz="1150" b="0">
                 <a:solidFill>
                   <a:srgbClr val="161B26"/>
                 </a:solidFill>
                 <a:latin typeface="Arial"/>
               </a:rPr>
-              <a:t>What Good Looks Like</a:t>
-            </a:r>
-          </a:p>
-        </p:txBody>
-      </p:sp>
-      <p:sp>
-        <p:nvSpPr>
-          <p:cNvPr id="6" name="Rectangle 5"/>
+              <a:t>Title states the audience-relevant message.</a:t>
+            </a:r>
+          </a:p>
+        </p:txBody>
+      </p:sp>
+      <p:sp>
+        <p:nvSpPr>
+          <p:cNvPr id="14" name="Rounded Rectangle 13"/>
           <p:cNvSpPr/>
           <p:nvPr/>
         </p:nvSpPr>
         <p:spPr>
           <a:xfrm>
-            <a:off x="658368" y="1444752"/>
-            <a:ext cx="10881360" cy="18288"/>
-          </a:xfrm>
-          <a:prstGeom prst="rect">
-            <a:avLst/>
-          </a:prstGeom>
-          <a:solidFill>
-            <a:srgbClr val="E2E8F0"/>
+            <a:off x="4315968" y="1783080"/>
+            <a:ext cx="3401568" cy="1719072"/>
+          </a:xfrm>
+          <a:prstGeom prst="roundRect">
+            <a:avLst/>
+          </a:prstGeom>
+          <a:solidFill>
+            <a:srgbClr val="F5F8FC"/>
           </a:solidFill>
           <a:ln>
             <a:solidFill>
@@ -7566,14 +7407,139 @@
       </p:sp>
       <p:sp>
         <p:nvSpPr>
-          <p:cNvPr id="7" name="TextBox 6"/>
+          <p:cNvPr id="15" name="Rectangle 14"/>
+          <p:cNvSpPr/>
+          <p:nvPr/>
+        </p:nvSpPr>
+        <p:spPr>
+          <a:xfrm>
+            <a:off x="4315968" y="1783080"/>
+            <a:ext cx="73152" cy="1719072"/>
+          </a:xfrm>
+          <a:prstGeom prst="rect">
+            <a:avLst/>
+          </a:prstGeom>
+          <a:solidFill>
+            <a:srgbClr val="10B981"/>
+          </a:solidFill>
+          <a:ln>
+            <a:solidFill>
+              <a:srgbClr val="10B981"/>
+            </a:solidFill>
+          </a:ln>
+        </p:spPr>
+        <p:style>
+          <a:lnRef idx="1">
+            <a:schemeClr val="accent1"/>
+          </a:lnRef>
+          <a:fillRef idx="3">
+            <a:schemeClr val="accent1"/>
+          </a:fillRef>
+          <a:effectRef idx="2">
+            <a:schemeClr val="accent1"/>
+          </a:effectRef>
+          <a:fontRef idx="minor">
+            <a:schemeClr val="lt1"/>
+          </a:fontRef>
+        </p:style>
+        <p:txBody>
+          <a:bodyPr rtlCol="0" anchor="ctr"/>
+          <a:lstStyle/>
+          <a:p>
+            <a:pPr algn="ctr"/>
+          </a:p>
+        </p:txBody>
+      </p:sp>
+      <p:sp>
+        <p:nvSpPr>
+          <p:cNvPr id="16" name="Rounded Rectangle 15"/>
+          <p:cNvSpPr/>
+          <p:nvPr/>
+        </p:nvSpPr>
+        <p:spPr>
+          <a:xfrm>
+            <a:off x="4517136" y="2002536"/>
+            <a:ext cx="438912" cy="438912"/>
+          </a:xfrm>
+          <a:prstGeom prst="roundRect">
+            <a:avLst/>
+          </a:prstGeom>
+          <a:solidFill>
+            <a:srgbClr val="10B981"/>
+          </a:solidFill>
+          <a:ln>
+            <a:solidFill>
+              <a:srgbClr val="10B981"/>
+            </a:solidFill>
+          </a:ln>
+        </p:spPr>
+        <p:style>
+          <a:lnRef idx="1">
+            <a:schemeClr val="accent1"/>
+          </a:lnRef>
+          <a:fillRef idx="3">
+            <a:schemeClr val="accent1"/>
+          </a:fillRef>
+          <a:effectRef idx="2">
+            <a:schemeClr val="accent1"/>
+          </a:effectRef>
+          <a:fontRef idx="minor">
+            <a:schemeClr val="lt1"/>
+          </a:fontRef>
+        </p:style>
+        <p:txBody>
+          <a:bodyPr rtlCol="0" anchor="ctr"/>
+          <a:lstStyle/>
+          <a:p>
+            <a:pPr algn="ctr"/>
+          </a:p>
+        </p:txBody>
+      </p:sp>
+      <p:sp>
+        <p:nvSpPr>
+          <p:cNvPr id="17" name="TextBox 16"/>
           <p:cNvSpPr txBox="1"/>
           <p:nvPr/>
         </p:nvSpPr>
         <p:spPr>
           <a:xfrm>
-            <a:off x="658368" y="6473952"/>
-            <a:ext cx="9875520" cy="201168"/>
+            <a:off x="4517136" y="2011680"/>
+            <a:ext cx="438912" cy="420624"/>
+          </a:xfrm>
+          <a:prstGeom prst="rect">
+            <a:avLst/>
+          </a:prstGeom>
+          <a:noFill/>
+        </p:spPr>
+        <p:txBody>
+          <a:bodyPr wrap="square" anchor="ctr">
+            <a:spAutoFit/>
+          </a:bodyPr>
+          <a:lstStyle/>
+          <a:p>
+            <a:pPr algn="ctr"/>
+            <a:r>
+              <a:rPr sz="1400" b="1">
+                <a:solidFill>
+                  <a:srgbClr val="FFFFFF"/>
+                </a:solidFill>
+                <a:latin typeface="Arial"/>
+              </a:rPr>
+              <a:t>2</a:t>
+            </a:r>
+          </a:p>
+        </p:txBody>
+      </p:sp>
+      <p:sp>
+        <p:nvSpPr>
+          <p:cNvPr id="18" name="TextBox 17"/>
+          <p:cNvSpPr txBox="1"/>
+          <p:nvPr/>
+        </p:nvSpPr>
+        <p:spPr>
+          <a:xfrm>
+            <a:off x="5120640" y="1965960"/>
+            <a:ext cx="2414016" cy="329184"/>
           </a:xfrm>
           <a:prstGeom prst="rect">
             <a:avLst/>
@@ -7588,29 +7554,589 @@
           <a:p>
             <a:pPr algn="l"/>
             <a:r>
-              <a:rPr sz="800" b="0">
-                <a:solidFill>
-                  <a:srgbClr val="5B6372"/>
+              <a:rPr sz="1400" b="1">
+                <a:solidFill>
+                  <a:srgbClr val="10B981"/>
                 </a:solidFill>
                 <a:latin typeface="Arial"/>
               </a:rPr>
-              <a:t>TGS-2024048310 · ACTIVITY PRACTICE · Tertiary Infotech Academy Pte Ltd</a:t>
-            </a:r>
-          </a:p>
-        </p:txBody>
-      </p:sp>
-      <p:sp>
-        <p:nvSpPr>
-          <p:cNvPr id="8" name="Rounded Rectangle 7"/>
+              <a:t>Context</a:t>
+            </a:r>
+          </a:p>
+        </p:txBody>
+      </p:sp>
+      <p:sp>
+        <p:nvSpPr>
+          <p:cNvPr id="19" name="TextBox 18"/>
+          <p:cNvSpPr txBox="1"/>
+          <p:nvPr/>
+        </p:nvSpPr>
+        <p:spPr>
+          <a:xfrm>
+            <a:off x="5120640" y="2350008"/>
+            <a:ext cx="2414016" cy="1005839"/>
+          </a:xfrm>
+          <a:prstGeom prst="rect">
+            <a:avLst/>
+          </a:prstGeom>
+          <a:noFill/>
+        </p:spPr>
+        <p:txBody>
+          <a:bodyPr wrap="square" anchor="t">
+            <a:spAutoFit/>
+          </a:bodyPr>
+          <a:lstStyle/>
+          <a:p>
+            <a:pPr algn="l"/>
+            <a:r>
+              <a:rPr sz="1150" b="0">
+                <a:solidFill>
+                  <a:srgbClr val="161B26"/>
+                </a:solidFill>
+                <a:latin typeface="Arial"/>
+              </a:rPr>
+              <a:t>Source, timeframe, unit and scope.</a:t>
+            </a:r>
+          </a:p>
+        </p:txBody>
+      </p:sp>
+      <p:sp>
+        <p:nvSpPr>
+          <p:cNvPr id="20" name="Rounded Rectangle 19"/>
           <p:cNvSpPr/>
           <p:nvPr/>
         </p:nvSpPr>
         <p:spPr>
           <a:xfrm>
-            <a:off x="749808" y="1810512"/>
-            <a:ext cx="10652760" cy="1005840"/>
+            <a:off x="7900416" y="1783080"/>
+            <a:ext cx="3401568" cy="1719072"/>
           </a:xfrm>
           <a:prstGeom prst="roundRect">
+            <a:avLst/>
+          </a:prstGeom>
+          <a:solidFill>
+            <a:srgbClr val="F5F8FC"/>
+          </a:solidFill>
+          <a:ln>
+            <a:solidFill>
+              <a:srgbClr val="E2E8F0"/>
+            </a:solidFill>
+          </a:ln>
+        </p:spPr>
+        <p:style>
+          <a:lnRef idx="1">
+            <a:schemeClr val="accent1"/>
+          </a:lnRef>
+          <a:fillRef idx="3">
+            <a:schemeClr val="accent1"/>
+          </a:fillRef>
+          <a:effectRef idx="2">
+            <a:schemeClr val="accent1"/>
+          </a:effectRef>
+          <a:fontRef idx="minor">
+            <a:schemeClr val="lt1"/>
+          </a:fontRef>
+        </p:style>
+        <p:txBody>
+          <a:bodyPr rtlCol="0" anchor="ctr"/>
+          <a:lstStyle/>
+          <a:p>
+            <a:pPr algn="ctr"/>
+          </a:p>
+        </p:txBody>
+      </p:sp>
+      <p:sp>
+        <p:nvSpPr>
+          <p:cNvPr id="21" name="Rectangle 20"/>
+          <p:cNvSpPr/>
+          <p:nvPr/>
+        </p:nvSpPr>
+        <p:spPr>
+          <a:xfrm>
+            <a:off x="7900416" y="1783080"/>
+            <a:ext cx="73152" cy="1719072"/>
+          </a:xfrm>
+          <a:prstGeom prst="rect">
+            <a:avLst/>
+          </a:prstGeom>
+          <a:solidFill>
+            <a:srgbClr val="7C3AED"/>
+          </a:solidFill>
+          <a:ln>
+            <a:solidFill>
+              <a:srgbClr val="7C3AED"/>
+            </a:solidFill>
+          </a:ln>
+        </p:spPr>
+        <p:style>
+          <a:lnRef idx="1">
+            <a:schemeClr val="accent1"/>
+          </a:lnRef>
+          <a:fillRef idx="3">
+            <a:schemeClr val="accent1"/>
+          </a:fillRef>
+          <a:effectRef idx="2">
+            <a:schemeClr val="accent1"/>
+          </a:effectRef>
+          <a:fontRef idx="minor">
+            <a:schemeClr val="lt1"/>
+          </a:fontRef>
+        </p:style>
+        <p:txBody>
+          <a:bodyPr rtlCol="0" anchor="ctr"/>
+          <a:lstStyle/>
+          <a:p>
+            <a:pPr algn="ctr"/>
+          </a:p>
+        </p:txBody>
+      </p:sp>
+      <p:sp>
+        <p:nvSpPr>
+          <p:cNvPr id="22" name="Rounded Rectangle 21"/>
+          <p:cNvSpPr/>
+          <p:nvPr/>
+        </p:nvSpPr>
+        <p:spPr>
+          <a:xfrm>
+            <a:off x="8101584" y="2002536"/>
+            <a:ext cx="438912" cy="438912"/>
+          </a:xfrm>
+          <a:prstGeom prst="roundRect">
+            <a:avLst/>
+          </a:prstGeom>
+          <a:solidFill>
+            <a:srgbClr val="7C3AED"/>
+          </a:solidFill>
+          <a:ln>
+            <a:solidFill>
+              <a:srgbClr val="7C3AED"/>
+            </a:solidFill>
+          </a:ln>
+        </p:spPr>
+        <p:style>
+          <a:lnRef idx="1">
+            <a:schemeClr val="accent1"/>
+          </a:lnRef>
+          <a:fillRef idx="3">
+            <a:schemeClr val="accent1"/>
+          </a:fillRef>
+          <a:effectRef idx="2">
+            <a:schemeClr val="accent1"/>
+          </a:effectRef>
+          <a:fontRef idx="minor">
+            <a:schemeClr val="lt1"/>
+          </a:fontRef>
+        </p:style>
+        <p:txBody>
+          <a:bodyPr rtlCol="0" anchor="ctr"/>
+          <a:lstStyle/>
+          <a:p>
+            <a:pPr algn="ctr"/>
+          </a:p>
+        </p:txBody>
+      </p:sp>
+      <p:sp>
+        <p:nvSpPr>
+          <p:cNvPr id="23" name="TextBox 22"/>
+          <p:cNvSpPr txBox="1"/>
+          <p:nvPr/>
+        </p:nvSpPr>
+        <p:spPr>
+          <a:xfrm>
+            <a:off x="8101584" y="2011680"/>
+            <a:ext cx="438912" cy="420624"/>
+          </a:xfrm>
+          <a:prstGeom prst="rect">
+            <a:avLst/>
+          </a:prstGeom>
+          <a:noFill/>
+        </p:spPr>
+        <p:txBody>
+          <a:bodyPr wrap="square" anchor="ctr">
+            <a:spAutoFit/>
+          </a:bodyPr>
+          <a:lstStyle/>
+          <a:p>
+            <a:pPr algn="ctr"/>
+            <a:r>
+              <a:rPr sz="1400" b="1">
+                <a:solidFill>
+                  <a:srgbClr val="FFFFFF"/>
+                </a:solidFill>
+                <a:latin typeface="Arial"/>
+              </a:rPr>
+              <a:t>3</a:t>
+            </a:r>
+          </a:p>
+        </p:txBody>
+      </p:sp>
+      <p:sp>
+        <p:nvSpPr>
+          <p:cNvPr id="24" name="TextBox 23"/>
+          <p:cNvSpPr txBox="1"/>
+          <p:nvPr/>
+        </p:nvSpPr>
+        <p:spPr>
+          <a:xfrm>
+            <a:off x="8705088" y="1965960"/>
+            <a:ext cx="2414016" cy="329184"/>
+          </a:xfrm>
+          <a:prstGeom prst="rect">
+            <a:avLst/>
+          </a:prstGeom>
+          <a:noFill/>
+        </p:spPr>
+        <p:txBody>
+          <a:bodyPr wrap="square" anchor="t">
+            <a:spAutoFit/>
+          </a:bodyPr>
+          <a:lstStyle/>
+          <a:p>
+            <a:pPr algn="l"/>
+            <a:r>
+              <a:rPr sz="1400" b="1">
+                <a:solidFill>
+                  <a:srgbClr val="7C3AED"/>
+                </a:solidFill>
+                <a:latin typeface="Arial"/>
+              </a:rPr>
+              <a:t>Evidence</a:t>
+            </a:r>
+          </a:p>
+        </p:txBody>
+      </p:sp>
+      <p:sp>
+        <p:nvSpPr>
+          <p:cNvPr id="25" name="TextBox 24"/>
+          <p:cNvSpPr txBox="1"/>
+          <p:nvPr/>
+        </p:nvSpPr>
+        <p:spPr>
+          <a:xfrm>
+            <a:off x="8705088" y="2350008"/>
+            <a:ext cx="2414016" cy="1005839"/>
+          </a:xfrm>
+          <a:prstGeom prst="rect">
+            <a:avLst/>
+          </a:prstGeom>
+          <a:noFill/>
+        </p:spPr>
+        <p:txBody>
+          <a:bodyPr wrap="square" anchor="t">
+            <a:spAutoFit/>
+          </a:bodyPr>
+          <a:lstStyle/>
+          <a:p>
+            <a:pPr algn="l"/>
+            <a:r>
+              <a:rPr sz="1150" b="0">
+                <a:solidFill>
+                  <a:srgbClr val="161B26"/>
+                </a:solidFill>
+                <a:latin typeface="Arial"/>
+              </a:rPr>
+              <a:t>One primary chart or process carries the proof.</a:t>
+            </a:r>
+          </a:p>
+        </p:txBody>
+      </p:sp>
+      <p:sp>
+        <p:nvSpPr>
+          <p:cNvPr id="26" name="Rounded Rectangle 25"/>
+          <p:cNvSpPr/>
+          <p:nvPr/>
+        </p:nvSpPr>
+        <p:spPr>
+          <a:xfrm>
+            <a:off x="731520" y="3776472"/>
+            <a:ext cx="3401568" cy="1719072"/>
+          </a:xfrm>
+          <a:prstGeom prst="roundRect">
+            <a:avLst/>
+          </a:prstGeom>
+          <a:solidFill>
+            <a:srgbClr val="F5F8FC"/>
+          </a:solidFill>
+          <a:ln>
+            <a:solidFill>
+              <a:srgbClr val="E2E8F0"/>
+            </a:solidFill>
+          </a:ln>
+        </p:spPr>
+        <p:style>
+          <a:lnRef idx="1">
+            <a:schemeClr val="accent1"/>
+          </a:lnRef>
+          <a:fillRef idx="3">
+            <a:schemeClr val="accent1"/>
+          </a:fillRef>
+          <a:effectRef idx="2">
+            <a:schemeClr val="accent1"/>
+          </a:effectRef>
+          <a:fontRef idx="minor">
+            <a:schemeClr val="lt1"/>
+          </a:fontRef>
+        </p:style>
+        <p:txBody>
+          <a:bodyPr rtlCol="0" anchor="ctr"/>
+          <a:lstStyle/>
+          <a:p>
+            <a:pPr algn="ctr"/>
+          </a:p>
+        </p:txBody>
+      </p:sp>
+      <p:sp>
+        <p:nvSpPr>
+          <p:cNvPr id="27" name="Rectangle 26"/>
+          <p:cNvSpPr/>
+          <p:nvPr/>
+        </p:nvSpPr>
+        <p:spPr>
+          <a:xfrm>
+            <a:off x="731520" y="3776472"/>
+            <a:ext cx="73152" cy="1719072"/>
+          </a:xfrm>
+          <a:prstGeom prst="rect">
+            <a:avLst/>
+          </a:prstGeom>
+          <a:solidFill>
+            <a:srgbClr val="F59E0B"/>
+          </a:solidFill>
+          <a:ln>
+            <a:solidFill>
+              <a:srgbClr val="F59E0B"/>
+            </a:solidFill>
+          </a:ln>
+        </p:spPr>
+        <p:style>
+          <a:lnRef idx="1">
+            <a:schemeClr val="accent1"/>
+          </a:lnRef>
+          <a:fillRef idx="3">
+            <a:schemeClr val="accent1"/>
+          </a:fillRef>
+          <a:effectRef idx="2">
+            <a:schemeClr val="accent1"/>
+          </a:effectRef>
+          <a:fontRef idx="minor">
+            <a:schemeClr val="lt1"/>
+          </a:fontRef>
+        </p:style>
+        <p:txBody>
+          <a:bodyPr rtlCol="0" anchor="ctr"/>
+          <a:lstStyle/>
+          <a:p>
+            <a:pPr algn="ctr"/>
+          </a:p>
+        </p:txBody>
+      </p:sp>
+      <p:sp>
+        <p:nvSpPr>
+          <p:cNvPr id="28" name="Rounded Rectangle 27"/>
+          <p:cNvSpPr/>
+          <p:nvPr/>
+        </p:nvSpPr>
+        <p:spPr>
+          <a:xfrm>
+            <a:off x="932688" y="3995928"/>
+            <a:ext cx="438912" cy="438912"/>
+          </a:xfrm>
+          <a:prstGeom prst="roundRect">
+            <a:avLst/>
+          </a:prstGeom>
+          <a:solidFill>
+            <a:srgbClr val="F59E0B"/>
+          </a:solidFill>
+          <a:ln>
+            <a:solidFill>
+              <a:srgbClr val="F59E0B"/>
+            </a:solidFill>
+          </a:ln>
+        </p:spPr>
+        <p:style>
+          <a:lnRef idx="1">
+            <a:schemeClr val="accent1"/>
+          </a:lnRef>
+          <a:fillRef idx="3">
+            <a:schemeClr val="accent1"/>
+          </a:fillRef>
+          <a:effectRef idx="2">
+            <a:schemeClr val="accent1"/>
+          </a:effectRef>
+          <a:fontRef idx="minor">
+            <a:schemeClr val="lt1"/>
+          </a:fontRef>
+        </p:style>
+        <p:txBody>
+          <a:bodyPr rtlCol="0" anchor="ctr"/>
+          <a:lstStyle/>
+          <a:p>
+            <a:pPr algn="ctr"/>
+          </a:p>
+        </p:txBody>
+      </p:sp>
+      <p:sp>
+        <p:nvSpPr>
+          <p:cNvPr id="29" name="TextBox 28"/>
+          <p:cNvSpPr txBox="1"/>
+          <p:nvPr/>
+        </p:nvSpPr>
+        <p:spPr>
+          <a:xfrm>
+            <a:off x="932688" y="4005072"/>
+            <a:ext cx="438912" cy="420624"/>
+          </a:xfrm>
+          <a:prstGeom prst="rect">
+            <a:avLst/>
+          </a:prstGeom>
+          <a:noFill/>
+        </p:spPr>
+        <p:txBody>
+          <a:bodyPr wrap="square" anchor="ctr">
+            <a:spAutoFit/>
+          </a:bodyPr>
+          <a:lstStyle/>
+          <a:p>
+            <a:pPr algn="ctr"/>
+            <a:r>
+              <a:rPr sz="1400" b="1">
+                <a:solidFill>
+                  <a:srgbClr val="FFFFFF"/>
+                </a:solidFill>
+                <a:latin typeface="Arial"/>
+              </a:rPr>
+              <a:t>4</a:t>
+            </a:r>
+          </a:p>
+        </p:txBody>
+      </p:sp>
+      <p:sp>
+        <p:nvSpPr>
+          <p:cNvPr id="30" name="TextBox 29"/>
+          <p:cNvSpPr txBox="1"/>
+          <p:nvPr/>
+        </p:nvSpPr>
+        <p:spPr>
+          <a:xfrm>
+            <a:off x="1536192" y="3959352"/>
+            <a:ext cx="2414016" cy="329184"/>
+          </a:xfrm>
+          <a:prstGeom prst="rect">
+            <a:avLst/>
+          </a:prstGeom>
+          <a:noFill/>
+        </p:spPr>
+        <p:txBody>
+          <a:bodyPr wrap="square" anchor="t">
+            <a:spAutoFit/>
+          </a:bodyPr>
+          <a:lstStyle/>
+          <a:p>
+            <a:pPr algn="l"/>
+            <a:r>
+              <a:rPr sz="1400" b="1">
+                <a:solidFill>
+                  <a:srgbClr val="F59E0B"/>
+                </a:solidFill>
+                <a:latin typeface="Arial"/>
+              </a:rPr>
+              <a:t>Guidance</a:t>
+            </a:r>
+          </a:p>
+        </p:txBody>
+      </p:sp>
+      <p:sp>
+        <p:nvSpPr>
+          <p:cNvPr id="31" name="TextBox 30"/>
+          <p:cNvSpPr txBox="1"/>
+          <p:nvPr/>
+        </p:nvSpPr>
+        <p:spPr>
+          <a:xfrm>
+            <a:off x="1536192" y="4343400"/>
+            <a:ext cx="2414016" cy="1005839"/>
+          </a:xfrm>
+          <a:prstGeom prst="rect">
+            <a:avLst/>
+          </a:prstGeom>
+          <a:noFill/>
+        </p:spPr>
+        <p:txBody>
+          <a:bodyPr wrap="square" anchor="t">
+            <a:spAutoFit/>
+          </a:bodyPr>
+          <a:lstStyle/>
+          <a:p>
+            <a:pPr algn="l"/>
+            <a:r>
+              <a:rPr sz="1150" b="0">
+                <a:solidFill>
+                  <a:srgbClr val="161B26"/>
+                </a:solidFill>
+                <a:latin typeface="Arial"/>
+              </a:rPr>
+              <a:t>Arrows, order and whitespace control the reading path.</a:t>
+            </a:r>
+          </a:p>
+        </p:txBody>
+      </p:sp>
+      <p:sp>
+        <p:nvSpPr>
+          <p:cNvPr id="32" name="Rounded Rectangle 31"/>
+          <p:cNvSpPr/>
+          <p:nvPr/>
+        </p:nvSpPr>
+        <p:spPr>
+          <a:xfrm>
+            <a:off x="4315968" y="3776472"/>
+            <a:ext cx="3401568" cy="1719072"/>
+          </a:xfrm>
+          <a:prstGeom prst="roundRect">
+            <a:avLst/>
+          </a:prstGeom>
+          <a:solidFill>
+            <a:srgbClr val="F5F8FC"/>
+          </a:solidFill>
+          <a:ln>
+            <a:solidFill>
+              <a:srgbClr val="E2E8F0"/>
+            </a:solidFill>
+          </a:ln>
+        </p:spPr>
+        <p:style>
+          <a:lnRef idx="1">
+            <a:schemeClr val="accent1"/>
+          </a:lnRef>
+          <a:fillRef idx="3">
+            <a:schemeClr val="accent1"/>
+          </a:fillRef>
+          <a:effectRef idx="2">
+            <a:schemeClr val="accent1"/>
+          </a:effectRef>
+          <a:fontRef idx="minor">
+            <a:schemeClr val="lt1"/>
+          </a:fontRef>
+        </p:style>
+        <p:txBody>
+          <a:bodyPr rtlCol="0" anchor="ctr"/>
+          <a:lstStyle/>
+          <a:p>
+            <a:pPr algn="ctr"/>
+          </a:p>
+        </p:txBody>
+      </p:sp>
+      <p:sp>
+        <p:nvSpPr>
+          <p:cNvPr id="33" name="Rectangle 32"/>
+          <p:cNvSpPr/>
+          <p:nvPr/>
+        </p:nvSpPr>
+        <p:spPr>
+          <a:xfrm>
+            <a:off x="4315968" y="3776472"/>
+            <a:ext cx="73152" cy="1719072"/>
+          </a:xfrm>
+          <a:prstGeom prst="rect">
             <a:avLst/>
           </a:prstGeom>
           <a:solidFill>
@@ -7646,14 +8172,59 @@
       </p:sp>
       <p:sp>
         <p:nvSpPr>
-          <p:cNvPr id="9" name="TextBox 8"/>
+          <p:cNvPr id="34" name="Rounded Rectangle 33"/>
+          <p:cNvSpPr/>
+          <p:nvPr/>
+        </p:nvSpPr>
+        <p:spPr>
+          <a:xfrm>
+            <a:off x="4517136" y="3995928"/>
+            <a:ext cx="438912" cy="438912"/>
+          </a:xfrm>
+          <a:prstGeom prst="roundRect">
+            <a:avLst/>
+          </a:prstGeom>
+          <a:solidFill>
+            <a:srgbClr val="1F6FEB"/>
+          </a:solidFill>
+          <a:ln>
+            <a:solidFill>
+              <a:srgbClr val="1F6FEB"/>
+            </a:solidFill>
+          </a:ln>
+        </p:spPr>
+        <p:style>
+          <a:lnRef idx="1">
+            <a:schemeClr val="accent1"/>
+          </a:lnRef>
+          <a:fillRef idx="3">
+            <a:schemeClr val="accent1"/>
+          </a:fillRef>
+          <a:effectRef idx="2">
+            <a:schemeClr val="accent1"/>
+          </a:effectRef>
+          <a:fontRef idx="minor">
+            <a:schemeClr val="lt1"/>
+          </a:fontRef>
+        </p:style>
+        <p:txBody>
+          <a:bodyPr rtlCol="0" anchor="ctr"/>
+          <a:lstStyle/>
+          <a:p>
+            <a:pPr algn="ctr"/>
+          </a:p>
+        </p:txBody>
+      </p:sp>
+      <p:sp>
+        <p:nvSpPr>
+          <p:cNvPr id="35" name="TextBox 34"/>
           <p:cNvSpPr txBox="1"/>
           <p:nvPr/>
         </p:nvSpPr>
         <p:spPr>
           <a:xfrm>
-            <a:off x="1051560" y="2011680"/>
-            <a:ext cx="10058400" cy="566928"/>
+            <a:off x="4517136" y="4005072"/>
+            <a:ext cx="438912" cy="420624"/>
           </a:xfrm>
           <a:prstGeom prst="rect">
             <a:avLst/>
@@ -7668,13 +8239,661 @@
           <a:p>
             <a:pPr algn="ctr"/>
             <a:r>
-              <a:rPr sz="1900" b="1">
+              <a:rPr sz="1400" b="1">
                 <a:solidFill>
                   <a:srgbClr val="FFFFFF"/>
                 </a:solidFill>
                 <a:latin typeface="Arial"/>
               </a:rPr>
-              <a:t>A portrait infographic brief and low-fidelity PowerPoint wireframe</a:t>
+              <a:t>5</a:t>
+            </a:r>
+          </a:p>
+        </p:txBody>
+      </p:sp>
+      <p:sp>
+        <p:nvSpPr>
+          <p:cNvPr id="36" name="TextBox 35"/>
+          <p:cNvSpPr txBox="1"/>
+          <p:nvPr/>
+        </p:nvSpPr>
+        <p:spPr>
+          <a:xfrm>
+            <a:off x="5120640" y="3959352"/>
+            <a:ext cx="2414016" cy="329184"/>
+          </a:xfrm>
+          <a:prstGeom prst="rect">
+            <a:avLst/>
+          </a:prstGeom>
+          <a:noFill/>
+        </p:spPr>
+        <p:txBody>
+          <a:bodyPr wrap="square" anchor="t">
+            <a:spAutoFit/>
+          </a:bodyPr>
+          <a:lstStyle/>
+          <a:p>
+            <a:pPr algn="l"/>
+            <a:r>
+              <a:rPr sz="1400" b="1">
+                <a:solidFill>
+                  <a:srgbClr val="1F6FEB"/>
+                </a:solidFill>
+                <a:latin typeface="Arial"/>
+              </a:rPr>
+              <a:t>Action</a:t>
+            </a:r>
+          </a:p>
+        </p:txBody>
+      </p:sp>
+      <p:sp>
+        <p:nvSpPr>
+          <p:cNvPr id="37" name="TextBox 36"/>
+          <p:cNvSpPr txBox="1"/>
+          <p:nvPr/>
+        </p:nvSpPr>
+        <p:spPr>
+          <a:xfrm>
+            <a:off x="5120640" y="4343400"/>
+            <a:ext cx="2414016" cy="1005839"/>
+          </a:xfrm>
+          <a:prstGeom prst="rect">
+            <a:avLst/>
+          </a:prstGeom>
+          <a:noFill/>
+        </p:spPr>
+        <p:txBody>
+          <a:bodyPr wrap="square" anchor="t">
+            <a:spAutoFit/>
+          </a:bodyPr>
+          <a:lstStyle/>
+          <a:p>
+            <a:pPr algn="l"/>
+            <a:r>
+              <a:rPr sz="1150" b="0">
+                <a:solidFill>
+                  <a:srgbClr val="161B26"/>
+                </a:solidFill>
+                <a:latin typeface="Arial"/>
+              </a:rPr>
+              <a:t>A concise implication or next step.</a:t>
+            </a:r>
+          </a:p>
+        </p:txBody>
+      </p:sp>
+      <p:sp>
+        <p:nvSpPr>
+          <p:cNvPr id="38" name="Rounded Rectangle 37"/>
+          <p:cNvSpPr/>
+          <p:nvPr/>
+        </p:nvSpPr>
+        <p:spPr>
+          <a:xfrm>
+            <a:off x="7900416" y="3776472"/>
+            <a:ext cx="3401568" cy="1719072"/>
+          </a:xfrm>
+          <a:prstGeom prst="roundRect">
+            <a:avLst/>
+          </a:prstGeom>
+          <a:solidFill>
+            <a:srgbClr val="F5F8FC"/>
+          </a:solidFill>
+          <a:ln>
+            <a:solidFill>
+              <a:srgbClr val="E2E8F0"/>
+            </a:solidFill>
+          </a:ln>
+        </p:spPr>
+        <p:style>
+          <a:lnRef idx="1">
+            <a:schemeClr val="accent1"/>
+          </a:lnRef>
+          <a:fillRef idx="3">
+            <a:schemeClr val="accent1"/>
+          </a:fillRef>
+          <a:effectRef idx="2">
+            <a:schemeClr val="accent1"/>
+          </a:effectRef>
+          <a:fontRef idx="minor">
+            <a:schemeClr val="lt1"/>
+          </a:fontRef>
+        </p:style>
+        <p:txBody>
+          <a:bodyPr rtlCol="0" anchor="ctr"/>
+          <a:lstStyle/>
+          <a:p>
+            <a:pPr algn="ctr"/>
+          </a:p>
+        </p:txBody>
+      </p:sp>
+      <p:sp>
+        <p:nvSpPr>
+          <p:cNvPr id="39" name="Rectangle 38"/>
+          <p:cNvSpPr/>
+          <p:nvPr/>
+        </p:nvSpPr>
+        <p:spPr>
+          <a:xfrm>
+            <a:off x="7900416" y="3776472"/>
+            <a:ext cx="73152" cy="1719072"/>
+          </a:xfrm>
+          <a:prstGeom prst="rect">
+            <a:avLst/>
+          </a:prstGeom>
+          <a:solidFill>
+            <a:srgbClr val="10B981"/>
+          </a:solidFill>
+          <a:ln>
+            <a:solidFill>
+              <a:srgbClr val="10B981"/>
+            </a:solidFill>
+          </a:ln>
+        </p:spPr>
+        <p:style>
+          <a:lnRef idx="1">
+            <a:schemeClr val="accent1"/>
+          </a:lnRef>
+          <a:fillRef idx="3">
+            <a:schemeClr val="accent1"/>
+          </a:fillRef>
+          <a:effectRef idx="2">
+            <a:schemeClr val="accent1"/>
+          </a:effectRef>
+          <a:fontRef idx="minor">
+            <a:schemeClr val="lt1"/>
+          </a:fontRef>
+        </p:style>
+        <p:txBody>
+          <a:bodyPr rtlCol="0" anchor="ctr"/>
+          <a:lstStyle/>
+          <a:p>
+            <a:pPr algn="ctr"/>
+          </a:p>
+        </p:txBody>
+      </p:sp>
+      <p:sp>
+        <p:nvSpPr>
+          <p:cNvPr id="40" name="Rounded Rectangle 39"/>
+          <p:cNvSpPr/>
+          <p:nvPr/>
+        </p:nvSpPr>
+        <p:spPr>
+          <a:xfrm>
+            <a:off x="8101584" y="3995928"/>
+            <a:ext cx="438912" cy="438912"/>
+          </a:xfrm>
+          <a:prstGeom prst="roundRect">
+            <a:avLst/>
+          </a:prstGeom>
+          <a:solidFill>
+            <a:srgbClr val="10B981"/>
+          </a:solidFill>
+          <a:ln>
+            <a:solidFill>
+              <a:srgbClr val="10B981"/>
+            </a:solidFill>
+          </a:ln>
+        </p:spPr>
+        <p:style>
+          <a:lnRef idx="1">
+            <a:schemeClr val="accent1"/>
+          </a:lnRef>
+          <a:fillRef idx="3">
+            <a:schemeClr val="accent1"/>
+          </a:fillRef>
+          <a:effectRef idx="2">
+            <a:schemeClr val="accent1"/>
+          </a:effectRef>
+          <a:fontRef idx="minor">
+            <a:schemeClr val="lt1"/>
+          </a:fontRef>
+        </p:style>
+        <p:txBody>
+          <a:bodyPr rtlCol="0" anchor="ctr"/>
+          <a:lstStyle/>
+          <a:p>
+            <a:pPr algn="ctr"/>
+          </a:p>
+        </p:txBody>
+      </p:sp>
+      <p:sp>
+        <p:nvSpPr>
+          <p:cNvPr id="41" name="TextBox 40"/>
+          <p:cNvSpPr txBox="1"/>
+          <p:nvPr/>
+        </p:nvSpPr>
+        <p:spPr>
+          <a:xfrm>
+            <a:off x="8101584" y="4005072"/>
+            <a:ext cx="438912" cy="420624"/>
+          </a:xfrm>
+          <a:prstGeom prst="rect">
+            <a:avLst/>
+          </a:prstGeom>
+          <a:noFill/>
+        </p:spPr>
+        <p:txBody>
+          <a:bodyPr wrap="square" anchor="ctr">
+            <a:spAutoFit/>
+          </a:bodyPr>
+          <a:lstStyle/>
+          <a:p>
+            <a:pPr algn="ctr"/>
+            <a:r>
+              <a:rPr sz="1400" b="1">
+                <a:solidFill>
+                  <a:srgbClr val="FFFFFF"/>
+                </a:solidFill>
+                <a:latin typeface="Arial"/>
+              </a:rPr>
+              <a:t>6</a:t>
+            </a:r>
+          </a:p>
+        </p:txBody>
+      </p:sp>
+      <p:sp>
+        <p:nvSpPr>
+          <p:cNvPr id="42" name="TextBox 41"/>
+          <p:cNvSpPr txBox="1"/>
+          <p:nvPr/>
+        </p:nvSpPr>
+        <p:spPr>
+          <a:xfrm>
+            <a:off x="8705088" y="3959352"/>
+            <a:ext cx="2414016" cy="329184"/>
+          </a:xfrm>
+          <a:prstGeom prst="rect">
+            <a:avLst/>
+          </a:prstGeom>
+          <a:noFill/>
+        </p:spPr>
+        <p:txBody>
+          <a:bodyPr wrap="square" anchor="t">
+            <a:spAutoFit/>
+          </a:bodyPr>
+          <a:lstStyle/>
+          <a:p>
+            <a:pPr algn="l"/>
+            <a:r>
+              <a:rPr sz="1400" b="1">
+                <a:solidFill>
+                  <a:srgbClr val="10B981"/>
+                </a:solidFill>
+                <a:latin typeface="Arial"/>
+              </a:rPr>
+              <a:t>Footer</a:t>
+            </a:r>
+          </a:p>
+        </p:txBody>
+      </p:sp>
+      <p:sp>
+        <p:nvSpPr>
+          <p:cNvPr id="43" name="TextBox 42"/>
+          <p:cNvSpPr txBox="1"/>
+          <p:nvPr/>
+        </p:nvSpPr>
+        <p:spPr>
+          <a:xfrm>
+            <a:off x="8705088" y="4343400"/>
+            <a:ext cx="2414016" cy="1005839"/>
+          </a:xfrm>
+          <a:prstGeom prst="rect">
+            <a:avLst/>
+          </a:prstGeom>
+          <a:noFill/>
+        </p:spPr>
+        <p:txBody>
+          <a:bodyPr wrap="square" anchor="t">
+            <a:spAutoFit/>
+          </a:bodyPr>
+          <a:lstStyle/>
+          <a:p>
+            <a:pPr algn="l"/>
+            <a:r>
+              <a:rPr sz="1150" b="0">
+                <a:solidFill>
+                  <a:srgbClr val="161B26"/>
+                </a:solidFill>
+                <a:latin typeface="Arial"/>
+              </a:rPr>
+              <a:t>Source, owner, date and accessibility notes.</a:t>
+            </a:r>
+          </a:p>
+        </p:txBody>
+      </p:sp>
+    </p:spTree>
+  </p:cSld>
+  <p:clrMapOvr>
+    <a:masterClrMapping/>
+  </p:clrMapOvr>
+</p:sld>
+</file>
+
+<file path=ppt/slides/slide6.xml><?xml version="1.0" encoding="utf-8"?>
+<p:sld xmlns:a="http://schemas.openxmlformats.org/drawingml/2006/main" xmlns:p="http://schemas.openxmlformats.org/presentationml/2006/main" xmlns:r="http://schemas.openxmlformats.org/officeDocument/2006/relationships">
+  <p:cSld>
+    <p:spTree>
+      <p:nvGrpSpPr>
+        <p:cNvPr id="1" name=""/>
+        <p:cNvGrpSpPr/>
+        <p:nvPr/>
+      </p:nvGrpSpPr>
+      <p:grpSpPr/>
+      <p:sp>
+        <p:nvSpPr>
+          <p:cNvPr id="2" name="Rectangle 1"/>
+          <p:cNvSpPr/>
+          <p:nvPr/>
+        </p:nvSpPr>
+        <p:spPr>
+          <a:xfrm>
+            <a:off x="0" y="0"/>
+            <a:ext cx="12191695" cy="6858000"/>
+          </a:xfrm>
+          <a:prstGeom prst="rect">
+            <a:avLst/>
+          </a:prstGeom>
+          <a:solidFill>
+            <a:srgbClr val="FFFFFF"/>
+          </a:solidFill>
+          <a:ln>
+            <a:solidFill>
+              <a:srgbClr val="FFFFFF"/>
+            </a:solidFill>
+          </a:ln>
+        </p:spPr>
+        <p:style>
+          <a:lnRef idx="1">
+            <a:schemeClr val="accent1"/>
+          </a:lnRef>
+          <a:fillRef idx="3">
+            <a:schemeClr val="accent1"/>
+          </a:fillRef>
+          <a:effectRef idx="2">
+            <a:schemeClr val="accent1"/>
+          </a:effectRef>
+          <a:fontRef idx="minor">
+            <a:schemeClr val="lt1"/>
+          </a:fontRef>
+        </p:style>
+        <p:txBody>
+          <a:bodyPr rtlCol="0" anchor="ctr"/>
+          <a:lstStyle/>
+          <a:p>
+            <a:pPr algn="ctr"/>
+          </a:p>
+        </p:txBody>
+      </p:sp>
+      <p:sp>
+        <p:nvSpPr>
+          <p:cNvPr id="3" name="Rectangle 2"/>
+          <p:cNvSpPr/>
+          <p:nvPr/>
+        </p:nvSpPr>
+        <p:spPr>
+          <a:xfrm>
+            <a:off x="0" y="0"/>
+            <a:ext cx="164592" cy="6858000"/>
+          </a:xfrm>
+          <a:prstGeom prst="rect">
+            <a:avLst/>
+          </a:prstGeom>
+          <a:solidFill>
+            <a:srgbClr val="1F6FEB"/>
+          </a:solidFill>
+          <a:ln>
+            <a:solidFill>
+              <a:srgbClr val="1F6FEB"/>
+            </a:solidFill>
+          </a:ln>
+        </p:spPr>
+        <p:style>
+          <a:lnRef idx="1">
+            <a:schemeClr val="accent1"/>
+          </a:lnRef>
+          <a:fillRef idx="3">
+            <a:schemeClr val="accent1"/>
+          </a:fillRef>
+          <a:effectRef idx="2">
+            <a:schemeClr val="accent1"/>
+          </a:effectRef>
+          <a:fontRef idx="minor">
+            <a:schemeClr val="lt1"/>
+          </a:fontRef>
+        </p:style>
+        <p:txBody>
+          <a:bodyPr rtlCol="0" anchor="ctr"/>
+          <a:lstStyle/>
+          <a:p>
+            <a:pPr algn="ctr"/>
+          </a:p>
+        </p:txBody>
+      </p:sp>
+      <p:sp>
+        <p:nvSpPr>
+          <p:cNvPr id="4" name="TextBox 3"/>
+          <p:cNvSpPr txBox="1"/>
+          <p:nvPr/>
+        </p:nvSpPr>
+        <p:spPr>
+          <a:xfrm>
+            <a:off x="658368" y="384048"/>
+            <a:ext cx="10789920" cy="320040"/>
+          </a:xfrm>
+          <a:prstGeom prst="rect">
+            <a:avLst/>
+          </a:prstGeom>
+          <a:noFill/>
+        </p:spPr>
+        <p:txBody>
+          <a:bodyPr wrap="square" anchor="t">
+            <a:spAutoFit/>
+          </a:bodyPr>
+          <a:lstStyle/>
+          <a:p>
+            <a:pPr algn="l"/>
+            <a:r>
+              <a:rPr sz="1100" b="1">
+                <a:solidFill>
+                  <a:srgbClr val="1F6FEB"/>
+                </a:solidFill>
+                <a:latin typeface="Arial"/>
+              </a:rPr>
+              <a:t>ACTIVITY 02 · ACCEPTANCE</a:t>
+            </a:r>
+          </a:p>
+        </p:txBody>
+      </p:sp>
+      <p:sp>
+        <p:nvSpPr>
+          <p:cNvPr id="5" name="TextBox 4"/>
+          <p:cNvSpPr txBox="1"/>
+          <p:nvPr/>
+        </p:nvSpPr>
+        <p:spPr>
+          <a:xfrm>
+            <a:off x="658368" y="749808"/>
+            <a:ext cx="10789920" cy="658368"/>
+          </a:xfrm>
+          <a:prstGeom prst="rect">
+            <a:avLst/>
+          </a:prstGeom>
+          <a:noFill/>
+        </p:spPr>
+        <p:txBody>
+          <a:bodyPr wrap="square" anchor="t">
+            <a:spAutoFit/>
+          </a:bodyPr>
+          <a:lstStyle/>
+          <a:p>
+            <a:pPr algn="l"/>
+            <a:r>
+              <a:rPr sz="2700" b="1">
+                <a:solidFill>
+                  <a:srgbClr val="161B26"/>
+                </a:solidFill>
+                <a:latin typeface="Arial"/>
+              </a:rPr>
+              <a:t>What Good Looks Like</a:t>
+            </a:r>
+          </a:p>
+        </p:txBody>
+      </p:sp>
+      <p:sp>
+        <p:nvSpPr>
+          <p:cNvPr id="6" name="Rectangle 5"/>
+          <p:cNvSpPr/>
+          <p:nvPr/>
+        </p:nvSpPr>
+        <p:spPr>
+          <a:xfrm>
+            <a:off x="658368" y="1444752"/>
+            <a:ext cx="10881360" cy="18288"/>
+          </a:xfrm>
+          <a:prstGeom prst="rect">
+            <a:avLst/>
+          </a:prstGeom>
+          <a:solidFill>
+            <a:srgbClr val="E2E8F0"/>
+          </a:solidFill>
+          <a:ln>
+            <a:solidFill>
+              <a:srgbClr val="E2E8F0"/>
+            </a:solidFill>
+          </a:ln>
+        </p:spPr>
+        <p:style>
+          <a:lnRef idx="1">
+            <a:schemeClr val="accent1"/>
+          </a:lnRef>
+          <a:fillRef idx="3">
+            <a:schemeClr val="accent1"/>
+          </a:fillRef>
+          <a:effectRef idx="2">
+            <a:schemeClr val="accent1"/>
+          </a:effectRef>
+          <a:fontRef idx="minor">
+            <a:schemeClr val="lt1"/>
+          </a:fontRef>
+        </p:style>
+        <p:txBody>
+          <a:bodyPr rtlCol="0" anchor="ctr"/>
+          <a:lstStyle/>
+          <a:p>
+            <a:pPr algn="ctr"/>
+          </a:p>
+        </p:txBody>
+      </p:sp>
+      <p:sp>
+        <p:nvSpPr>
+          <p:cNvPr id="7" name="TextBox 6"/>
+          <p:cNvSpPr txBox="1"/>
+          <p:nvPr/>
+        </p:nvSpPr>
+        <p:spPr>
+          <a:xfrm>
+            <a:off x="658368" y="6473952"/>
+            <a:ext cx="9875520" cy="201168"/>
+          </a:xfrm>
+          <a:prstGeom prst="rect">
+            <a:avLst/>
+          </a:prstGeom>
+          <a:noFill/>
+        </p:spPr>
+        <p:txBody>
+          <a:bodyPr wrap="square" anchor="t">
+            <a:spAutoFit/>
+          </a:bodyPr>
+          <a:lstStyle/>
+          <a:p>
+            <a:pPr algn="l"/>
+            <a:r>
+              <a:rPr sz="800" b="0">
+                <a:solidFill>
+                  <a:srgbClr val="5B6372"/>
+                </a:solidFill>
+                <a:latin typeface="Arial"/>
+              </a:rPr>
+              <a:t>TGS-2026064178 · ACTIVITY PRACTICE · Tertiary Infotech Academy Pte Ltd</a:t>
+            </a:r>
+          </a:p>
+        </p:txBody>
+      </p:sp>
+      <p:sp>
+        <p:nvSpPr>
+          <p:cNvPr id="8" name="Rounded Rectangle 7"/>
+          <p:cNvSpPr/>
+          <p:nvPr/>
+        </p:nvSpPr>
+        <p:spPr>
+          <a:xfrm>
+            <a:off x="749808" y="1810512"/>
+            <a:ext cx="10652760" cy="1005840"/>
+          </a:xfrm>
+          <a:prstGeom prst="roundRect">
+            <a:avLst/>
+          </a:prstGeom>
+          <a:solidFill>
+            <a:srgbClr val="1F6FEB"/>
+          </a:solidFill>
+          <a:ln>
+            <a:solidFill>
+              <a:srgbClr val="1F6FEB"/>
+            </a:solidFill>
+          </a:ln>
+        </p:spPr>
+        <p:style>
+          <a:lnRef idx="1">
+            <a:schemeClr val="accent1"/>
+          </a:lnRef>
+          <a:fillRef idx="3">
+            <a:schemeClr val="accent1"/>
+          </a:fillRef>
+          <a:effectRef idx="2">
+            <a:schemeClr val="accent1"/>
+          </a:effectRef>
+          <a:fontRef idx="minor">
+            <a:schemeClr val="lt1"/>
+          </a:fontRef>
+        </p:style>
+        <p:txBody>
+          <a:bodyPr rtlCol="0" anchor="ctr"/>
+          <a:lstStyle/>
+          <a:p>
+            <a:pPr algn="ctr"/>
+          </a:p>
+        </p:txBody>
+      </p:sp>
+      <p:sp>
+        <p:nvSpPr>
+          <p:cNvPr id="9" name="TextBox 8"/>
+          <p:cNvSpPr txBox="1"/>
+          <p:nvPr/>
+        </p:nvSpPr>
+        <p:spPr>
+          <a:xfrm>
+            <a:off x="1051560" y="2011680"/>
+            <a:ext cx="10058400" cy="566928"/>
+          </a:xfrm>
+          <a:prstGeom prst="rect">
+            <a:avLst/>
+          </a:prstGeom>
+          <a:noFill/>
+        </p:spPr>
+        <p:txBody>
+          <a:bodyPr wrap="square" anchor="ctr">
+            <a:spAutoFit/>
+          </a:bodyPr>
+          <a:lstStyle/>
+          <a:p>
+            <a:pPr algn="ctr"/>
+            <a:r>
+              <a:rPr sz="1900" b="1">
+                <a:solidFill>
+                  <a:srgbClr val="FFFFFF"/>
+                </a:solidFill>
+                <a:latin typeface="Arial"/>
+              </a:rPr>
+              <a:t>A structured prompt brief, two AI wireframe directions and one approved PowerPoint wireframe</a:t>
             </a:r>
           </a:p>
         </p:txBody>

--- a/activities/Activity-02-Plan-the-Infographic-Brief-and-Wireframe/A02-Plan-the-Infographic-Brief-and-Wireframe-Sample.pptx
+++ b/activities/Activity-02-Plan-the-Infographic-Brief-and-Wireframe/A02-Plan-the-Infographic-Brief-and-Wireframe-Sample.pptx
@@ -11,6 +11,7 @@
     <p:sldId id="259" r:id="rId10"/>
     <p:sldId id="260" r:id="rId11"/>
     <p:sldId id="261" r:id="rId12"/>
+    <p:sldId id="262" r:id="rId13"/>
   </p:sldIdLst>
   <p:sldSz cx="12191695" cy="6858000" type="screen4x3"/>
   <p:notesSz cx="6858000" cy="9144000"/>
@@ -3293,7 +3294,7 @@
                 </a:solidFill>
                 <a:latin typeface="Arial"/>
               </a:rPr>
-              <a:t>Prompt an Evidence-Led Infographic Brief</a:t>
+              <a:t>Design a Comparison Infographic Brief</a:t>
             </a:r>
           </a:p>
         </p:txBody>
@@ -3443,7 +3444,7 @@
                 </a:solidFill>
                 <a:latin typeface="Arial"/>
               </a:rPr>
-              <a:t>Approved AI assistant + PowerPoint</a:t>
+              <a:t>Microsoft 365 Copilot + PowerPoint</a:t>
             </a:r>
           </a:p>
         </p:txBody>
@@ -3906,7 +3907,7 @@
                 </a:solidFill>
                 <a:latin typeface="Arial"/>
               </a:rPr>
-              <a:t>Data analyst</a:t>
+              <a:t>Analyse the evidence</a:t>
             </a:r>
           </a:p>
         </p:txBody>
@@ -3941,7 +3942,7 @@
                 </a:solidFill>
                 <a:latin typeface="Arial"/>
               </a:rPr>
-              <a:t>Using only the attached approved sources, create a source register, identify duplicates or conflicting definitions, clean the table, show formulas or transformations, and return five candidate insights with citations, caveats and a con…</a:t>
+              <a:t>Using only the attached approved source, identify the three strongest patterns, the denominator for each metric, one limitation and one proportionate business action. Cite the source field or row for every number. Do not invent missing…</a:t>
             </a:r>
           </a:p>
         </p:txBody>
@@ -4146,7 +4147,7 @@
                 </a:solidFill>
                 <a:latin typeface="Arial"/>
               </a:rPr>
-              <a:t>Infographic</a:t>
+              <a:t>Create the infographic</a:t>
             </a:r>
           </a:p>
         </p:txBody>
@@ -4181,7 +4182,7 @@
                 </a:solidFill>
                 <a:latin typeface="Arial"/>
               </a:rPr>
-              <a:t>Create a one-page executive infographic for Singapore retail managers. Lead with one decision insight, show three supporting metrics, include a five-stage flow and a source footer. Use a clean professional style, strong hierarchy and n…</a:t>
+              <a:t>Create a one-page [TYPE] infographic about [TOPIC]. Sections: 1. [SECTION ONE] 2. [SECTION TWO] 3. [SECTION THREE] 4. [SECTION FOUR] 5. [SECTION FIVE]. Audience: [AUDIENCE]. Decision: [DECISION]. Style: professional, high contrast, con…</a:t>
             </a:r>
           </a:p>
         </p:txBody>
@@ -4386,7 +4387,7 @@
                 </a:solidFill>
                 <a:latin typeface="Arial"/>
               </a:rPr>
-              <a:t>Text to image</a:t>
+              <a:t>Refine in PowerPoint</a:t>
             </a:r>
           </a:p>
         </p:txBody>
@@ -4421,7 +4422,7 @@
                 </a:solidFill>
                 <a:latin typeface="Arial"/>
               </a:rPr>
-              <a:t>Create a clean vector-like sustainability delivery illustration for a PowerPoint infographic: one electric van, one reusable parcel, a simple route and a feedback symbol. Transparent background, consistent blue/teal/violet/amber palett…</a:t>
+              <a:t>Turn the selected infographic direction into one editable PowerPoint slide. Keep the action title, labels, numbers, chart or process, source footer and accessibility notes editable. Remove decoration that does not support the message. …</a:t>
             </a:r>
           </a:p>
         </p:txBody>
@@ -4626,7 +4627,7 @@
                 </a:solidFill>
                 <a:latin typeface="Arial"/>
               </a:rPr>
-              <a:t>Gemini Notebook deck</a:t>
+              <a:t>Quality review</a:t>
             </a:r>
           </a:p>
         </p:txBody>
@@ -4661,7 +4662,7 @@
                 </a:solidFill>
                 <a:latin typeface="Arial"/>
               </a:rPr>
-              <a:t>Create Presenter Slides for business stakeholders. Focus on the verified decision insight, use a concise professional style, include source-grounded comparisons and a final recommendation. Avoid claims not supported by selected sources…</a:t>
+              <a:t>Review this infographic against message clarity, data accuracy, visual hierarchy, audience fit, accessibility, editability and business goal. List each issue with evidence, its impact, the proposed change and a pass/fail acceptance che…</a:t>
             </a:r>
           </a:p>
         </p:txBody>
@@ -4744,11 +4745,11 @@
             <a:avLst/>
           </a:prstGeom>
           <a:solidFill>
-            <a:srgbClr val="1F6FEB"/>
+            <a:srgbClr val="7C3AED"/>
           </a:solidFill>
           <a:ln>
             <a:solidFill>
-              <a:srgbClr val="1F6FEB"/>
+              <a:srgbClr val="7C3AED"/>
             </a:solidFill>
           </a:ln>
         </p:spPr>
@@ -4800,11 +4801,11 @@
             <a:r>
               <a:rPr sz="1100" b="1">
                 <a:solidFill>
-                  <a:srgbClr val="1F6FEB"/>
+                  <a:srgbClr val="7C3AED"/>
                 </a:solidFill>
                 <a:latin typeface="Arial"/>
               </a:rPr>
-              <a:t>ACTIVITY 02 · CONTEXT</a:t>
+              <a:t>ACTIVITY 02 · COPY, ADAPT AND VERIFY</a:t>
             </a:r>
           </a:p>
         </p:txBody>
@@ -4839,7 +4840,7 @@
                 </a:solidFill>
                 <a:latin typeface="Arial"/>
               </a:rPr>
-              <a:t>The Scenario</a:t>
+              <a:t>Structured Microsoft 365 Copilot Prompt</a:t>
             </a:r>
           </a:p>
         </p:txBody>
@@ -4932,8 +4933,8 @@
         </p:nvSpPr>
         <p:spPr>
           <a:xfrm>
-            <a:off x="731520" y="1783080"/>
-            <a:ext cx="10698480" cy="1691640"/>
+            <a:off x="749808" y="1700784"/>
+            <a:ext cx="10698480" cy="4370832"/>
           </a:xfrm>
           <a:prstGeom prst="roundRect">
             <a:avLst/>
@@ -4971,104 +4972,14 @@
       </p:sp>
       <p:sp>
         <p:nvSpPr>
-          <p:cNvPr id="9" name="Rectangle 8"/>
-          <p:cNvSpPr/>
-          <p:nvPr/>
-        </p:nvSpPr>
-        <p:spPr>
-          <a:xfrm>
-            <a:off x="731520" y="1783080"/>
-            <a:ext cx="73152" cy="1691640"/>
-          </a:xfrm>
-          <a:prstGeom prst="rect">
-            <a:avLst/>
-          </a:prstGeom>
-          <a:solidFill>
-            <a:srgbClr val="1F6FEB"/>
-          </a:solidFill>
-          <a:ln>
-            <a:solidFill>
-              <a:srgbClr val="1F6FEB"/>
-            </a:solidFill>
-          </a:ln>
-        </p:spPr>
-        <p:style>
-          <a:lnRef idx="1">
-            <a:schemeClr val="accent1"/>
-          </a:lnRef>
-          <a:fillRef idx="3">
-            <a:schemeClr val="accent1"/>
-          </a:fillRef>
-          <a:effectRef idx="2">
-            <a:schemeClr val="accent1"/>
-          </a:effectRef>
-          <a:fontRef idx="minor">
-            <a:schemeClr val="lt1"/>
-          </a:fontRef>
-        </p:style>
-        <p:txBody>
-          <a:bodyPr rtlCol="0" anchor="ctr"/>
-          <a:lstStyle/>
-          <a:p>
-            <a:pPr algn="ctr"/>
-          </a:p>
-        </p:txBody>
-      </p:sp>
-      <p:sp>
-        <p:nvSpPr>
-          <p:cNvPr id="10" name="Rounded Rectangle 9"/>
-          <p:cNvSpPr/>
-          <p:nvPr/>
-        </p:nvSpPr>
-        <p:spPr>
-          <a:xfrm>
-            <a:off x="932688" y="2002536"/>
-            <a:ext cx="438912" cy="438912"/>
-          </a:xfrm>
-          <a:prstGeom prst="roundRect">
-            <a:avLst/>
-          </a:prstGeom>
-          <a:solidFill>
-            <a:srgbClr val="1F6FEB"/>
-          </a:solidFill>
-          <a:ln>
-            <a:solidFill>
-              <a:srgbClr val="1F6FEB"/>
-            </a:solidFill>
-          </a:ln>
-        </p:spPr>
-        <p:style>
-          <a:lnRef idx="1">
-            <a:schemeClr val="accent1"/>
-          </a:lnRef>
-          <a:fillRef idx="3">
-            <a:schemeClr val="accent1"/>
-          </a:fillRef>
-          <a:effectRef idx="2">
-            <a:schemeClr val="accent1"/>
-          </a:effectRef>
-          <a:fontRef idx="minor">
-            <a:schemeClr val="lt1"/>
-          </a:fontRef>
-        </p:style>
-        <p:txBody>
-          <a:bodyPr rtlCol="0" anchor="ctr"/>
-          <a:lstStyle/>
-          <a:p>
-            <a:pPr algn="ctr"/>
-          </a:p>
-        </p:txBody>
-      </p:sp>
-      <p:sp>
-        <p:nvSpPr>
-          <p:cNvPr id="11" name="TextBox 10"/>
+          <p:cNvPr id="9" name="TextBox 8"/>
           <p:cNvSpPr txBox="1"/>
           <p:nvPr/>
         </p:nvSpPr>
         <p:spPr>
           <a:xfrm>
-            <a:off x="932688" y="2011680"/>
-            <a:ext cx="438912" cy="420624"/>
+            <a:off x="960120" y="1874519"/>
+            <a:ext cx="384048" cy="246888"/>
           </a:xfrm>
           <a:prstGeom prst="rect">
             <a:avLst/>
@@ -5076,16 +4987,16 @@
           <a:noFill/>
         </p:spPr>
         <p:txBody>
-          <a:bodyPr wrap="square" anchor="ctr">
+          <a:bodyPr wrap="square" anchor="t">
             <a:spAutoFit/>
           </a:bodyPr>
           <a:lstStyle/>
           <a:p>
-            <a:pPr algn="ctr"/>
-            <a:r>
-              <a:rPr sz="1400" b="1">
-                <a:solidFill>
-                  <a:srgbClr val="FFFFFF"/>
+            <a:pPr algn="r"/>
+            <a:r>
+              <a:rPr sz="900" b="0">
+                <a:solidFill>
+                  <a:srgbClr val="5B6372"/>
                 </a:solidFill>
                 <a:latin typeface="Arial"/>
               </a:rPr>
@@ -5096,14 +5007,14 @@
       </p:sp>
       <p:sp>
         <p:nvSpPr>
-          <p:cNvPr id="12" name="TextBox 11"/>
+          <p:cNvPr id="10" name="TextBox 9"/>
           <p:cNvSpPr txBox="1"/>
           <p:nvPr/>
         </p:nvSpPr>
         <p:spPr>
           <a:xfrm>
-            <a:off x="1536192" y="1965960"/>
-            <a:ext cx="9710928" cy="329184"/>
+            <a:off x="1554480" y="1874519"/>
+            <a:ext cx="9418320" cy="256032"/>
           </a:xfrm>
           <a:prstGeom prst="rect">
             <a:avLst/>
@@ -5118,27 +5029,27 @@
           <a:p>
             <a:pPr algn="l"/>
             <a:r>
-              <a:rPr sz="1400" b="1">
-                <a:solidFill>
-                  <a:srgbClr val="1F6FEB"/>
+              <a:rPr sz="1050" b="0">
+                <a:solidFill>
+                  <a:srgbClr val="161B26"/>
                 </a:solidFill>
                 <a:latin typeface="Arial"/>
               </a:rPr>
-              <a:t>Context</a:t>
-            </a:r>
-          </a:p>
-        </p:txBody>
-      </p:sp>
-      <p:sp>
-        <p:nvSpPr>
-          <p:cNvPr id="13" name="TextBox 12"/>
+              <a:t>Create a one-page comparison infographic about Design a Comparison Infographic Brief.</a:t>
+            </a:r>
+          </a:p>
+        </p:txBody>
+      </p:sp>
+      <p:sp>
+        <p:nvSpPr>
+          <p:cNvPr id="11" name="TextBox 10"/>
           <p:cNvSpPr txBox="1"/>
           <p:nvPr/>
         </p:nvSpPr>
         <p:spPr>
           <a:xfrm>
-            <a:off x="1536192" y="2350008"/>
-            <a:ext cx="9710928" cy="978408"/>
+            <a:off x="960120" y="2157984"/>
+            <a:ext cx="384048" cy="246888"/>
           </a:xfrm>
           <a:prstGeom prst="rect">
             <a:avLst/>
@@ -5151,181 +5062,11 @@
           </a:bodyPr>
           <a:lstStyle/>
           <a:p>
-            <a:pPr algn="l"/>
-            <a:r>
-              <a:rPr sz="1150" b="0">
-                <a:solidFill>
-                  <a:srgbClr val="161B26"/>
-                </a:solidFill>
-                <a:latin typeface="Arial"/>
-              </a:rPr>
-              <a:t>Northstar plans a sustainable-delivery campaign. The communication manager needs a portrait infographic showing the customer journey from order to low-emission delivery.</a:t>
-            </a:r>
-          </a:p>
-        </p:txBody>
-      </p:sp>
-      <p:sp>
-        <p:nvSpPr>
-          <p:cNvPr id="14" name="Rounded Rectangle 13"/>
-          <p:cNvSpPr/>
-          <p:nvPr/>
-        </p:nvSpPr>
-        <p:spPr>
-          <a:xfrm>
-            <a:off x="731520" y="3776472"/>
-            <a:ext cx="10698480" cy="1691640"/>
-          </a:xfrm>
-          <a:prstGeom prst="roundRect">
-            <a:avLst/>
-          </a:prstGeom>
-          <a:solidFill>
-            <a:srgbClr val="F5F8FC"/>
-          </a:solidFill>
-          <a:ln>
-            <a:solidFill>
-              <a:srgbClr val="E2E8F0"/>
-            </a:solidFill>
-          </a:ln>
-        </p:spPr>
-        <p:style>
-          <a:lnRef idx="1">
-            <a:schemeClr val="accent1"/>
-          </a:lnRef>
-          <a:fillRef idx="3">
-            <a:schemeClr val="accent1"/>
-          </a:fillRef>
-          <a:effectRef idx="2">
-            <a:schemeClr val="accent1"/>
-          </a:effectRef>
-          <a:fontRef idx="minor">
-            <a:schemeClr val="lt1"/>
-          </a:fontRef>
-        </p:style>
-        <p:txBody>
-          <a:bodyPr rtlCol="0" anchor="ctr"/>
-          <a:lstStyle/>
-          <a:p>
-            <a:pPr algn="ctr"/>
-          </a:p>
-        </p:txBody>
-      </p:sp>
-      <p:sp>
-        <p:nvSpPr>
-          <p:cNvPr id="15" name="Rectangle 14"/>
-          <p:cNvSpPr/>
-          <p:nvPr/>
-        </p:nvSpPr>
-        <p:spPr>
-          <a:xfrm>
-            <a:off x="731520" y="3776472"/>
-            <a:ext cx="73152" cy="1691640"/>
-          </a:xfrm>
-          <a:prstGeom prst="rect">
-            <a:avLst/>
-          </a:prstGeom>
-          <a:solidFill>
-            <a:srgbClr val="10B981"/>
-          </a:solidFill>
-          <a:ln>
-            <a:solidFill>
-              <a:srgbClr val="10B981"/>
-            </a:solidFill>
-          </a:ln>
-        </p:spPr>
-        <p:style>
-          <a:lnRef idx="1">
-            <a:schemeClr val="accent1"/>
-          </a:lnRef>
-          <a:fillRef idx="3">
-            <a:schemeClr val="accent1"/>
-          </a:fillRef>
-          <a:effectRef idx="2">
-            <a:schemeClr val="accent1"/>
-          </a:effectRef>
-          <a:fontRef idx="minor">
-            <a:schemeClr val="lt1"/>
-          </a:fontRef>
-        </p:style>
-        <p:txBody>
-          <a:bodyPr rtlCol="0" anchor="ctr"/>
-          <a:lstStyle/>
-          <a:p>
-            <a:pPr algn="ctr"/>
-          </a:p>
-        </p:txBody>
-      </p:sp>
-      <p:sp>
-        <p:nvSpPr>
-          <p:cNvPr id="16" name="Rounded Rectangle 15"/>
-          <p:cNvSpPr/>
-          <p:nvPr/>
-        </p:nvSpPr>
-        <p:spPr>
-          <a:xfrm>
-            <a:off x="932688" y="3995928"/>
-            <a:ext cx="438912" cy="438912"/>
-          </a:xfrm>
-          <a:prstGeom prst="roundRect">
-            <a:avLst/>
-          </a:prstGeom>
-          <a:solidFill>
-            <a:srgbClr val="10B981"/>
-          </a:solidFill>
-          <a:ln>
-            <a:solidFill>
-              <a:srgbClr val="10B981"/>
-            </a:solidFill>
-          </a:ln>
-        </p:spPr>
-        <p:style>
-          <a:lnRef idx="1">
-            <a:schemeClr val="accent1"/>
-          </a:lnRef>
-          <a:fillRef idx="3">
-            <a:schemeClr val="accent1"/>
-          </a:fillRef>
-          <a:effectRef idx="2">
-            <a:schemeClr val="accent1"/>
-          </a:effectRef>
-          <a:fontRef idx="minor">
-            <a:schemeClr val="lt1"/>
-          </a:fontRef>
-        </p:style>
-        <p:txBody>
-          <a:bodyPr rtlCol="0" anchor="ctr"/>
-          <a:lstStyle/>
-          <a:p>
-            <a:pPr algn="ctr"/>
-          </a:p>
-        </p:txBody>
-      </p:sp>
-      <p:sp>
-        <p:nvSpPr>
-          <p:cNvPr id="17" name="TextBox 16"/>
-          <p:cNvSpPr txBox="1"/>
-          <p:nvPr/>
-        </p:nvSpPr>
-        <p:spPr>
-          <a:xfrm>
-            <a:off x="932688" y="4005072"/>
-            <a:ext cx="438912" cy="420624"/>
-          </a:xfrm>
-          <a:prstGeom prst="rect">
-            <a:avLst/>
-          </a:prstGeom>
-          <a:noFill/>
-        </p:spPr>
-        <p:txBody>
-          <a:bodyPr wrap="square" anchor="ctr">
-            <a:spAutoFit/>
-          </a:bodyPr>
-          <a:lstStyle/>
-          <a:p>
-            <a:pPr algn="ctr"/>
-            <a:r>
-              <a:rPr sz="1400" b="1">
-                <a:solidFill>
-                  <a:srgbClr val="FFFFFF"/>
+            <a:pPr algn="r"/>
+            <a:r>
+              <a:rPr sz="900" b="0">
+                <a:solidFill>
+                  <a:srgbClr val="5B6372"/>
                 </a:solidFill>
                 <a:latin typeface="Arial"/>
               </a:rPr>
@@ -5336,14 +5077,14 @@
       </p:sp>
       <p:sp>
         <p:nvSpPr>
-          <p:cNvPr id="18" name="TextBox 17"/>
+          <p:cNvPr id="12" name="TextBox 11"/>
           <p:cNvSpPr txBox="1"/>
           <p:nvPr/>
         </p:nvSpPr>
         <p:spPr>
           <a:xfrm>
-            <a:off x="1536192" y="3959352"/>
-            <a:ext cx="9710928" cy="329184"/>
+            <a:off x="1554480" y="2157984"/>
+            <a:ext cx="9418320" cy="256032"/>
           </a:xfrm>
           <a:prstGeom prst="rect">
             <a:avLst/>
@@ -5358,27 +5099,27 @@
           <a:p>
             <a:pPr algn="l"/>
             <a:r>
-              <a:rPr sz="1400" b="1">
-                <a:solidFill>
-                  <a:srgbClr val="10B981"/>
+              <a:rPr sz="1050" b="1">
+                <a:solidFill>
+                  <a:srgbClr val="161B26"/>
                 </a:solidFill>
                 <a:latin typeface="Arial"/>
               </a:rPr>
-              <a:t>Decision pressure</a:t>
-            </a:r>
-          </a:p>
-        </p:txBody>
-      </p:sp>
-      <p:sp>
-        <p:nvSpPr>
-          <p:cNvPr id="19" name="TextBox 18"/>
+              <a:t>Sections:</a:t>
+            </a:r>
+          </a:p>
+        </p:txBody>
+      </p:sp>
+      <p:sp>
+        <p:nvSpPr>
+          <p:cNvPr id="13" name="TextBox 12"/>
           <p:cNvSpPr txBox="1"/>
           <p:nvPr/>
         </p:nvSpPr>
         <p:spPr>
           <a:xfrm>
-            <a:off x="1536192" y="4343400"/>
-            <a:ext cx="9710928" cy="978408"/>
+            <a:off x="960120" y="2441448"/>
+            <a:ext cx="384048" cy="246888"/>
           </a:xfrm>
           <a:prstGeom prst="rect">
             <a:avLst/>
@@ -5391,15 +5132,680 @@
           </a:bodyPr>
           <a:lstStyle/>
           <a:p>
-            <a:pPr algn="l"/>
-            <a:r>
-              <a:rPr sz="1150" b="0">
-                <a:solidFill>
-                  <a:srgbClr val="161B26"/>
+            <a:pPr algn="r"/>
+            <a:r>
+              <a:rPr sz="900" b="0">
+                <a:solidFill>
+                  <a:srgbClr val="5B6372"/>
                 </a:solidFill>
                 <a:latin typeface="Arial"/>
               </a:rPr>
-              <a:t>Use the supplied prompt workbook to ask AI for two wireframe directions. Select one by evidence fit, then preserve it as the control brief for Microsoft 365 Copilot, Gemini Notebook or PowerPoint.</a:t>
+              <a:t>3</a:t>
+            </a:r>
+          </a:p>
+        </p:txBody>
+      </p:sp>
+      <p:sp>
+        <p:nvSpPr>
+          <p:cNvPr id="14" name="TextBox 13"/>
+          <p:cNvSpPr txBox="1"/>
+          <p:nvPr/>
+        </p:nvSpPr>
+        <p:spPr>
+          <a:xfrm>
+            <a:off x="1554480" y="2441448"/>
+            <a:ext cx="9418320" cy="256032"/>
+          </a:xfrm>
+          <a:prstGeom prst="rect">
+            <a:avLst/>
+          </a:prstGeom>
+          <a:noFill/>
+        </p:spPr>
+        <p:txBody>
+          <a:bodyPr wrap="square" anchor="t">
+            <a:spAutoFit/>
+          </a:bodyPr>
+          <a:lstStyle/>
+          <a:p>
+            <a:pPr algn="l"/>
+            <a:r>
+              <a:rPr sz="1050" b="0">
+                <a:solidFill>
+                  <a:srgbClr val="161B26"/>
+                </a:solidFill>
+                <a:latin typeface="Arial"/>
+              </a:rPr>
+              <a:t>1. Hook</a:t>
+            </a:r>
+          </a:p>
+        </p:txBody>
+      </p:sp>
+      <p:sp>
+        <p:nvSpPr>
+          <p:cNvPr id="15" name="TextBox 14"/>
+          <p:cNvSpPr txBox="1"/>
+          <p:nvPr/>
+        </p:nvSpPr>
+        <p:spPr>
+          <a:xfrm>
+            <a:off x="960120" y="2724911"/>
+            <a:ext cx="384048" cy="246888"/>
+          </a:xfrm>
+          <a:prstGeom prst="rect">
+            <a:avLst/>
+          </a:prstGeom>
+          <a:noFill/>
+        </p:spPr>
+        <p:txBody>
+          <a:bodyPr wrap="square" anchor="t">
+            <a:spAutoFit/>
+          </a:bodyPr>
+          <a:lstStyle/>
+          <a:p>
+            <a:pPr algn="r"/>
+            <a:r>
+              <a:rPr sz="900" b="0">
+                <a:solidFill>
+                  <a:srgbClr val="5B6372"/>
+                </a:solidFill>
+                <a:latin typeface="Arial"/>
+              </a:rPr>
+              <a:t>4</a:t>
+            </a:r>
+          </a:p>
+        </p:txBody>
+      </p:sp>
+      <p:sp>
+        <p:nvSpPr>
+          <p:cNvPr id="16" name="TextBox 15"/>
+          <p:cNvSpPr txBox="1"/>
+          <p:nvPr/>
+        </p:nvSpPr>
+        <p:spPr>
+          <a:xfrm>
+            <a:off x="1554480" y="2724911"/>
+            <a:ext cx="9418320" cy="256032"/>
+          </a:xfrm>
+          <a:prstGeom prst="rect">
+            <a:avLst/>
+          </a:prstGeom>
+          <a:noFill/>
+        </p:spPr>
+        <p:txBody>
+          <a:bodyPr wrap="square" anchor="t">
+            <a:spAutoFit/>
+          </a:bodyPr>
+          <a:lstStyle/>
+          <a:p>
+            <a:pPr algn="l"/>
+            <a:r>
+              <a:rPr sz="1050" b="0">
+                <a:solidFill>
+                  <a:srgbClr val="161B26"/>
+                </a:solidFill>
+                <a:latin typeface="Arial"/>
+              </a:rPr>
+              <a:t>2. Context</a:t>
+            </a:r>
+          </a:p>
+        </p:txBody>
+      </p:sp>
+      <p:sp>
+        <p:nvSpPr>
+          <p:cNvPr id="17" name="TextBox 16"/>
+          <p:cNvSpPr txBox="1"/>
+          <p:nvPr/>
+        </p:nvSpPr>
+        <p:spPr>
+          <a:xfrm>
+            <a:off x="960120" y="3008376"/>
+            <a:ext cx="384048" cy="246888"/>
+          </a:xfrm>
+          <a:prstGeom prst="rect">
+            <a:avLst/>
+          </a:prstGeom>
+          <a:noFill/>
+        </p:spPr>
+        <p:txBody>
+          <a:bodyPr wrap="square" anchor="t">
+            <a:spAutoFit/>
+          </a:bodyPr>
+          <a:lstStyle/>
+          <a:p>
+            <a:pPr algn="r"/>
+            <a:r>
+              <a:rPr sz="900" b="0">
+                <a:solidFill>
+                  <a:srgbClr val="5B6372"/>
+                </a:solidFill>
+                <a:latin typeface="Arial"/>
+              </a:rPr>
+              <a:t>5</a:t>
+            </a:r>
+          </a:p>
+        </p:txBody>
+      </p:sp>
+      <p:sp>
+        <p:nvSpPr>
+          <p:cNvPr id="18" name="TextBox 17"/>
+          <p:cNvSpPr txBox="1"/>
+          <p:nvPr/>
+        </p:nvSpPr>
+        <p:spPr>
+          <a:xfrm>
+            <a:off x="1554480" y="3008376"/>
+            <a:ext cx="9418320" cy="256032"/>
+          </a:xfrm>
+          <a:prstGeom prst="rect">
+            <a:avLst/>
+          </a:prstGeom>
+          <a:noFill/>
+        </p:spPr>
+        <p:txBody>
+          <a:bodyPr wrap="square" anchor="t">
+            <a:spAutoFit/>
+          </a:bodyPr>
+          <a:lstStyle/>
+          <a:p>
+            <a:pPr algn="l"/>
+            <a:r>
+              <a:rPr sz="1050" b="0">
+                <a:solidFill>
+                  <a:srgbClr val="161B26"/>
+                </a:solidFill>
+                <a:latin typeface="Arial"/>
+              </a:rPr>
+              <a:t>3. Evidence</a:t>
+            </a:r>
+          </a:p>
+        </p:txBody>
+      </p:sp>
+      <p:sp>
+        <p:nvSpPr>
+          <p:cNvPr id="19" name="TextBox 18"/>
+          <p:cNvSpPr txBox="1"/>
+          <p:nvPr/>
+        </p:nvSpPr>
+        <p:spPr>
+          <a:xfrm>
+            <a:off x="960120" y="3291839"/>
+            <a:ext cx="384048" cy="246888"/>
+          </a:xfrm>
+          <a:prstGeom prst="rect">
+            <a:avLst/>
+          </a:prstGeom>
+          <a:noFill/>
+        </p:spPr>
+        <p:txBody>
+          <a:bodyPr wrap="square" anchor="t">
+            <a:spAutoFit/>
+          </a:bodyPr>
+          <a:lstStyle/>
+          <a:p>
+            <a:pPr algn="r"/>
+            <a:r>
+              <a:rPr sz="900" b="0">
+                <a:solidFill>
+                  <a:srgbClr val="5B6372"/>
+                </a:solidFill>
+                <a:latin typeface="Arial"/>
+              </a:rPr>
+              <a:t>6</a:t>
+            </a:r>
+          </a:p>
+        </p:txBody>
+      </p:sp>
+      <p:sp>
+        <p:nvSpPr>
+          <p:cNvPr id="20" name="TextBox 19"/>
+          <p:cNvSpPr txBox="1"/>
+          <p:nvPr/>
+        </p:nvSpPr>
+        <p:spPr>
+          <a:xfrm>
+            <a:off x="1554480" y="3291839"/>
+            <a:ext cx="9418320" cy="256032"/>
+          </a:xfrm>
+          <a:prstGeom prst="rect">
+            <a:avLst/>
+          </a:prstGeom>
+          <a:noFill/>
+        </p:spPr>
+        <p:txBody>
+          <a:bodyPr wrap="square" anchor="t">
+            <a:spAutoFit/>
+          </a:bodyPr>
+          <a:lstStyle/>
+          <a:p>
+            <a:pPr algn="l"/>
+            <a:r>
+              <a:rPr sz="1050" b="0">
+                <a:solidFill>
+                  <a:srgbClr val="161B26"/>
+                </a:solidFill>
+                <a:latin typeface="Arial"/>
+              </a:rPr>
+              <a:t>4. Guidance</a:t>
+            </a:r>
+          </a:p>
+        </p:txBody>
+      </p:sp>
+      <p:sp>
+        <p:nvSpPr>
+          <p:cNvPr id="21" name="TextBox 20"/>
+          <p:cNvSpPr txBox="1"/>
+          <p:nvPr/>
+        </p:nvSpPr>
+        <p:spPr>
+          <a:xfrm>
+            <a:off x="960120" y="3575303"/>
+            <a:ext cx="384048" cy="246888"/>
+          </a:xfrm>
+          <a:prstGeom prst="rect">
+            <a:avLst/>
+          </a:prstGeom>
+          <a:noFill/>
+        </p:spPr>
+        <p:txBody>
+          <a:bodyPr wrap="square" anchor="t">
+            <a:spAutoFit/>
+          </a:bodyPr>
+          <a:lstStyle/>
+          <a:p>
+            <a:pPr algn="r"/>
+            <a:r>
+              <a:rPr sz="900" b="0">
+                <a:solidFill>
+                  <a:srgbClr val="5B6372"/>
+                </a:solidFill>
+                <a:latin typeface="Arial"/>
+              </a:rPr>
+              <a:t>7</a:t>
+            </a:r>
+          </a:p>
+        </p:txBody>
+      </p:sp>
+      <p:sp>
+        <p:nvSpPr>
+          <p:cNvPr id="22" name="TextBox 21"/>
+          <p:cNvSpPr txBox="1"/>
+          <p:nvPr/>
+        </p:nvSpPr>
+        <p:spPr>
+          <a:xfrm>
+            <a:off x="1554480" y="3575303"/>
+            <a:ext cx="9418320" cy="256032"/>
+          </a:xfrm>
+          <a:prstGeom prst="rect">
+            <a:avLst/>
+          </a:prstGeom>
+          <a:noFill/>
+        </p:spPr>
+        <p:txBody>
+          <a:bodyPr wrap="square" anchor="t">
+            <a:spAutoFit/>
+          </a:bodyPr>
+          <a:lstStyle/>
+          <a:p>
+            <a:pPr algn="l"/>
+            <a:r>
+              <a:rPr sz="1050" b="0">
+                <a:solidFill>
+                  <a:srgbClr val="161B26"/>
+                </a:solidFill>
+                <a:latin typeface="Arial"/>
+              </a:rPr>
+              <a:t>5. Action</a:t>
+            </a:r>
+          </a:p>
+        </p:txBody>
+      </p:sp>
+      <p:sp>
+        <p:nvSpPr>
+          <p:cNvPr id="23" name="TextBox 22"/>
+          <p:cNvSpPr txBox="1"/>
+          <p:nvPr/>
+        </p:nvSpPr>
+        <p:spPr>
+          <a:xfrm>
+            <a:off x="960120" y="3858768"/>
+            <a:ext cx="384048" cy="246888"/>
+          </a:xfrm>
+          <a:prstGeom prst="rect">
+            <a:avLst/>
+          </a:prstGeom>
+          <a:noFill/>
+        </p:spPr>
+        <p:txBody>
+          <a:bodyPr wrap="square" anchor="t">
+            <a:spAutoFit/>
+          </a:bodyPr>
+          <a:lstStyle/>
+          <a:p>
+            <a:pPr algn="r"/>
+            <a:r>
+              <a:rPr sz="900" b="0">
+                <a:solidFill>
+                  <a:srgbClr val="5B6372"/>
+                </a:solidFill>
+                <a:latin typeface="Arial"/>
+              </a:rPr>
+              <a:t>8</a:t>
+            </a:r>
+          </a:p>
+        </p:txBody>
+      </p:sp>
+      <p:sp>
+        <p:nvSpPr>
+          <p:cNvPr id="24" name="TextBox 23"/>
+          <p:cNvSpPr txBox="1"/>
+          <p:nvPr/>
+        </p:nvSpPr>
+        <p:spPr>
+          <a:xfrm>
+            <a:off x="1554480" y="3858768"/>
+            <a:ext cx="9418320" cy="256032"/>
+          </a:xfrm>
+          <a:prstGeom prst="rect">
+            <a:avLst/>
+          </a:prstGeom>
+          <a:noFill/>
+        </p:spPr>
+        <p:txBody>
+          <a:bodyPr wrap="square" anchor="t">
+            <a:spAutoFit/>
+          </a:bodyPr>
+          <a:lstStyle/>
+          <a:p>
+            <a:pPr algn="l"/>
+            <a:r>
+              <a:rPr sz="1050" b="0">
+                <a:solidFill>
+                  <a:srgbClr val="7C3AED"/>
+                </a:solidFill>
+                <a:latin typeface="Arial"/>
+              </a:rPr>
+              <a:t>Audience: communication manager</a:t>
+            </a:r>
+          </a:p>
+        </p:txBody>
+      </p:sp>
+      <p:sp>
+        <p:nvSpPr>
+          <p:cNvPr id="25" name="TextBox 24"/>
+          <p:cNvSpPr txBox="1"/>
+          <p:nvPr/>
+        </p:nvSpPr>
+        <p:spPr>
+          <a:xfrm>
+            <a:off x="960120" y="4142231"/>
+            <a:ext cx="384048" cy="246888"/>
+          </a:xfrm>
+          <a:prstGeom prst="rect">
+            <a:avLst/>
+          </a:prstGeom>
+          <a:noFill/>
+        </p:spPr>
+        <p:txBody>
+          <a:bodyPr wrap="square" anchor="t">
+            <a:spAutoFit/>
+          </a:bodyPr>
+          <a:lstStyle/>
+          <a:p>
+            <a:pPr algn="r"/>
+            <a:r>
+              <a:rPr sz="900" b="0">
+                <a:solidFill>
+                  <a:srgbClr val="5B6372"/>
+                </a:solidFill>
+                <a:latin typeface="Arial"/>
+              </a:rPr>
+              <a:t>9</a:t>
+            </a:r>
+          </a:p>
+        </p:txBody>
+      </p:sp>
+      <p:sp>
+        <p:nvSpPr>
+          <p:cNvPr id="26" name="TextBox 25"/>
+          <p:cNvSpPr txBox="1"/>
+          <p:nvPr/>
+        </p:nvSpPr>
+        <p:spPr>
+          <a:xfrm>
+            <a:off x="1554480" y="4142231"/>
+            <a:ext cx="9418320" cy="256032"/>
+          </a:xfrm>
+          <a:prstGeom prst="rect">
+            <a:avLst/>
+          </a:prstGeom>
+          <a:noFill/>
+        </p:spPr>
+        <p:txBody>
+          <a:bodyPr wrap="square" anchor="t">
+            <a:spAutoFit/>
+          </a:bodyPr>
+          <a:lstStyle/>
+          <a:p>
+            <a:pPr algn="l"/>
+            <a:r>
+              <a:rPr sz="1050" b="0">
+                <a:solidFill>
+                  <a:srgbClr val="7C3AED"/>
+                </a:solidFill>
+                <a:latin typeface="Arial"/>
+              </a:rPr>
+              <a:t>Decision: The wireframe communicates objective, hierarchy, evidence, flow, action and source space before visual styling begins.</a:t>
+            </a:r>
+          </a:p>
+        </p:txBody>
+      </p:sp>
+      <p:sp>
+        <p:nvSpPr>
+          <p:cNvPr id="27" name="TextBox 26"/>
+          <p:cNvSpPr txBox="1"/>
+          <p:nvPr/>
+        </p:nvSpPr>
+        <p:spPr>
+          <a:xfrm>
+            <a:off x="960120" y="4425696"/>
+            <a:ext cx="384048" cy="246888"/>
+          </a:xfrm>
+          <a:prstGeom prst="rect">
+            <a:avLst/>
+          </a:prstGeom>
+          <a:noFill/>
+        </p:spPr>
+        <p:txBody>
+          <a:bodyPr wrap="square" anchor="t">
+            <a:spAutoFit/>
+          </a:bodyPr>
+          <a:lstStyle/>
+          <a:p>
+            <a:pPr algn="r"/>
+            <a:r>
+              <a:rPr sz="900" b="0">
+                <a:solidFill>
+                  <a:srgbClr val="5B6372"/>
+                </a:solidFill>
+                <a:latin typeface="Arial"/>
+              </a:rPr>
+              <a:t>10</a:t>
+            </a:r>
+          </a:p>
+        </p:txBody>
+      </p:sp>
+      <p:sp>
+        <p:nvSpPr>
+          <p:cNvPr id="28" name="TextBox 27"/>
+          <p:cNvSpPr txBox="1"/>
+          <p:nvPr/>
+        </p:nvSpPr>
+        <p:spPr>
+          <a:xfrm>
+            <a:off x="1554480" y="4425696"/>
+            <a:ext cx="9418320" cy="256032"/>
+          </a:xfrm>
+          <a:prstGeom prst="rect">
+            <a:avLst/>
+          </a:prstGeom>
+          <a:noFill/>
+        </p:spPr>
+        <p:txBody>
+          <a:bodyPr wrap="square" anchor="t">
+            <a:spAutoFit/>
+          </a:bodyPr>
+          <a:lstStyle/>
+          <a:p>
+            <a:pPr algn="l"/>
+            <a:r>
+              <a:rPr sz="1050" b="0">
+                <a:solidFill>
+                  <a:srgbClr val="7C3AED"/>
+                </a:solidFill>
+                <a:latin typeface="Arial"/>
+              </a:rPr>
+              <a:t>Style: professional, concise, high contrast and accessible</a:t>
+            </a:r>
+          </a:p>
+        </p:txBody>
+      </p:sp>
+      <p:sp>
+        <p:nvSpPr>
+          <p:cNvPr id="29" name="TextBox 28"/>
+          <p:cNvSpPr txBox="1"/>
+          <p:nvPr/>
+        </p:nvSpPr>
+        <p:spPr>
+          <a:xfrm>
+            <a:off x="960120" y="4709160"/>
+            <a:ext cx="384048" cy="246888"/>
+          </a:xfrm>
+          <a:prstGeom prst="rect">
+            <a:avLst/>
+          </a:prstGeom>
+          <a:noFill/>
+        </p:spPr>
+        <p:txBody>
+          <a:bodyPr wrap="square" anchor="t">
+            <a:spAutoFit/>
+          </a:bodyPr>
+          <a:lstStyle/>
+          <a:p>
+            <a:pPr algn="r"/>
+            <a:r>
+              <a:rPr sz="900" b="0">
+                <a:solidFill>
+                  <a:srgbClr val="5B6372"/>
+                </a:solidFill>
+                <a:latin typeface="Arial"/>
+              </a:rPr>
+              <a:t>11</a:t>
+            </a:r>
+          </a:p>
+        </p:txBody>
+      </p:sp>
+      <p:sp>
+        <p:nvSpPr>
+          <p:cNvPr id="30" name="TextBox 29"/>
+          <p:cNvSpPr txBox="1"/>
+          <p:nvPr/>
+        </p:nvSpPr>
+        <p:spPr>
+          <a:xfrm>
+            <a:off x="1554480" y="4709160"/>
+            <a:ext cx="9418320" cy="256032"/>
+          </a:xfrm>
+          <a:prstGeom prst="rect">
+            <a:avLst/>
+          </a:prstGeom>
+          <a:noFill/>
+        </p:spPr>
+        <p:txBody>
+          <a:bodyPr wrap="square" anchor="t">
+            <a:spAutoFit/>
+          </a:bodyPr>
+          <a:lstStyle/>
+          <a:p>
+            <a:pPr algn="l"/>
+            <a:r>
+              <a:rPr sz="1050" b="0">
+                <a:solidFill>
+                  <a:srgbClr val="7C3AED"/>
+                </a:solidFill>
+                <a:latin typeface="Arial"/>
+              </a:rPr>
+              <a:t>Format: Wide for PowerPoint unless the brief requires Portrait</a:t>
+            </a:r>
+          </a:p>
+        </p:txBody>
+      </p:sp>
+      <p:sp>
+        <p:nvSpPr>
+          <p:cNvPr id="31" name="TextBox 30"/>
+          <p:cNvSpPr txBox="1"/>
+          <p:nvPr/>
+        </p:nvSpPr>
+        <p:spPr>
+          <a:xfrm>
+            <a:off x="960120" y="4992624"/>
+            <a:ext cx="384048" cy="246888"/>
+          </a:xfrm>
+          <a:prstGeom prst="rect">
+            <a:avLst/>
+          </a:prstGeom>
+          <a:noFill/>
+        </p:spPr>
+        <p:txBody>
+          <a:bodyPr wrap="square" anchor="t">
+            <a:spAutoFit/>
+          </a:bodyPr>
+          <a:lstStyle/>
+          <a:p>
+            <a:pPr algn="r"/>
+            <a:r>
+              <a:rPr sz="900" b="0">
+                <a:solidFill>
+                  <a:srgbClr val="5B6372"/>
+                </a:solidFill>
+                <a:latin typeface="Arial"/>
+              </a:rPr>
+              <a:t>12</a:t>
+            </a:r>
+          </a:p>
+        </p:txBody>
+      </p:sp>
+      <p:sp>
+        <p:nvSpPr>
+          <p:cNvPr id="32" name="TextBox 31"/>
+          <p:cNvSpPr txBox="1"/>
+          <p:nvPr/>
+        </p:nvSpPr>
+        <p:spPr>
+          <a:xfrm>
+            <a:off x="1554480" y="4992624"/>
+            <a:ext cx="9418320" cy="256032"/>
+          </a:xfrm>
+          <a:prstGeom prst="rect">
+            <a:avLst/>
+          </a:prstGeom>
+          <a:noFill/>
+        </p:spPr>
+        <p:txBody>
+          <a:bodyPr wrap="square" anchor="t">
+            <a:spAutoFit/>
+          </a:bodyPr>
+          <a:lstStyle/>
+          <a:p>
+            <a:pPr algn="l"/>
+            <a:r>
+              <a:rPr sz="1050" b="0">
+                <a:solidFill>
+                  <a:srgbClr val="7C3AED"/>
+                </a:solidFill>
+                <a:latin typeface="Arial"/>
+              </a:rPr>
+              <a:t>Source rule: use only the attached approved or synthetic course data; include period and source; do not invent facts</a:t>
             </a:r>
           </a:p>
         </p:txBody>
@@ -5482,11 +5888,11 @@
             <a:avLst/>
           </a:prstGeom>
           <a:solidFill>
-            <a:srgbClr val="10B981"/>
+            <a:srgbClr val="1F6FEB"/>
           </a:solidFill>
           <a:ln>
             <a:solidFill>
-              <a:srgbClr val="10B981"/>
+              <a:srgbClr val="1F6FEB"/>
             </a:solidFill>
           </a:ln>
         </p:spPr>
@@ -5538,11 +5944,11 @@
             <a:r>
               <a:rPr sz="1100" b="1">
                 <a:solidFill>
-                  <a:srgbClr val="10B981"/>
+                  <a:srgbClr val="1F6FEB"/>
                 </a:solidFill>
                 <a:latin typeface="Arial"/>
               </a:rPr>
-              <a:t>ACTIVITY 02 · FRAMEWORK</a:t>
+              <a:t>ACTIVITY 02 · CONTEXT</a:t>
             </a:r>
           </a:p>
         </p:txBody>
@@ -5577,7 +5983,7 @@
                 </a:solidFill>
                 <a:latin typeface="Arial"/>
               </a:rPr>
-              <a:t>Brief Before Generation</a:t>
+              <a:t>The Scenario</a:t>
             </a:r>
           </a:p>
         </p:txBody>
@@ -5670,8 +6076,8 @@
         </p:nvSpPr>
         <p:spPr>
           <a:xfrm>
-            <a:off x="685800" y="1920240"/>
-            <a:ext cx="1997049" cy="3566160"/>
+            <a:off x="731520" y="1783080"/>
+            <a:ext cx="10698480" cy="1691640"/>
           </a:xfrm>
           <a:prstGeom prst="roundRect">
             <a:avLst/>
@@ -5715,8 +6121,8 @@
         </p:nvSpPr>
         <p:spPr>
           <a:xfrm>
-            <a:off x="685800" y="1920240"/>
-            <a:ext cx="73152" cy="3566160"/>
+            <a:off x="731520" y="1783080"/>
+            <a:ext cx="73152" cy="1691640"/>
           </a:xfrm>
           <a:prstGeom prst="rect">
             <a:avLst/>
@@ -5760,7 +6166,7 @@
         </p:nvSpPr>
         <p:spPr>
           <a:xfrm>
-            <a:off x="886968" y="2139696"/>
+            <a:off x="932688" y="2002536"/>
             <a:ext cx="438912" cy="438912"/>
           </a:xfrm>
           <a:prstGeom prst="roundRect">
@@ -5805,7 +6211,7 @@
         </p:nvSpPr>
         <p:spPr>
           <a:xfrm>
-            <a:off x="886968" y="2148840"/>
+            <a:off x="932688" y="2011680"/>
             <a:ext cx="438912" cy="420624"/>
           </a:xfrm>
           <a:prstGeom prst="rect">
@@ -5840,8 +6246,8 @@
         </p:nvSpPr>
         <p:spPr>
           <a:xfrm>
-            <a:off x="1490472" y="2103120"/>
-            <a:ext cx="1009497" cy="329184"/>
+            <a:off x="1536192" y="1965960"/>
+            <a:ext cx="9710928" cy="329184"/>
           </a:xfrm>
           <a:prstGeom prst="rect">
             <a:avLst/>
@@ -5862,7 +6268,7 @@
                 </a:solidFill>
                 <a:latin typeface="Arial"/>
               </a:rPr>
-              <a:t>Define</a:t>
+              <a:t>Context</a:t>
             </a:r>
           </a:p>
         </p:txBody>
@@ -5875,8 +6281,8 @@
         </p:nvSpPr>
         <p:spPr>
           <a:xfrm>
-            <a:off x="1490472" y="2487168"/>
-            <a:ext cx="1009497" cy="2852928"/>
+            <a:off x="1536192" y="2350008"/>
+            <a:ext cx="9710928" cy="978408"/>
           </a:xfrm>
           <a:prstGeom prst="rect">
             <a:avLst/>
@@ -5897,7 +6303,7 @@
                 </a:solidFill>
                 <a:latin typeface="Arial"/>
               </a:rPr>
-              <a:t>Write the objective and audience question.</a:t>
+              <a:t>Northstar plans a sustainable-delivery campaign. The communication manager needs a portrait infographic showing the customer journey from order to low-emission delivery.</a:t>
             </a:r>
           </a:p>
         </p:txBody>
@@ -5910,8 +6316,8 @@
         </p:nvSpPr>
         <p:spPr>
           <a:xfrm>
-            <a:off x="2884017" y="1920240"/>
-            <a:ext cx="1997049" cy="3566160"/>
+            <a:off x="731520" y="3776472"/>
+            <a:ext cx="10698480" cy="1691640"/>
           </a:xfrm>
           <a:prstGeom prst="roundRect">
             <a:avLst/>
@@ -5955,8 +6361,8 @@
         </p:nvSpPr>
         <p:spPr>
           <a:xfrm>
-            <a:off x="2884017" y="1920240"/>
-            <a:ext cx="73152" cy="3566160"/>
+            <a:off x="731520" y="3776472"/>
+            <a:ext cx="73152" cy="1691640"/>
           </a:xfrm>
           <a:prstGeom prst="rect">
             <a:avLst/>
@@ -6000,7 +6406,7 @@
         </p:nvSpPr>
         <p:spPr>
           <a:xfrm>
-            <a:off x="3085185" y="2139696"/>
+            <a:off x="932688" y="3995928"/>
             <a:ext cx="438912" cy="438912"/>
           </a:xfrm>
           <a:prstGeom prst="roundRect">
@@ -6045,7 +6451,7 @@
         </p:nvSpPr>
         <p:spPr>
           <a:xfrm>
-            <a:off x="3085185" y="2148840"/>
+            <a:off x="932688" y="4005072"/>
             <a:ext cx="438912" cy="420624"/>
           </a:xfrm>
           <a:prstGeom prst="rect">
@@ -6080,8 +6486,8 @@
         </p:nvSpPr>
         <p:spPr>
           <a:xfrm>
-            <a:off x="3688689" y="2103120"/>
-            <a:ext cx="1009497" cy="329184"/>
+            <a:off x="1536192" y="3959352"/>
+            <a:ext cx="9710928" cy="329184"/>
           </a:xfrm>
           <a:prstGeom prst="rect">
             <a:avLst/>
@@ -6102,7 +6508,7 @@
                 </a:solidFill>
                 <a:latin typeface="Arial"/>
               </a:rPr>
-              <a:t>Ground</a:t>
+              <a:t>Decision pressure</a:t>
             </a:r>
           </a:p>
         </p:txBody>
@@ -6115,8 +6521,8 @@
         </p:nvSpPr>
         <p:spPr>
           <a:xfrm>
-            <a:off x="3688689" y="2487168"/>
-            <a:ext cx="1009497" cy="2852928"/>
+            <a:off x="1536192" y="4343400"/>
+            <a:ext cx="9710928" cy="978408"/>
           </a:xfrm>
           <a:prstGeom prst="rect">
             <a:avLst/>
@@ -6137,727 +6543,7 @@
                 </a:solidFill>
                 <a:latin typeface="Arial"/>
               </a:rPr>
-              <a:t>Attach only approved sources and verified insights.</a:t>
-            </a:r>
-          </a:p>
-        </p:txBody>
-      </p:sp>
-      <p:sp>
-        <p:nvSpPr>
-          <p:cNvPr id="20" name="Rounded Rectangle 19"/>
-          <p:cNvSpPr/>
-          <p:nvPr/>
-        </p:nvSpPr>
-        <p:spPr>
-          <a:xfrm>
-            <a:off x="5082235" y="1920240"/>
-            <a:ext cx="1997049" cy="3566160"/>
-          </a:xfrm>
-          <a:prstGeom prst="roundRect">
-            <a:avLst/>
-          </a:prstGeom>
-          <a:solidFill>
-            <a:srgbClr val="F5F8FC"/>
-          </a:solidFill>
-          <a:ln>
-            <a:solidFill>
-              <a:srgbClr val="E2E8F0"/>
-            </a:solidFill>
-          </a:ln>
-        </p:spPr>
-        <p:style>
-          <a:lnRef idx="1">
-            <a:schemeClr val="accent1"/>
-          </a:lnRef>
-          <a:fillRef idx="3">
-            <a:schemeClr val="accent1"/>
-          </a:fillRef>
-          <a:effectRef idx="2">
-            <a:schemeClr val="accent1"/>
-          </a:effectRef>
-          <a:fontRef idx="minor">
-            <a:schemeClr val="lt1"/>
-          </a:fontRef>
-        </p:style>
-        <p:txBody>
-          <a:bodyPr rtlCol="0" anchor="ctr"/>
-          <a:lstStyle/>
-          <a:p>
-            <a:pPr algn="ctr"/>
-          </a:p>
-        </p:txBody>
-      </p:sp>
-      <p:sp>
-        <p:nvSpPr>
-          <p:cNvPr id="21" name="Rectangle 20"/>
-          <p:cNvSpPr/>
-          <p:nvPr/>
-        </p:nvSpPr>
-        <p:spPr>
-          <a:xfrm>
-            <a:off x="5082235" y="1920240"/>
-            <a:ext cx="73152" cy="3566160"/>
-          </a:xfrm>
-          <a:prstGeom prst="rect">
-            <a:avLst/>
-          </a:prstGeom>
-          <a:solidFill>
-            <a:srgbClr val="7C3AED"/>
-          </a:solidFill>
-          <a:ln>
-            <a:solidFill>
-              <a:srgbClr val="7C3AED"/>
-            </a:solidFill>
-          </a:ln>
-        </p:spPr>
-        <p:style>
-          <a:lnRef idx="1">
-            <a:schemeClr val="accent1"/>
-          </a:lnRef>
-          <a:fillRef idx="3">
-            <a:schemeClr val="accent1"/>
-          </a:fillRef>
-          <a:effectRef idx="2">
-            <a:schemeClr val="accent1"/>
-          </a:effectRef>
-          <a:fontRef idx="minor">
-            <a:schemeClr val="lt1"/>
-          </a:fontRef>
-        </p:style>
-        <p:txBody>
-          <a:bodyPr rtlCol="0" anchor="ctr"/>
-          <a:lstStyle/>
-          <a:p>
-            <a:pPr algn="ctr"/>
-          </a:p>
-        </p:txBody>
-      </p:sp>
-      <p:sp>
-        <p:nvSpPr>
-          <p:cNvPr id="22" name="Rounded Rectangle 21"/>
-          <p:cNvSpPr/>
-          <p:nvPr/>
-        </p:nvSpPr>
-        <p:spPr>
-          <a:xfrm>
-            <a:off x="5283403" y="2139696"/>
-            <a:ext cx="438912" cy="438912"/>
-          </a:xfrm>
-          <a:prstGeom prst="roundRect">
-            <a:avLst/>
-          </a:prstGeom>
-          <a:solidFill>
-            <a:srgbClr val="7C3AED"/>
-          </a:solidFill>
-          <a:ln>
-            <a:solidFill>
-              <a:srgbClr val="7C3AED"/>
-            </a:solidFill>
-          </a:ln>
-        </p:spPr>
-        <p:style>
-          <a:lnRef idx="1">
-            <a:schemeClr val="accent1"/>
-          </a:lnRef>
-          <a:fillRef idx="3">
-            <a:schemeClr val="accent1"/>
-          </a:fillRef>
-          <a:effectRef idx="2">
-            <a:schemeClr val="accent1"/>
-          </a:effectRef>
-          <a:fontRef idx="minor">
-            <a:schemeClr val="lt1"/>
-          </a:fontRef>
-        </p:style>
-        <p:txBody>
-          <a:bodyPr rtlCol="0" anchor="ctr"/>
-          <a:lstStyle/>
-          <a:p>
-            <a:pPr algn="ctr"/>
-          </a:p>
-        </p:txBody>
-      </p:sp>
-      <p:sp>
-        <p:nvSpPr>
-          <p:cNvPr id="23" name="TextBox 22"/>
-          <p:cNvSpPr txBox="1"/>
-          <p:nvPr/>
-        </p:nvSpPr>
-        <p:spPr>
-          <a:xfrm>
-            <a:off x="5283403" y="2148840"/>
-            <a:ext cx="438912" cy="420624"/>
-          </a:xfrm>
-          <a:prstGeom prst="rect">
-            <a:avLst/>
-          </a:prstGeom>
-          <a:noFill/>
-        </p:spPr>
-        <p:txBody>
-          <a:bodyPr wrap="square" anchor="ctr">
-            <a:spAutoFit/>
-          </a:bodyPr>
-          <a:lstStyle/>
-          <a:p>
-            <a:pPr algn="ctr"/>
-            <a:r>
-              <a:rPr sz="1400" b="1">
-                <a:solidFill>
-                  <a:srgbClr val="FFFFFF"/>
-                </a:solidFill>
-                <a:latin typeface="Arial"/>
-              </a:rPr>
-              <a:t>3</a:t>
-            </a:r>
-          </a:p>
-        </p:txBody>
-      </p:sp>
-      <p:sp>
-        <p:nvSpPr>
-          <p:cNvPr id="24" name="TextBox 23"/>
-          <p:cNvSpPr txBox="1"/>
-          <p:nvPr/>
-        </p:nvSpPr>
-        <p:spPr>
-          <a:xfrm>
-            <a:off x="5886907" y="2103120"/>
-            <a:ext cx="1009497" cy="329184"/>
-          </a:xfrm>
-          <a:prstGeom prst="rect">
-            <a:avLst/>
-          </a:prstGeom>
-          <a:noFill/>
-        </p:spPr>
-        <p:txBody>
-          <a:bodyPr wrap="square" anchor="t">
-            <a:spAutoFit/>
-          </a:bodyPr>
-          <a:lstStyle/>
-          <a:p>
-            <a:pPr algn="l"/>
-            <a:r>
-              <a:rPr sz="1400" b="1">
-                <a:solidFill>
-                  <a:srgbClr val="7C3AED"/>
-                </a:solidFill>
-                <a:latin typeface="Arial"/>
-              </a:rPr>
-              <a:t>Specify</a:t>
-            </a:r>
-          </a:p>
-        </p:txBody>
-      </p:sp>
-      <p:sp>
-        <p:nvSpPr>
-          <p:cNvPr id="25" name="TextBox 24"/>
-          <p:cNvSpPr txBox="1"/>
-          <p:nvPr/>
-        </p:nvSpPr>
-        <p:spPr>
-          <a:xfrm>
-            <a:off x="5886907" y="2487168"/>
-            <a:ext cx="1009497" cy="2852928"/>
-          </a:xfrm>
-          <a:prstGeom prst="rect">
-            <a:avLst/>
-          </a:prstGeom>
-          <a:noFill/>
-        </p:spPr>
-        <p:txBody>
-          <a:bodyPr wrap="square" anchor="t">
-            <a:spAutoFit/>
-          </a:bodyPr>
-          <a:lstStyle/>
-          <a:p>
-            <a:pPr algn="l"/>
-            <a:r>
-              <a:rPr sz="1150" b="0">
-                <a:solidFill>
-                  <a:srgbClr val="161B26"/>
-                </a:solidFill>
-                <a:latin typeface="Arial"/>
-              </a:rPr>
-              <a:t>Name hierarchy, infographic form, brand and accessibility rules.</a:t>
-            </a:r>
-          </a:p>
-        </p:txBody>
-      </p:sp>
-      <p:sp>
-        <p:nvSpPr>
-          <p:cNvPr id="26" name="Rounded Rectangle 25"/>
-          <p:cNvSpPr/>
-          <p:nvPr/>
-        </p:nvSpPr>
-        <p:spPr>
-          <a:xfrm>
-            <a:off x="7280452" y="1920240"/>
-            <a:ext cx="1997049" cy="3566160"/>
-          </a:xfrm>
-          <a:prstGeom prst="roundRect">
-            <a:avLst/>
-          </a:prstGeom>
-          <a:solidFill>
-            <a:srgbClr val="F5F8FC"/>
-          </a:solidFill>
-          <a:ln>
-            <a:solidFill>
-              <a:srgbClr val="E2E8F0"/>
-            </a:solidFill>
-          </a:ln>
-        </p:spPr>
-        <p:style>
-          <a:lnRef idx="1">
-            <a:schemeClr val="accent1"/>
-          </a:lnRef>
-          <a:fillRef idx="3">
-            <a:schemeClr val="accent1"/>
-          </a:fillRef>
-          <a:effectRef idx="2">
-            <a:schemeClr val="accent1"/>
-          </a:effectRef>
-          <a:fontRef idx="minor">
-            <a:schemeClr val="lt1"/>
-          </a:fontRef>
-        </p:style>
-        <p:txBody>
-          <a:bodyPr rtlCol="0" anchor="ctr"/>
-          <a:lstStyle/>
-          <a:p>
-            <a:pPr algn="ctr"/>
-          </a:p>
-        </p:txBody>
-      </p:sp>
-      <p:sp>
-        <p:nvSpPr>
-          <p:cNvPr id="27" name="Rectangle 26"/>
-          <p:cNvSpPr/>
-          <p:nvPr/>
-        </p:nvSpPr>
-        <p:spPr>
-          <a:xfrm>
-            <a:off x="7280452" y="1920240"/>
-            <a:ext cx="73152" cy="3566160"/>
-          </a:xfrm>
-          <a:prstGeom prst="rect">
-            <a:avLst/>
-          </a:prstGeom>
-          <a:solidFill>
-            <a:srgbClr val="F59E0B"/>
-          </a:solidFill>
-          <a:ln>
-            <a:solidFill>
-              <a:srgbClr val="F59E0B"/>
-            </a:solidFill>
-          </a:ln>
-        </p:spPr>
-        <p:style>
-          <a:lnRef idx="1">
-            <a:schemeClr val="accent1"/>
-          </a:lnRef>
-          <a:fillRef idx="3">
-            <a:schemeClr val="accent1"/>
-          </a:fillRef>
-          <a:effectRef idx="2">
-            <a:schemeClr val="accent1"/>
-          </a:effectRef>
-          <a:fontRef idx="minor">
-            <a:schemeClr val="lt1"/>
-          </a:fontRef>
-        </p:style>
-        <p:txBody>
-          <a:bodyPr rtlCol="0" anchor="ctr"/>
-          <a:lstStyle/>
-          <a:p>
-            <a:pPr algn="ctr"/>
-          </a:p>
-        </p:txBody>
-      </p:sp>
-      <p:sp>
-        <p:nvSpPr>
-          <p:cNvPr id="28" name="Rounded Rectangle 27"/>
-          <p:cNvSpPr/>
-          <p:nvPr/>
-        </p:nvSpPr>
-        <p:spPr>
-          <a:xfrm>
-            <a:off x="7481620" y="2139696"/>
-            <a:ext cx="438912" cy="438912"/>
-          </a:xfrm>
-          <a:prstGeom prst="roundRect">
-            <a:avLst/>
-          </a:prstGeom>
-          <a:solidFill>
-            <a:srgbClr val="F59E0B"/>
-          </a:solidFill>
-          <a:ln>
-            <a:solidFill>
-              <a:srgbClr val="F59E0B"/>
-            </a:solidFill>
-          </a:ln>
-        </p:spPr>
-        <p:style>
-          <a:lnRef idx="1">
-            <a:schemeClr val="accent1"/>
-          </a:lnRef>
-          <a:fillRef idx="3">
-            <a:schemeClr val="accent1"/>
-          </a:fillRef>
-          <a:effectRef idx="2">
-            <a:schemeClr val="accent1"/>
-          </a:effectRef>
-          <a:fontRef idx="minor">
-            <a:schemeClr val="lt1"/>
-          </a:fontRef>
-        </p:style>
-        <p:txBody>
-          <a:bodyPr rtlCol="0" anchor="ctr"/>
-          <a:lstStyle/>
-          <a:p>
-            <a:pPr algn="ctr"/>
-          </a:p>
-        </p:txBody>
-      </p:sp>
-      <p:sp>
-        <p:nvSpPr>
-          <p:cNvPr id="29" name="TextBox 28"/>
-          <p:cNvSpPr txBox="1"/>
-          <p:nvPr/>
-        </p:nvSpPr>
-        <p:spPr>
-          <a:xfrm>
-            <a:off x="7481620" y="2148840"/>
-            <a:ext cx="438912" cy="420624"/>
-          </a:xfrm>
-          <a:prstGeom prst="rect">
-            <a:avLst/>
-          </a:prstGeom>
-          <a:noFill/>
-        </p:spPr>
-        <p:txBody>
-          <a:bodyPr wrap="square" anchor="ctr">
-            <a:spAutoFit/>
-          </a:bodyPr>
-          <a:lstStyle/>
-          <a:p>
-            <a:pPr algn="ctr"/>
-            <a:r>
-              <a:rPr sz="1400" b="1">
-                <a:solidFill>
-                  <a:srgbClr val="FFFFFF"/>
-                </a:solidFill>
-                <a:latin typeface="Arial"/>
-              </a:rPr>
-              <a:t>4</a:t>
-            </a:r>
-          </a:p>
-        </p:txBody>
-      </p:sp>
-      <p:sp>
-        <p:nvSpPr>
-          <p:cNvPr id="30" name="TextBox 29"/>
-          <p:cNvSpPr txBox="1"/>
-          <p:nvPr/>
-        </p:nvSpPr>
-        <p:spPr>
-          <a:xfrm>
-            <a:off x="8085124" y="2103120"/>
-            <a:ext cx="1009497" cy="329184"/>
-          </a:xfrm>
-          <a:prstGeom prst="rect">
-            <a:avLst/>
-          </a:prstGeom>
-          <a:noFill/>
-        </p:spPr>
-        <p:txBody>
-          <a:bodyPr wrap="square" anchor="t">
-            <a:spAutoFit/>
-          </a:bodyPr>
-          <a:lstStyle/>
-          <a:p>
-            <a:pPr algn="l"/>
-            <a:r>
-              <a:rPr sz="1400" b="1">
-                <a:solidFill>
-                  <a:srgbClr val="F59E0B"/>
-                </a:solidFill>
-                <a:latin typeface="Arial"/>
-              </a:rPr>
-              <a:t>Constrain</a:t>
-            </a:r>
-          </a:p>
-        </p:txBody>
-      </p:sp>
-      <p:sp>
-        <p:nvSpPr>
-          <p:cNvPr id="31" name="TextBox 30"/>
-          <p:cNvSpPr txBox="1"/>
-          <p:nvPr/>
-        </p:nvSpPr>
-        <p:spPr>
-          <a:xfrm>
-            <a:off x="8085124" y="2487168"/>
-            <a:ext cx="1009497" cy="2852928"/>
-          </a:xfrm>
-          <a:prstGeom prst="rect">
-            <a:avLst/>
-          </a:prstGeom>
-          <a:noFill/>
-        </p:spPr>
-        <p:txBody>
-          <a:bodyPr wrap="square" anchor="t">
-            <a:spAutoFit/>
-          </a:bodyPr>
-          <a:lstStyle/>
-          <a:p>
-            <a:pPr algn="l"/>
-            <a:r>
-              <a:rPr sz="1150" b="0">
-                <a:solidFill>
-                  <a:srgbClr val="161B26"/>
-                </a:solidFill>
-                <a:latin typeface="Arial"/>
-              </a:rPr>
-              <a:t>Forbid invented facts, unsupported causation and decorative clutter.</a:t>
-            </a:r>
-          </a:p>
-        </p:txBody>
-      </p:sp>
-      <p:sp>
-        <p:nvSpPr>
-          <p:cNvPr id="32" name="Rounded Rectangle 31"/>
-          <p:cNvSpPr/>
-          <p:nvPr/>
-        </p:nvSpPr>
-        <p:spPr>
-          <a:xfrm>
-            <a:off x="9478670" y="1920240"/>
-            <a:ext cx="1997049" cy="3566160"/>
-          </a:xfrm>
-          <a:prstGeom prst="roundRect">
-            <a:avLst/>
-          </a:prstGeom>
-          <a:solidFill>
-            <a:srgbClr val="F5F8FC"/>
-          </a:solidFill>
-          <a:ln>
-            <a:solidFill>
-              <a:srgbClr val="E2E8F0"/>
-            </a:solidFill>
-          </a:ln>
-        </p:spPr>
-        <p:style>
-          <a:lnRef idx="1">
-            <a:schemeClr val="accent1"/>
-          </a:lnRef>
-          <a:fillRef idx="3">
-            <a:schemeClr val="accent1"/>
-          </a:fillRef>
-          <a:effectRef idx="2">
-            <a:schemeClr val="accent1"/>
-          </a:effectRef>
-          <a:fontRef idx="minor">
-            <a:schemeClr val="lt1"/>
-          </a:fontRef>
-        </p:style>
-        <p:txBody>
-          <a:bodyPr rtlCol="0" anchor="ctr"/>
-          <a:lstStyle/>
-          <a:p>
-            <a:pPr algn="ctr"/>
-          </a:p>
-        </p:txBody>
-      </p:sp>
-      <p:sp>
-        <p:nvSpPr>
-          <p:cNvPr id="33" name="Rectangle 32"/>
-          <p:cNvSpPr/>
-          <p:nvPr/>
-        </p:nvSpPr>
-        <p:spPr>
-          <a:xfrm>
-            <a:off x="9478670" y="1920240"/>
-            <a:ext cx="73152" cy="3566160"/>
-          </a:xfrm>
-          <a:prstGeom prst="rect">
-            <a:avLst/>
-          </a:prstGeom>
-          <a:solidFill>
-            <a:srgbClr val="1F6FEB"/>
-          </a:solidFill>
-          <a:ln>
-            <a:solidFill>
-              <a:srgbClr val="1F6FEB"/>
-            </a:solidFill>
-          </a:ln>
-        </p:spPr>
-        <p:style>
-          <a:lnRef idx="1">
-            <a:schemeClr val="accent1"/>
-          </a:lnRef>
-          <a:fillRef idx="3">
-            <a:schemeClr val="accent1"/>
-          </a:fillRef>
-          <a:effectRef idx="2">
-            <a:schemeClr val="accent1"/>
-          </a:effectRef>
-          <a:fontRef idx="minor">
-            <a:schemeClr val="lt1"/>
-          </a:fontRef>
-        </p:style>
-        <p:txBody>
-          <a:bodyPr rtlCol="0" anchor="ctr"/>
-          <a:lstStyle/>
-          <a:p>
-            <a:pPr algn="ctr"/>
-          </a:p>
-        </p:txBody>
-      </p:sp>
-      <p:sp>
-        <p:nvSpPr>
-          <p:cNvPr id="34" name="Rounded Rectangle 33"/>
-          <p:cNvSpPr/>
-          <p:nvPr/>
-        </p:nvSpPr>
-        <p:spPr>
-          <a:xfrm>
-            <a:off x="9679838" y="2139696"/>
-            <a:ext cx="438912" cy="438912"/>
-          </a:xfrm>
-          <a:prstGeom prst="roundRect">
-            <a:avLst/>
-          </a:prstGeom>
-          <a:solidFill>
-            <a:srgbClr val="1F6FEB"/>
-          </a:solidFill>
-          <a:ln>
-            <a:solidFill>
-              <a:srgbClr val="1F6FEB"/>
-            </a:solidFill>
-          </a:ln>
-        </p:spPr>
-        <p:style>
-          <a:lnRef idx="1">
-            <a:schemeClr val="accent1"/>
-          </a:lnRef>
-          <a:fillRef idx="3">
-            <a:schemeClr val="accent1"/>
-          </a:fillRef>
-          <a:effectRef idx="2">
-            <a:schemeClr val="accent1"/>
-          </a:effectRef>
-          <a:fontRef idx="minor">
-            <a:schemeClr val="lt1"/>
-          </a:fontRef>
-        </p:style>
-        <p:txBody>
-          <a:bodyPr rtlCol="0" anchor="ctr"/>
-          <a:lstStyle/>
-          <a:p>
-            <a:pPr algn="ctr"/>
-          </a:p>
-        </p:txBody>
-      </p:sp>
-      <p:sp>
-        <p:nvSpPr>
-          <p:cNvPr id="35" name="TextBox 34"/>
-          <p:cNvSpPr txBox="1"/>
-          <p:nvPr/>
-        </p:nvSpPr>
-        <p:spPr>
-          <a:xfrm>
-            <a:off x="9679838" y="2148840"/>
-            <a:ext cx="438912" cy="420624"/>
-          </a:xfrm>
-          <a:prstGeom prst="rect">
-            <a:avLst/>
-          </a:prstGeom>
-          <a:noFill/>
-        </p:spPr>
-        <p:txBody>
-          <a:bodyPr wrap="square" anchor="ctr">
-            <a:spAutoFit/>
-          </a:bodyPr>
-          <a:lstStyle/>
-          <a:p>
-            <a:pPr algn="ctr"/>
-            <a:r>
-              <a:rPr sz="1400" b="1">
-                <a:solidFill>
-                  <a:srgbClr val="FFFFFF"/>
-                </a:solidFill>
-                <a:latin typeface="Arial"/>
-              </a:rPr>
-              <a:t>5</a:t>
-            </a:r>
-          </a:p>
-        </p:txBody>
-      </p:sp>
-      <p:sp>
-        <p:nvSpPr>
-          <p:cNvPr id="36" name="TextBox 35"/>
-          <p:cNvSpPr txBox="1"/>
-          <p:nvPr/>
-        </p:nvSpPr>
-        <p:spPr>
-          <a:xfrm>
-            <a:off x="10283342" y="2103120"/>
-            <a:ext cx="1009497" cy="329184"/>
-          </a:xfrm>
-          <a:prstGeom prst="rect">
-            <a:avLst/>
-          </a:prstGeom>
-          <a:noFill/>
-        </p:spPr>
-        <p:txBody>
-          <a:bodyPr wrap="square" anchor="t">
-            <a:spAutoFit/>
-          </a:bodyPr>
-          <a:lstStyle/>
-          <a:p>
-            <a:pPr algn="l"/>
-            <a:r>
-              <a:rPr sz="1400" b="1">
-                <a:solidFill>
-                  <a:srgbClr val="1F6FEB"/>
-                </a:solidFill>
-                <a:latin typeface="Arial"/>
-              </a:rPr>
-              <a:t>Generate</a:t>
-            </a:r>
-          </a:p>
-        </p:txBody>
-      </p:sp>
-      <p:sp>
-        <p:nvSpPr>
-          <p:cNvPr id="37" name="TextBox 36"/>
-          <p:cNvSpPr txBox="1"/>
-          <p:nvPr/>
-        </p:nvSpPr>
-        <p:spPr>
-          <a:xfrm>
-            <a:off x="10283342" y="2487168"/>
-            <a:ext cx="1009497" cy="2852928"/>
-          </a:xfrm>
-          <a:prstGeom prst="rect">
-            <a:avLst/>
-          </a:prstGeom>
-          <a:noFill/>
-        </p:spPr>
-        <p:txBody>
-          <a:bodyPr wrap="square" anchor="t">
-            <a:spAutoFit/>
-          </a:bodyPr>
-          <a:lstStyle/>
-          <a:p>
-            <a:pPr algn="l"/>
-            <a:r>
-              <a:rPr sz="1150" b="0">
-                <a:solidFill>
-                  <a:srgbClr val="161B26"/>
-                </a:solidFill>
-                <a:latin typeface="Arial"/>
-              </a:rPr>
-              <a:t>Request two wireframe directions, then select by evidence fit.</a:t>
+              <a:t>Use the supplied structured prompt workbook to ask Microsoft 365 Copilot for two comparison-infographic directions. Select one by evidence fit, then preserve it as the control brief for PowerPoint.</a:t>
             </a:r>
           </a:p>
         </p:txBody>
@@ -6940,11 +6626,11 @@
             <a:avLst/>
           </a:prstGeom>
           <a:solidFill>
-            <a:srgbClr val="7C3AED"/>
+            <a:srgbClr val="10B981"/>
           </a:solidFill>
           <a:ln>
             <a:solidFill>
-              <a:srgbClr val="7C3AED"/>
+              <a:srgbClr val="10B981"/>
             </a:solidFill>
           </a:ln>
         </p:spPr>
@@ -6996,11 +6682,11 @@
             <a:r>
               <a:rPr sz="1100" b="1">
                 <a:solidFill>
-                  <a:srgbClr val="7C3AED"/>
+                  <a:srgbClr val="10B981"/>
                 </a:solidFill>
                 <a:latin typeface="Arial"/>
               </a:rPr>
-              <a:t>ACTIVITY 02 · EXAMPLE</a:t>
+              <a:t>ACTIVITY 02 · FRAMEWORK</a:t>
             </a:r>
           </a:p>
         </p:txBody>
@@ -7035,7 +6721,7 @@
                 </a:solidFill>
                 <a:latin typeface="Arial"/>
               </a:rPr>
-              <a:t>Worked Output</a:t>
+              <a:t>Brief Before Generation</a:t>
             </a:r>
           </a:p>
         </p:txBody>
@@ -7128,8 +6814,8 @@
         </p:nvSpPr>
         <p:spPr>
           <a:xfrm>
-            <a:off x="731520" y="1783080"/>
-            <a:ext cx="3401568" cy="1719072"/>
+            <a:off x="685800" y="1920240"/>
+            <a:ext cx="1997049" cy="3566160"/>
           </a:xfrm>
           <a:prstGeom prst="roundRect">
             <a:avLst/>
@@ -7173,8 +6859,8 @@
         </p:nvSpPr>
         <p:spPr>
           <a:xfrm>
-            <a:off x="731520" y="1783080"/>
-            <a:ext cx="73152" cy="1719072"/>
+            <a:off x="685800" y="1920240"/>
+            <a:ext cx="73152" cy="3566160"/>
           </a:xfrm>
           <a:prstGeom prst="rect">
             <a:avLst/>
@@ -7218,7 +6904,7 @@
         </p:nvSpPr>
         <p:spPr>
           <a:xfrm>
-            <a:off x="932688" y="2002536"/>
+            <a:off x="886968" y="2139696"/>
             <a:ext cx="438912" cy="438912"/>
           </a:xfrm>
           <a:prstGeom prst="roundRect">
@@ -7263,7 +6949,7 @@
         </p:nvSpPr>
         <p:spPr>
           <a:xfrm>
-            <a:off x="932688" y="2011680"/>
+            <a:off x="886968" y="2148840"/>
             <a:ext cx="438912" cy="420624"/>
           </a:xfrm>
           <a:prstGeom prst="rect">
@@ -7298,8 +6984,8 @@
         </p:nvSpPr>
         <p:spPr>
           <a:xfrm>
-            <a:off x="1536192" y="1965960"/>
-            <a:ext cx="2414016" cy="329184"/>
+            <a:off x="1490472" y="2103120"/>
+            <a:ext cx="1009497" cy="329184"/>
           </a:xfrm>
           <a:prstGeom prst="rect">
             <a:avLst/>
@@ -7320,7 +7006,7 @@
                 </a:solidFill>
                 <a:latin typeface="Arial"/>
               </a:rPr>
-              <a:t>Hook</a:t>
+              <a:t>Define</a:t>
             </a:r>
           </a:p>
         </p:txBody>
@@ -7333,8 +7019,8 @@
         </p:nvSpPr>
         <p:spPr>
           <a:xfrm>
-            <a:off x="1536192" y="2350008"/>
-            <a:ext cx="2414016" cy="1005839"/>
+            <a:off x="1490472" y="2487168"/>
+            <a:ext cx="1009497" cy="2852928"/>
           </a:xfrm>
           <a:prstGeom prst="rect">
             <a:avLst/>
@@ -7355,7 +7041,7 @@
                 </a:solidFill>
                 <a:latin typeface="Arial"/>
               </a:rPr>
-              <a:t>Title states the audience-relevant message.</a:t>
+              <a:t>Write the objective and audience question.</a:t>
             </a:r>
           </a:p>
         </p:txBody>
@@ -7368,8 +7054,8 @@
         </p:nvSpPr>
         <p:spPr>
           <a:xfrm>
-            <a:off x="4315968" y="1783080"/>
-            <a:ext cx="3401568" cy="1719072"/>
+            <a:off x="2884017" y="1920240"/>
+            <a:ext cx="1997049" cy="3566160"/>
           </a:xfrm>
           <a:prstGeom prst="roundRect">
             <a:avLst/>
@@ -7413,8 +7099,8 @@
         </p:nvSpPr>
         <p:spPr>
           <a:xfrm>
-            <a:off x="4315968" y="1783080"/>
-            <a:ext cx="73152" cy="1719072"/>
+            <a:off x="2884017" y="1920240"/>
+            <a:ext cx="73152" cy="3566160"/>
           </a:xfrm>
           <a:prstGeom prst="rect">
             <a:avLst/>
@@ -7458,7 +7144,7 @@
         </p:nvSpPr>
         <p:spPr>
           <a:xfrm>
-            <a:off x="4517136" y="2002536"/>
+            <a:off x="3085185" y="2139696"/>
             <a:ext cx="438912" cy="438912"/>
           </a:xfrm>
           <a:prstGeom prst="roundRect">
@@ -7503,7 +7189,7 @@
         </p:nvSpPr>
         <p:spPr>
           <a:xfrm>
-            <a:off x="4517136" y="2011680"/>
+            <a:off x="3085185" y="2148840"/>
             <a:ext cx="438912" cy="420624"/>
           </a:xfrm>
           <a:prstGeom prst="rect">
@@ -7538,8 +7224,8 @@
         </p:nvSpPr>
         <p:spPr>
           <a:xfrm>
-            <a:off x="5120640" y="1965960"/>
-            <a:ext cx="2414016" cy="329184"/>
+            <a:off x="3688689" y="2103120"/>
+            <a:ext cx="1009497" cy="329184"/>
           </a:xfrm>
           <a:prstGeom prst="rect">
             <a:avLst/>
@@ -7560,7 +7246,7 @@
                 </a:solidFill>
                 <a:latin typeface="Arial"/>
               </a:rPr>
-              <a:t>Context</a:t>
+              <a:t>Ground</a:t>
             </a:r>
           </a:p>
         </p:txBody>
@@ -7573,8 +7259,8 @@
         </p:nvSpPr>
         <p:spPr>
           <a:xfrm>
-            <a:off x="5120640" y="2350008"/>
-            <a:ext cx="2414016" cy="1005839"/>
+            <a:off x="3688689" y="2487168"/>
+            <a:ext cx="1009497" cy="2852928"/>
           </a:xfrm>
           <a:prstGeom prst="rect">
             <a:avLst/>
@@ -7595,7 +7281,7 @@
                 </a:solidFill>
                 <a:latin typeface="Arial"/>
               </a:rPr>
-              <a:t>Source, timeframe, unit and scope.</a:t>
+              <a:t>Attach only approved sources and verified insights.</a:t>
             </a:r>
           </a:p>
         </p:txBody>
@@ -7608,8 +7294,8 @@
         </p:nvSpPr>
         <p:spPr>
           <a:xfrm>
-            <a:off x="7900416" y="1783080"/>
-            <a:ext cx="3401568" cy="1719072"/>
+            <a:off x="5082235" y="1920240"/>
+            <a:ext cx="1997049" cy="3566160"/>
           </a:xfrm>
           <a:prstGeom prst="roundRect">
             <a:avLst/>
@@ -7653,8 +7339,8 @@
         </p:nvSpPr>
         <p:spPr>
           <a:xfrm>
-            <a:off x="7900416" y="1783080"/>
-            <a:ext cx="73152" cy="1719072"/>
+            <a:off x="5082235" y="1920240"/>
+            <a:ext cx="73152" cy="3566160"/>
           </a:xfrm>
           <a:prstGeom prst="rect">
             <a:avLst/>
@@ -7698,7 +7384,7 @@
         </p:nvSpPr>
         <p:spPr>
           <a:xfrm>
-            <a:off x="8101584" y="2002536"/>
+            <a:off x="5283403" y="2139696"/>
             <a:ext cx="438912" cy="438912"/>
           </a:xfrm>
           <a:prstGeom prst="roundRect">
@@ -7743,7 +7429,7 @@
         </p:nvSpPr>
         <p:spPr>
           <a:xfrm>
-            <a:off x="8101584" y="2011680"/>
+            <a:off x="5283403" y="2148840"/>
             <a:ext cx="438912" cy="420624"/>
           </a:xfrm>
           <a:prstGeom prst="rect">
@@ -7778,8 +7464,8 @@
         </p:nvSpPr>
         <p:spPr>
           <a:xfrm>
-            <a:off x="8705088" y="1965960"/>
-            <a:ext cx="2414016" cy="329184"/>
+            <a:off x="5886907" y="2103120"/>
+            <a:ext cx="1009497" cy="329184"/>
           </a:xfrm>
           <a:prstGeom prst="rect">
             <a:avLst/>
@@ -7800,7 +7486,7 @@
                 </a:solidFill>
                 <a:latin typeface="Arial"/>
               </a:rPr>
-              <a:t>Evidence</a:t>
+              <a:t>Specify</a:t>
             </a:r>
           </a:p>
         </p:txBody>
@@ -7813,8 +7499,8 @@
         </p:nvSpPr>
         <p:spPr>
           <a:xfrm>
-            <a:off x="8705088" y="2350008"/>
-            <a:ext cx="2414016" cy="1005839"/>
+            <a:off x="5886907" y="2487168"/>
+            <a:ext cx="1009497" cy="2852928"/>
           </a:xfrm>
           <a:prstGeom prst="rect">
             <a:avLst/>
@@ -7835,7 +7521,7 @@
                 </a:solidFill>
                 <a:latin typeface="Arial"/>
               </a:rPr>
-              <a:t>One primary chart or process carries the proof.</a:t>
+              <a:t>Name hierarchy, infographic form, brand and accessibility rules.</a:t>
             </a:r>
           </a:p>
         </p:txBody>
@@ -7848,8 +7534,8 @@
         </p:nvSpPr>
         <p:spPr>
           <a:xfrm>
-            <a:off x="731520" y="3776472"/>
-            <a:ext cx="3401568" cy="1719072"/>
+            <a:off x="7280452" y="1920240"/>
+            <a:ext cx="1997049" cy="3566160"/>
           </a:xfrm>
           <a:prstGeom prst="roundRect">
             <a:avLst/>
@@ -7893,8 +7579,8 @@
         </p:nvSpPr>
         <p:spPr>
           <a:xfrm>
-            <a:off x="731520" y="3776472"/>
-            <a:ext cx="73152" cy="1719072"/>
+            <a:off x="7280452" y="1920240"/>
+            <a:ext cx="73152" cy="3566160"/>
           </a:xfrm>
           <a:prstGeom prst="rect">
             <a:avLst/>
@@ -7938,7 +7624,7 @@
         </p:nvSpPr>
         <p:spPr>
           <a:xfrm>
-            <a:off x="932688" y="3995928"/>
+            <a:off x="7481620" y="2139696"/>
             <a:ext cx="438912" cy="438912"/>
           </a:xfrm>
           <a:prstGeom prst="roundRect">
@@ -7983,7 +7669,7 @@
         </p:nvSpPr>
         <p:spPr>
           <a:xfrm>
-            <a:off x="932688" y="4005072"/>
+            <a:off x="7481620" y="2148840"/>
             <a:ext cx="438912" cy="420624"/>
           </a:xfrm>
           <a:prstGeom prst="rect">
@@ -8018,8 +7704,8 @@
         </p:nvSpPr>
         <p:spPr>
           <a:xfrm>
-            <a:off x="1536192" y="3959352"/>
-            <a:ext cx="2414016" cy="329184"/>
+            <a:off x="8085124" y="2103120"/>
+            <a:ext cx="1009497" cy="329184"/>
           </a:xfrm>
           <a:prstGeom prst="rect">
             <a:avLst/>
@@ -8040,7 +7726,7 @@
                 </a:solidFill>
                 <a:latin typeface="Arial"/>
               </a:rPr>
-              <a:t>Guidance</a:t>
+              <a:t>Constrain</a:t>
             </a:r>
           </a:p>
         </p:txBody>
@@ -8053,8 +7739,8 @@
         </p:nvSpPr>
         <p:spPr>
           <a:xfrm>
-            <a:off x="1536192" y="4343400"/>
-            <a:ext cx="2414016" cy="1005839"/>
+            <a:off x="8085124" y="2487168"/>
+            <a:ext cx="1009497" cy="2852928"/>
           </a:xfrm>
           <a:prstGeom prst="rect">
             <a:avLst/>
@@ -8075,7 +7761,7 @@
                 </a:solidFill>
                 <a:latin typeface="Arial"/>
               </a:rPr>
-              <a:t>Arrows, order and whitespace control the reading path.</a:t>
+              <a:t>Forbid invented facts, unsupported causation and decorative clutter.</a:t>
             </a:r>
           </a:p>
         </p:txBody>
@@ -8088,8 +7774,8 @@
         </p:nvSpPr>
         <p:spPr>
           <a:xfrm>
-            <a:off x="4315968" y="3776472"/>
-            <a:ext cx="3401568" cy="1719072"/>
+            <a:off x="9478670" y="1920240"/>
+            <a:ext cx="1997049" cy="3566160"/>
           </a:xfrm>
           <a:prstGeom prst="roundRect">
             <a:avLst/>
@@ -8133,8 +7819,8 @@
         </p:nvSpPr>
         <p:spPr>
           <a:xfrm>
-            <a:off x="4315968" y="3776472"/>
-            <a:ext cx="73152" cy="1719072"/>
+            <a:off x="9478670" y="1920240"/>
+            <a:ext cx="73152" cy="3566160"/>
           </a:xfrm>
           <a:prstGeom prst="rect">
             <a:avLst/>
@@ -8178,7 +7864,7 @@
         </p:nvSpPr>
         <p:spPr>
           <a:xfrm>
-            <a:off x="4517136" y="3995928"/>
+            <a:off x="9679838" y="2139696"/>
             <a:ext cx="438912" cy="438912"/>
           </a:xfrm>
           <a:prstGeom prst="roundRect">
@@ -8223,7 +7909,7 @@
         </p:nvSpPr>
         <p:spPr>
           <a:xfrm>
-            <a:off x="4517136" y="4005072"/>
+            <a:off x="9679838" y="2148840"/>
             <a:ext cx="438912" cy="420624"/>
           </a:xfrm>
           <a:prstGeom prst="rect">
@@ -8258,8 +7944,8 @@
         </p:nvSpPr>
         <p:spPr>
           <a:xfrm>
-            <a:off x="5120640" y="3959352"/>
-            <a:ext cx="2414016" cy="329184"/>
+            <a:off x="10283342" y="2103120"/>
+            <a:ext cx="1009497" cy="329184"/>
           </a:xfrm>
           <a:prstGeom prst="rect">
             <a:avLst/>
@@ -8280,7 +7966,7 @@
                 </a:solidFill>
                 <a:latin typeface="Arial"/>
               </a:rPr>
-              <a:t>Action</a:t>
+              <a:t>Generate</a:t>
             </a:r>
           </a:p>
         </p:txBody>
@@ -8293,8 +7979,8 @@
         </p:nvSpPr>
         <p:spPr>
           <a:xfrm>
-            <a:off x="5120640" y="4343400"/>
-            <a:ext cx="2414016" cy="1005839"/>
+            <a:off x="10283342" y="2487168"/>
+            <a:ext cx="1009497" cy="2852928"/>
           </a:xfrm>
           <a:prstGeom prst="rect">
             <a:avLst/>
@@ -8315,247 +8001,7 @@
                 </a:solidFill>
                 <a:latin typeface="Arial"/>
               </a:rPr>
-              <a:t>A concise implication or next step.</a:t>
-            </a:r>
-          </a:p>
-        </p:txBody>
-      </p:sp>
-      <p:sp>
-        <p:nvSpPr>
-          <p:cNvPr id="38" name="Rounded Rectangle 37"/>
-          <p:cNvSpPr/>
-          <p:nvPr/>
-        </p:nvSpPr>
-        <p:spPr>
-          <a:xfrm>
-            <a:off x="7900416" y="3776472"/>
-            <a:ext cx="3401568" cy="1719072"/>
-          </a:xfrm>
-          <a:prstGeom prst="roundRect">
-            <a:avLst/>
-          </a:prstGeom>
-          <a:solidFill>
-            <a:srgbClr val="F5F8FC"/>
-          </a:solidFill>
-          <a:ln>
-            <a:solidFill>
-              <a:srgbClr val="E2E8F0"/>
-            </a:solidFill>
-          </a:ln>
-        </p:spPr>
-        <p:style>
-          <a:lnRef idx="1">
-            <a:schemeClr val="accent1"/>
-          </a:lnRef>
-          <a:fillRef idx="3">
-            <a:schemeClr val="accent1"/>
-          </a:fillRef>
-          <a:effectRef idx="2">
-            <a:schemeClr val="accent1"/>
-          </a:effectRef>
-          <a:fontRef idx="minor">
-            <a:schemeClr val="lt1"/>
-          </a:fontRef>
-        </p:style>
-        <p:txBody>
-          <a:bodyPr rtlCol="0" anchor="ctr"/>
-          <a:lstStyle/>
-          <a:p>
-            <a:pPr algn="ctr"/>
-          </a:p>
-        </p:txBody>
-      </p:sp>
-      <p:sp>
-        <p:nvSpPr>
-          <p:cNvPr id="39" name="Rectangle 38"/>
-          <p:cNvSpPr/>
-          <p:nvPr/>
-        </p:nvSpPr>
-        <p:spPr>
-          <a:xfrm>
-            <a:off x="7900416" y="3776472"/>
-            <a:ext cx="73152" cy="1719072"/>
-          </a:xfrm>
-          <a:prstGeom prst="rect">
-            <a:avLst/>
-          </a:prstGeom>
-          <a:solidFill>
-            <a:srgbClr val="10B981"/>
-          </a:solidFill>
-          <a:ln>
-            <a:solidFill>
-              <a:srgbClr val="10B981"/>
-            </a:solidFill>
-          </a:ln>
-        </p:spPr>
-        <p:style>
-          <a:lnRef idx="1">
-            <a:schemeClr val="accent1"/>
-          </a:lnRef>
-          <a:fillRef idx="3">
-            <a:schemeClr val="accent1"/>
-          </a:fillRef>
-          <a:effectRef idx="2">
-            <a:schemeClr val="accent1"/>
-          </a:effectRef>
-          <a:fontRef idx="minor">
-            <a:schemeClr val="lt1"/>
-          </a:fontRef>
-        </p:style>
-        <p:txBody>
-          <a:bodyPr rtlCol="0" anchor="ctr"/>
-          <a:lstStyle/>
-          <a:p>
-            <a:pPr algn="ctr"/>
-          </a:p>
-        </p:txBody>
-      </p:sp>
-      <p:sp>
-        <p:nvSpPr>
-          <p:cNvPr id="40" name="Rounded Rectangle 39"/>
-          <p:cNvSpPr/>
-          <p:nvPr/>
-        </p:nvSpPr>
-        <p:spPr>
-          <a:xfrm>
-            <a:off x="8101584" y="3995928"/>
-            <a:ext cx="438912" cy="438912"/>
-          </a:xfrm>
-          <a:prstGeom prst="roundRect">
-            <a:avLst/>
-          </a:prstGeom>
-          <a:solidFill>
-            <a:srgbClr val="10B981"/>
-          </a:solidFill>
-          <a:ln>
-            <a:solidFill>
-              <a:srgbClr val="10B981"/>
-            </a:solidFill>
-          </a:ln>
-        </p:spPr>
-        <p:style>
-          <a:lnRef idx="1">
-            <a:schemeClr val="accent1"/>
-          </a:lnRef>
-          <a:fillRef idx="3">
-            <a:schemeClr val="accent1"/>
-          </a:fillRef>
-          <a:effectRef idx="2">
-            <a:schemeClr val="accent1"/>
-          </a:effectRef>
-          <a:fontRef idx="minor">
-            <a:schemeClr val="lt1"/>
-          </a:fontRef>
-        </p:style>
-        <p:txBody>
-          <a:bodyPr rtlCol="0" anchor="ctr"/>
-          <a:lstStyle/>
-          <a:p>
-            <a:pPr algn="ctr"/>
-          </a:p>
-        </p:txBody>
-      </p:sp>
-      <p:sp>
-        <p:nvSpPr>
-          <p:cNvPr id="41" name="TextBox 40"/>
-          <p:cNvSpPr txBox="1"/>
-          <p:nvPr/>
-        </p:nvSpPr>
-        <p:spPr>
-          <a:xfrm>
-            <a:off x="8101584" y="4005072"/>
-            <a:ext cx="438912" cy="420624"/>
-          </a:xfrm>
-          <a:prstGeom prst="rect">
-            <a:avLst/>
-          </a:prstGeom>
-          <a:noFill/>
-        </p:spPr>
-        <p:txBody>
-          <a:bodyPr wrap="square" anchor="ctr">
-            <a:spAutoFit/>
-          </a:bodyPr>
-          <a:lstStyle/>
-          <a:p>
-            <a:pPr algn="ctr"/>
-            <a:r>
-              <a:rPr sz="1400" b="1">
-                <a:solidFill>
-                  <a:srgbClr val="FFFFFF"/>
-                </a:solidFill>
-                <a:latin typeface="Arial"/>
-              </a:rPr>
-              <a:t>6</a:t>
-            </a:r>
-          </a:p>
-        </p:txBody>
-      </p:sp>
-      <p:sp>
-        <p:nvSpPr>
-          <p:cNvPr id="42" name="TextBox 41"/>
-          <p:cNvSpPr txBox="1"/>
-          <p:nvPr/>
-        </p:nvSpPr>
-        <p:spPr>
-          <a:xfrm>
-            <a:off x="8705088" y="3959352"/>
-            <a:ext cx="2414016" cy="329184"/>
-          </a:xfrm>
-          <a:prstGeom prst="rect">
-            <a:avLst/>
-          </a:prstGeom>
-          <a:noFill/>
-        </p:spPr>
-        <p:txBody>
-          <a:bodyPr wrap="square" anchor="t">
-            <a:spAutoFit/>
-          </a:bodyPr>
-          <a:lstStyle/>
-          <a:p>
-            <a:pPr algn="l"/>
-            <a:r>
-              <a:rPr sz="1400" b="1">
-                <a:solidFill>
-                  <a:srgbClr val="10B981"/>
-                </a:solidFill>
-                <a:latin typeface="Arial"/>
-              </a:rPr>
-              <a:t>Footer</a:t>
-            </a:r>
-          </a:p>
-        </p:txBody>
-      </p:sp>
-      <p:sp>
-        <p:nvSpPr>
-          <p:cNvPr id="43" name="TextBox 42"/>
-          <p:cNvSpPr txBox="1"/>
-          <p:nvPr/>
-        </p:nvSpPr>
-        <p:spPr>
-          <a:xfrm>
-            <a:off x="8705088" y="4343400"/>
-            <a:ext cx="2414016" cy="1005839"/>
-          </a:xfrm>
-          <a:prstGeom prst="rect">
-            <a:avLst/>
-          </a:prstGeom>
-          <a:noFill/>
-        </p:spPr>
-        <p:txBody>
-          <a:bodyPr wrap="square" anchor="t">
-            <a:spAutoFit/>
-          </a:bodyPr>
-          <a:lstStyle/>
-          <a:p>
-            <a:pPr algn="l"/>
-            <a:r>
-              <a:rPr sz="1150" b="0">
-                <a:solidFill>
-                  <a:srgbClr val="161B26"/>
-                </a:solidFill>
-                <a:latin typeface="Arial"/>
-              </a:rPr>
-              <a:t>Source, owner, date and accessibility notes.</a:t>
+              <a:t>Request two wireframe directions, then select by evidence fit.</a:t>
             </a:r>
           </a:p>
         </p:txBody>
@@ -8638,11 +8084,11 @@
             <a:avLst/>
           </a:prstGeom>
           <a:solidFill>
-            <a:srgbClr val="1F6FEB"/>
+            <a:srgbClr val="7C3AED"/>
           </a:solidFill>
           <a:ln>
             <a:solidFill>
-              <a:srgbClr val="1F6FEB"/>
+              <a:srgbClr val="7C3AED"/>
             </a:solidFill>
           </a:ln>
         </p:spPr>
@@ -8694,11 +8140,11 @@
             <a:r>
               <a:rPr sz="1100" b="1">
                 <a:solidFill>
-                  <a:srgbClr val="1F6FEB"/>
+                  <a:srgbClr val="7C3AED"/>
                 </a:solidFill>
                 <a:latin typeface="Arial"/>
               </a:rPr>
-              <a:t>ACTIVITY 02 · ACCEPTANCE</a:t>
+              <a:t>ACTIVITY 02 · EXAMPLE</a:t>
             </a:r>
           </a:p>
         </p:txBody>
@@ -8733,7 +8179,7 @@
                 </a:solidFill>
                 <a:latin typeface="Arial"/>
               </a:rPr>
-              <a:t>What Good Looks Like</a:t>
+              <a:t>Worked Output</a:t>
             </a:r>
           </a:p>
         </p:txBody>
@@ -8826,10 +8272,55 @@
         </p:nvSpPr>
         <p:spPr>
           <a:xfrm>
-            <a:off x="749808" y="1810512"/>
-            <a:ext cx="10652760" cy="1005840"/>
+            <a:off x="731520" y="1783080"/>
+            <a:ext cx="3401568" cy="1719072"/>
           </a:xfrm>
           <a:prstGeom prst="roundRect">
+            <a:avLst/>
+          </a:prstGeom>
+          <a:solidFill>
+            <a:srgbClr val="F5F8FC"/>
+          </a:solidFill>
+          <a:ln>
+            <a:solidFill>
+              <a:srgbClr val="E2E8F0"/>
+            </a:solidFill>
+          </a:ln>
+        </p:spPr>
+        <p:style>
+          <a:lnRef idx="1">
+            <a:schemeClr val="accent1"/>
+          </a:lnRef>
+          <a:fillRef idx="3">
+            <a:schemeClr val="accent1"/>
+          </a:fillRef>
+          <a:effectRef idx="2">
+            <a:schemeClr val="accent1"/>
+          </a:effectRef>
+          <a:fontRef idx="minor">
+            <a:schemeClr val="lt1"/>
+          </a:fontRef>
+        </p:style>
+        <p:txBody>
+          <a:bodyPr rtlCol="0" anchor="ctr"/>
+          <a:lstStyle/>
+          <a:p>
+            <a:pPr algn="ctr"/>
+          </a:p>
+        </p:txBody>
+      </p:sp>
+      <p:sp>
+        <p:nvSpPr>
+          <p:cNvPr id="9" name="Rectangle 8"/>
+          <p:cNvSpPr/>
+          <p:nvPr/>
+        </p:nvSpPr>
+        <p:spPr>
+          <a:xfrm>
+            <a:off x="731520" y="1783080"/>
+            <a:ext cx="73152" cy="1719072"/>
+          </a:xfrm>
+          <a:prstGeom prst="rect">
             <a:avLst/>
           </a:prstGeom>
           <a:solidFill>
@@ -8865,14 +8356,59 @@
       </p:sp>
       <p:sp>
         <p:nvSpPr>
-          <p:cNvPr id="9" name="TextBox 8"/>
+          <p:cNvPr id="10" name="Rounded Rectangle 9"/>
+          <p:cNvSpPr/>
+          <p:nvPr/>
+        </p:nvSpPr>
+        <p:spPr>
+          <a:xfrm>
+            <a:off x="932688" y="2002536"/>
+            <a:ext cx="438912" cy="438912"/>
+          </a:xfrm>
+          <a:prstGeom prst="roundRect">
+            <a:avLst/>
+          </a:prstGeom>
+          <a:solidFill>
+            <a:srgbClr val="1F6FEB"/>
+          </a:solidFill>
+          <a:ln>
+            <a:solidFill>
+              <a:srgbClr val="1F6FEB"/>
+            </a:solidFill>
+          </a:ln>
+        </p:spPr>
+        <p:style>
+          <a:lnRef idx="1">
+            <a:schemeClr val="accent1"/>
+          </a:lnRef>
+          <a:fillRef idx="3">
+            <a:schemeClr val="accent1"/>
+          </a:fillRef>
+          <a:effectRef idx="2">
+            <a:schemeClr val="accent1"/>
+          </a:effectRef>
+          <a:fontRef idx="minor">
+            <a:schemeClr val="lt1"/>
+          </a:fontRef>
+        </p:style>
+        <p:txBody>
+          <a:bodyPr rtlCol="0" anchor="ctr"/>
+          <a:lstStyle/>
+          <a:p>
+            <a:pPr algn="ctr"/>
+          </a:p>
+        </p:txBody>
+      </p:sp>
+      <p:sp>
+        <p:nvSpPr>
+          <p:cNvPr id="11" name="TextBox 10"/>
           <p:cNvSpPr txBox="1"/>
           <p:nvPr/>
         </p:nvSpPr>
         <p:spPr>
           <a:xfrm>
-            <a:off x="1051560" y="2011680"/>
-            <a:ext cx="10058400" cy="566928"/>
+            <a:off x="932688" y="2011680"/>
+            <a:ext cx="438912" cy="420624"/>
           </a:xfrm>
           <a:prstGeom prst="rect">
             <a:avLst/>
@@ -8887,13 +8423,1621 @@
           <a:p>
             <a:pPr algn="ctr"/>
             <a:r>
-              <a:rPr sz="1900" b="1">
+              <a:rPr sz="1400" b="1">
                 <a:solidFill>
                   <a:srgbClr val="FFFFFF"/>
                 </a:solidFill>
                 <a:latin typeface="Arial"/>
               </a:rPr>
-              <a:t>A structured prompt brief, two AI wireframe directions and one approved PowerPoint wireframe</a:t>
+              <a:t>1</a:t>
+            </a:r>
+          </a:p>
+        </p:txBody>
+      </p:sp>
+      <p:sp>
+        <p:nvSpPr>
+          <p:cNvPr id="12" name="TextBox 11"/>
+          <p:cNvSpPr txBox="1"/>
+          <p:nvPr/>
+        </p:nvSpPr>
+        <p:spPr>
+          <a:xfrm>
+            <a:off x="1536192" y="1965960"/>
+            <a:ext cx="2414016" cy="329184"/>
+          </a:xfrm>
+          <a:prstGeom prst="rect">
+            <a:avLst/>
+          </a:prstGeom>
+          <a:noFill/>
+        </p:spPr>
+        <p:txBody>
+          <a:bodyPr wrap="square" anchor="t">
+            <a:spAutoFit/>
+          </a:bodyPr>
+          <a:lstStyle/>
+          <a:p>
+            <a:pPr algn="l"/>
+            <a:r>
+              <a:rPr sz="1400" b="1">
+                <a:solidFill>
+                  <a:srgbClr val="1F6FEB"/>
+                </a:solidFill>
+                <a:latin typeface="Arial"/>
+              </a:rPr>
+              <a:t>Hook</a:t>
+            </a:r>
+          </a:p>
+        </p:txBody>
+      </p:sp>
+      <p:sp>
+        <p:nvSpPr>
+          <p:cNvPr id="13" name="TextBox 12"/>
+          <p:cNvSpPr txBox="1"/>
+          <p:nvPr/>
+        </p:nvSpPr>
+        <p:spPr>
+          <a:xfrm>
+            <a:off x="1536192" y="2350008"/>
+            <a:ext cx="2414016" cy="1005839"/>
+          </a:xfrm>
+          <a:prstGeom prst="rect">
+            <a:avLst/>
+          </a:prstGeom>
+          <a:noFill/>
+        </p:spPr>
+        <p:txBody>
+          <a:bodyPr wrap="square" anchor="t">
+            <a:spAutoFit/>
+          </a:bodyPr>
+          <a:lstStyle/>
+          <a:p>
+            <a:pPr algn="l"/>
+            <a:r>
+              <a:rPr sz="1150" b="0">
+                <a:solidFill>
+                  <a:srgbClr val="161B26"/>
+                </a:solidFill>
+                <a:latin typeface="Arial"/>
+              </a:rPr>
+              <a:t>Title states the audience-relevant message.</a:t>
+            </a:r>
+          </a:p>
+        </p:txBody>
+      </p:sp>
+      <p:sp>
+        <p:nvSpPr>
+          <p:cNvPr id="14" name="Rounded Rectangle 13"/>
+          <p:cNvSpPr/>
+          <p:nvPr/>
+        </p:nvSpPr>
+        <p:spPr>
+          <a:xfrm>
+            <a:off x="4315968" y="1783080"/>
+            <a:ext cx="3401568" cy="1719072"/>
+          </a:xfrm>
+          <a:prstGeom prst="roundRect">
+            <a:avLst/>
+          </a:prstGeom>
+          <a:solidFill>
+            <a:srgbClr val="F5F8FC"/>
+          </a:solidFill>
+          <a:ln>
+            <a:solidFill>
+              <a:srgbClr val="E2E8F0"/>
+            </a:solidFill>
+          </a:ln>
+        </p:spPr>
+        <p:style>
+          <a:lnRef idx="1">
+            <a:schemeClr val="accent1"/>
+          </a:lnRef>
+          <a:fillRef idx="3">
+            <a:schemeClr val="accent1"/>
+          </a:fillRef>
+          <a:effectRef idx="2">
+            <a:schemeClr val="accent1"/>
+          </a:effectRef>
+          <a:fontRef idx="minor">
+            <a:schemeClr val="lt1"/>
+          </a:fontRef>
+        </p:style>
+        <p:txBody>
+          <a:bodyPr rtlCol="0" anchor="ctr"/>
+          <a:lstStyle/>
+          <a:p>
+            <a:pPr algn="ctr"/>
+          </a:p>
+        </p:txBody>
+      </p:sp>
+      <p:sp>
+        <p:nvSpPr>
+          <p:cNvPr id="15" name="Rectangle 14"/>
+          <p:cNvSpPr/>
+          <p:nvPr/>
+        </p:nvSpPr>
+        <p:spPr>
+          <a:xfrm>
+            <a:off x="4315968" y="1783080"/>
+            <a:ext cx="73152" cy="1719072"/>
+          </a:xfrm>
+          <a:prstGeom prst="rect">
+            <a:avLst/>
+          </a:prstGeom>
+          <a:solidFill>
+            <a:srgbClr val="10B981"/>
+          </a:solidFill>
+          <a:ln>
+            <a:solidFill>
+              <a:srgbClr val="10B981"/>
+            </a:solidFill>
+          </a:ln>
+        </p:spPr>
+        <p:style>
+          <a:lnRef idx="1">
+            <a:schemeClr val="accent1"/>
+          </a:lnRef>
+          <a:fillRef idx="3">
+            <a:schemeClr val="accent1"/>
+          </a:fillRef>
+          <a:effectRef idx="2">
+            <a:schemeClr val="accent1"/>
+          </a:effectRef>
+          <a:fontRef idx="minor">
+            <a:schemeClr val="lt1"/>
+          </a:fontRef>
+        </p:style>
+        <p:txBody>
+          <a:bodyPr rtlCol="0" anchor="ctr"/>
+          <a:lstStyle/>
+          <a:p>
+            <a:pPr algn="ctr"/>
+          </a:p>
+        </p:txBody>
+      </p:sp>
+      <p:sp>
+        <p:nvSpPr>
+          <p:cNvPr id="16" name="Rounded Rectangle 15"/>
+          <p:cNvSpPr/>
+          <p:nvPr/>
+        </p:nvSpPr>
+        <p:spPr>
+          <a:xfrm>
+            <a:off x="4517136" y="2002536"/>
+            <a:ext cx="438912" cy="438912"/>
+          </a:xfrm>
+          <a:prstGeom prst="roundRect">
+            <a:avLst/>
+          </a:prstGeom>
+          <a:solidFill>
+            <a:srgbClr val="10B981"/>
+          </a:solidFill>
+          <a:ln>
+            <a:solidFill>
+              <a:srgbClr val="10B981"/>
+            </a:solidFill>
+          </a:ln>
+        </p:spPr>
+        <p:style>
+          <a:lnRef idx="1">
+            <a:schemeClr val="accent1"/>
+          </a:lnRef>
+          <a:fillRef idx="3">
+            <a:schemeClr val="accent1"/>
+          </a:fillRef>
+          <a:effectRef idx="2">
+            <a:schemeClr val="accent1"/>
+          </a:effectRef>
+          <a:fontRef idx="minor">
+            <a:schemeClr val="lt1"/>
+          </a:fontRef>
+        </p:style>
+        <p:txBody>
+          <a:bodyPr rtlCol="0" anchor="ctr"/>
+          <a:lstStyle/>
+          <a:p>
+            <a:pPr algn="ctr"/>
+          </a:p>
+        </p:txBody>
+      </p:sp>
+      <p:sp>
+        <p:nvSpPr>
+          <p:cNvPr id="17" name="TextBox 16"/>
+          <p:cNvSpPr txBox="1"/>
+          <p:nvPr/>
+        </p:nvSpPr>
+        <p:spPr>
+          <a:xfrm>
+            <a:off x="4517136" y="2011680"/>
+            <a:ext cx="438912" cy="420624"/>
+          </a:xfrm>
+          <a:prstGeom prst="rect">
+            <a:avLst/>
+          </a:prstGeom>
+          <a:noFill/>
+        </p:spPr>
+        <p:txBody>
+          <a:bodyPr wrap="square" anchor="ctr">
+            <a:spAutoFit/>
+          </a:bodyPr>
+          <a:lstStyle/>
+          <a:p>
+            <a:pPr algn="ctr"/>
+            <a:r>
+              <a:rPr sz="1400" b="1">
+                <a:solidFill>
+                  <a:srgbClr val="FFFFFF"/>
+                </a:solidFill>
+                <a:latin typeface="Arial"/>
+              </a:rPr>
+              <a:t>2</a:t>
+            </a:r>
+          </a:p>
+        </p:txBody>
+      </p:sp>
+      <p:sp>
+        <p:nvSpPr>
+          <p:cNvPr id="18" name="TextBox 17"/>
+          <p:cNvSpPr txBox="1"/>
+          <p:nvPr/>
+        </p:nvSpPr>
+        <p:spPr>
+          <a:xfrm>
+            <a:off x="5120640" y="1965960"/>
+            <a:ext cx="2414016" cy="329184"/>
+          </a:xfrm>
+          <a:prstGeom prst="rect">
+            <a:avLst/>
+          </a:prstGeom>
+          <a:noFill/>
+        </p:spPr>
+        <p:txBody>
+          <a:bodyPr wrap="square" anchor="t">
+            <a:spAutoFit/>
+          </a:bodyPr>
+          <a:lstStyle/>
+          <a:p>
+            <a:pPr algn="l"/>
+            <a:r>
+              <a:rPr sz="1400" b="1">
+                <a:solidFill>
+                  <a:srgbClr val="10B981"/>
+                </a:solidFill>
+                <a:latin typeface="Arial"/>
+              </a:rPr>
+              <a:t>Context</a:t>
+            </a:r>
+          </a:p>
+        </p:txBody>
+      </p:sp>
+      <p:sp>
+        <p:nvSpPr>
+          <p:cNvPr id="19" name="TextBox 18"/>
+          <p:cNvSpPr txBox="1"/>
+          <p:nvPr/>
+        </p:nvSpPr>
+        <p:spPr>
+          <a:xfrm>
+            <a:off x="5120640" y="2350008"/>
+            <a:ext cx="2414016" cy="1005839"/>
+          </a:xfrm>
+          <a:prstGeom prst="rect">
+            <a:avLst/>
+          </a:prstGeom>
+          <a:noFill/>
+        </p:spPr>
+        <p:txBody>
+          <a:bodyPr wrap="square" anchor="t">
+            <a:spAutoFit/>
+          </a:bodyPr>
+          <a:lstStyle/>
+          <a:p>
+            <a:pPr algn="l"/>
+            <a:r>
+              <a:rPr sz="1150" b="0">
+                <a:solidFill>
+                  <a:srgbClr val="161B26"/>
+                </a:solidFill>
+                <a:latin typeface="Arial"/>
+              </a:rPr>
+              <a:t>Source, timeframe, unit and scope.</a:t>
+            </a:r>
+          </a:p>
+        </p:txBody>
+      </p:sp>
+      <p:sp>
+        <p:nvSpPr>
+          <p:cNvPr id="20" name="Rounded Rectangle 19"/>
+          <p:cNvSpPr/>
+          <p:nvPr/>
+        </p:nvSpPr>
+        <p:spPr>
+          <a:xfrm>
+            <a:off x="7900416" y="1783080"/>
+            <a:ext cx="3401568" cy="1719072"/>
+          </a:xfrm>
+          <a:prstGeom prst="roundRect">
+            <a:avLst/>
+          </a:prstGeom>
+          <a:solidFill>
+            <a:srgbClr val="F5F8FC"/>
+          </a:solidFill>
+          <a:ln>
+            <a:solidFill>
+              <a:srgbClr val="E2E8F0"/>
+            </a:solidFill>
+          </a:ln>
+        </p:spPr>
+        <p:style>
+          <a:lnRef idx="1">
+            <a:schemeClr val="accent1"/>
+          </a:lnRef>
+          <a:fillRef idx="3">
+            <a:schemeClr val="accent1"/>
+          </a:fillRef>
+          <a:effectRef idx="2">
+            <a:schemeClr val="accent1"/>
+          </a:effectRef>
+          <a:fontRef idx="minor">
+            <a:schemeClr val="lt1"/>
+          </a:fontRef>
+        </p:style>
+        <p:txBody>
+          <a:bodyPr rtlCol="0" anchor="ctr"/>
+          <a:lstStyle/>
+          <a:p>
+            <a:pPr algn="ctr"/>
+          </a:p>
+        </p:txBody>
+      </p:sp>
+      <p:sp>
+        <p:nvSpPr>
+          <p:cNvPr id="21" name="Rectangle 20"/>
+          <p:cNvSpPr/>
+          <p:nvPr/>
+        </p:nvSpPr>
+        <p:spPr>
+          <a:xfrm>
+            <a:off x="7900416" y="1783080"/>
+            <a:ext cx="73152" cy="1719072"/>
+          </a:xfrm>
+          <a:prstGeom prst="rect">
+            <a:avLst/>
+          </a:prstGeom>
+          <a:solidFill>
+            <a:srgbClr val="7C3AED"/>
+          </a:solidFill>
+          <a:ln>
+            <a:solidFill>
+              <a:srgbClr val="7C3AED"/>
+            </a:solidFill>
+          </a:ln>
+        </p:spPr>
+        <p:style>
+          <a:lnRef idx="1">
+            <a:schemeClr val="accent1"/>
+          </a:lnRef>
+          <a:fillRef idx="3">
+            <a:schemeClr val="accent1"/>
+          </a:fillRef>
+          <a:effectRef idx="2">
+            <a:schemeClr val="accent1"/>
+          </a:effectRef>
+          <a:fontRef idx="minor">
+            <a:schemeClr val="lt1"/>
+          </a:fontRef>
+        </p:style>
+        <p:txBody>
+          <a:bodyPr rtlCol="0" anchor="ctr"/>
+          <a:lstStyle/>
+          <a:p>
+            <a:pPr algn="ctr"/>
+          </a:p>
+        </p:txBody>
+      </p:sp>
+      <p:sp>
+        <p:nvSpPr>
+          <p:cNvPr id="22" name="Rounded Rectangle 21"/>
+          <p:cNvSpPr/>
+          <p:nvPr/>
+        </p:nvSpPr>
+        <p:spPr>
+          <a:xfrm>
+            <a:off x="8101584" y="2002536"/>
+            <a:ext cx="438912" cy="438912"/>
+          </a:xfrm>
+          <a:prstGeom prst="roundRect">
+            <a:avLst/>
+          </a:prstGeom>
+          <a:solidFill>
+            <a:srgbClr val="7C3AED"/>
+          </a:solidFill>
+          <a:ln>
+            <a:solidFill>
+              <a:srgbClr val="7C3AED"/>
+            </a:solidFill>
+          </a:ln>
+        </p:spPr>
+        <p:style>
+          <a:lnRef idx="1">
+            <a:schemeClr val="accent1"/>
+          </a:lnRef>
+          <a:fillRef idx="3">
+            <a:schemeClr val="accent1"/>
+          </a:fillRef>
+          <a:effectRef idx="2">
+            <a:schemeClr val="accent1"/>
+          </a:effectRef>
+          <a:fontRef idx="minor">
+            <a:schemeClr val="lt1"/>
+          </a:fontRef>
+        </p:style>
+        <p:txBody>
+          <a:bodyPr rtlCol="0" anchor="ctr"/>
+          <a:lstStyle/>
+          <a:p>
+            <a:pPr algn="ctr"/>
+          </a:p>
+        </p:txBody>
+      </p:sp>
+      <p:sp>
+        <p:nvSpPr>
+          <p:cNvPr id="23" name="TextBox 22"/>
+          <p:cNvSpPr txBox="1"/>
+          <p:nvPr/>
+        </p:nvSpPr>
+        <p:spPr>
+          <a:xfrm>
+            <a:off x="8101584" y="2011680"/>
+            <a:ext cx="438912" cy="420624"/>
+          </a:xfrm>
+          <a:prstGeom prst="rect">
+            <a:avLst/>
+          </a:prstGeom>
+          <a:noFill/>
+        </p:spPr>
+        <p:txBody>
+          <a:bodyPr wrap="square" anchor="ctr">
+            <a:spAutoFit/>
+          </a:bodyPr>
+          <a:lstStyle/>
+          <a:p>
+            <a:pPr algn="ctr"/>
+            <a:r>
+              <a:rPr sz="1400" b="1">
+                <a:solidFill>
+                  <a:srgbClr val="FFFFFF"/>
+                </a:solidFill>
+                <a:latin typeface="Arial"/>
+              </a:rPr>
+              <a:t>3</a:t>
+            </a:r>
+          </a:p>
+        </p:txBody>
+      </p:sp>
+      <p:sp>
+        <p:nvSpPr>
+          <p:cNvPr id="24" name="TextBox 23"/>
+          <p:cNvSpPr txBox="1"/>
+          <p:nvPr/>
+        </p:nvSpPr>
+        <p:spPr>
+          <a:xfrm>
+            <a:off x="8705088" y="1965960"/>
+            <a:ext cx="2414016" cy="329184"/>
+          </a:xfrm>
+          <a:prstGeom prst="rect">
+            <a:avLst/>
+          </a:prstGeom>
+          <a:noFill/>
+        </p:spPr>
+        <p:txBody>
+          <a:bodyPr wrap="square" anchor="t">
+            <a:spAutoFit/>
+          </a:bodyPr>
+          <a:lstStyle/>
+          <a:p>
+            <a:pPr algn="l"/>
+            <a:r>
+              <a:rPr sz="1400" b="1">
+                <a:solidFill>
+                  <a:srgbClr val="7C3AED"/>
+                </a:solidFill>
+                <a:latin typeface="Arial"/>
+              </a:rPr>
+              <a:t>Evidence</a:t>
+            </a:r>
+          </a:p>
+        </p:txBody>
+      </p:sp>
+      <p:sp>
+        <p:nvSpPr>
+          <p:cNvPr id="25" name="TextBox 24"/>
+          <p:cNvSpPr txBox="1"/>
+          <p:nvPr/>
+        </p:nvSpPr>
+        <p:spPr>
+          <a:xfrm>
+            <a:off x="8705088" y="2350008"/>
+            <a:ext cx="2414016" cy="1005839"/>
+          </a:xfrm>
+          <a:prstGeom prst="rect">
+            <a:avLst/>
+          </a:prstGeom>
+          <a:noFill/>
+        </p:spPr>
+        <p:txBody>
+          <a:bodyPr wrap="square" anchor="t">
+            <a:spAutoFit/>
+          </a:bodyPr>
+          <a:lstStyle/>
+          <a:p>
+            <a:pPr algn="l"/>
+            <a:r>
+              <a:rPr sz="1150" b="0">
+                <a:solidFill>
+                  <a:srgbClr val="161B26"/>
+                </a:solidFill>
+                <a:latin typeface="Arial"/>
+              </a:rPr>
+              <a:t>One primary chart or process carries the proof.</a:t>
+            </a:r>
+          </a:p>
+        </p:txBody>
+      </p:sp>
+      <p:sp>
+        <p:nvSpPr>
+          <p:cNvPr id="26" name="Rounded Rectangle 25"/>
+          <p:cNvSpPr/>
+          <p:nvPr/>
+        </p:nvSpPr>
+        <p:spPr>
+          <a:xfrm>
+            <a:off x="731520" y="3776472"/>
+            <a:ext cx="3401568" cy="1719072"/>
+          </a:xfrm>
+          <a:prstGeom prst="roundRect">
+            <a:avLst/>
+          </a:prstGeom>
+          <a:solidFill>
+            <a:srgbClr val="F5F8FC"/>
+          </a:solidFill>
+          <a:ln>
+            <a:solidFill>
+              <a:srgbClr val="E2E8F0"/>
+            </a:solidFill>
+          </a:ln>
+        </p:spPr>
+        <p:style>
+          <a:lnRef idx="1">
+            <a:schemeClr val="accent1"/>
+          </a:lnRef>
+          <a:fillRef idx="3">
+            <a:schemeClr val="accent1"/>
+          </a:fillRef>
+          <a:effectRef idx="2">
+            <a:schemeClr val="accent1"/>
+          </a:effectRef>
+          <a:fontRef idx="minor">
+            <a:schemeClr val="lt1"/>
+          </a:fontRef>
+        </p:style>
+        <p:txBody>
+          <a:bodyPr rtlCol="0" anchor="ctr"/>
+          <a:lstStyle/>
+          <a:p>
+            <a:pPr algn="ctr"/>
+          </a:p>
+        </p:txBody>
+      </p:sp>
+      <p:sp>
+        <p:nvSpPr>
+          <p:cNvPr id="27" name="Rectangle 26"/>
+          <p:cNvSpPr/>
+          <p:nvPr/>
+        </p:nvSpPr>
+        <p:spPr>
+          <a:xfrm>
+            <a:off x="731520" y="3776472"/>
+            <a:ext cx="73152" cy="1719072"/>
+          </a:xfrm>
+          <a:prstGeom prst="rect">
+            <a:avLst/>
+          </a:prstGeom>
+          <a:solidFill>
+            <a:srgbClr val="F59E0B"/>
+          </a:solidFill>
+          <a:ln>
+            <a:solidFill>
+              <a:srgbClr val="F59E0B"/>
+            </a:solidFill>
+          </a:ln>
+        </p:spPr>
+        <p:style>
+          <a:lnRef idx="1">
+            <a:schemeClr val="accent1"/>
+          </a:lnRef>
+          <a:fillRef idx="3">
+            <a:schemeClr val="accent1"/>
+          </a:fillRef>
+          <a:effectRef idx="2">
+            <a:schemeClr val="accent1"/>
+          </a:effectRef>
+          <a:fontRef idx="minor">
+            <a:schemeClr val="lt1"/>
+          </a:fontRef>
+        </p:style>
+        <p:txBody>
+          <a:bodyPr rtlCol="0" anchor="ctr"/>
+          <a:lstStyle/>
+          <a:p>
+            <a:pPr algn="ctr"/>
+          </a:p>
+        </p:txBody>
+      </p:sp>
+      <p:sp>
+        <p:nvSpPr>
+          <p:cNvPr id="28" name="Rounded Rectangle 27"/>
+          <p:cNvSpPr/>
+          <p:nvPr/>
+        </p:nvSpPr>
+        <p:spPr>
+          <a:xfrm>
+            <a:off x="932688" y="3995928"/>
+            <a:ext cx="438912" cy="438912"/>
+          </a:xfrm>
+          <a:prstGeom prst="roundRect">
+            <a:avLst/>
+          </a:prstGeom>
+          <a:solidFill>
+            <a:srgbClr val="F59E0B"/>
+          </a:solidFill>
+          <a:ln>
+            <a:solidFill>
+              <a:srgbClr val="F59E0B"/>
+            </a:solidFill>
+          </a:ln>
+        </p:spPr>
+        <p:style>
+          <a:lnRef idx="1">
+            <a:schemeClr val="accent1"/>
+          </a:lnRef>
+          <a:fillRef idx="3">
+            <a:schemeClr val="accent1"/>
+          </a:fillRef>
+          <a:effectRef idx="2">
+            <a:schemeClr val="accent1"/>
+          </a:effectRef>
+          <a:fontRef idx="minor">
+            <a:schemeClr val="lt1"/>
+          </a:fontRef>
+        </p:style>
+        <p:txBody>
+          <a:bodyPr rtlCol="0" anchor="ctr"/>
+          <a:lstStyle/>
+          <a:p>
+            <a:pPr algn="ctr"/>
+          </a:p>
+        </p:txBody>
+      </p:sp>
+      <p:sp>
+        <p:nvSpPr>
+          <p:cNvPr id="29" name="TextBox 28"/>
+          <p:cNvSpPr txBox="1"/>
+          <p:nvPr/>
+        </p:nvSpPr>
+        <p:spPr>
+          <a:xfrm>
+            <a:off x="932688" y="4005072"/>
+            <a:ext cx="438912" cy="420624"/>
+          </a:xfrm>
+          <a:prstGeom prst="rect">
+            <a:avLst/>
+          </a:prstGeom>
+          <a:noFill/>
+        </p:spPr>
+        <p:txBody>
+          <a:bodyPr wrap="square" anchor="ctr">
+            <a:spAutoFit/>
+          </a:bodyPr>
+          <a:lstStyle/>
+          <a:p>
+            <a:pPr algn="ctr"/>
+            <a:r>
+              <a:rPr sz="1400" b="1">
+                <a:solidFill>
+                  <a:srgbClr val="FFFFFF"/>
+                </a:solidFill>
+                <a:latin typeface="Arial"/>
+              </a:rPr>
+              <a:t>4</a:t>
+            </a:r>
+          </a:p>
+        </p:txBody>
+      </p:sp>
+      <p:sp>
+        <p:nvSpPr>
+          <p:cNvPr id="30" name="TextBox 29"/>
+          <p:cNvSpPr txBox="1"/>
+          <p:nvPr/>
+        </p:nvSpPr>
+        <p:spPr>
+          <a:xfrm>
+            <a:off x="1536192" y="3959352"/>
+            <a:ext cx="2414016" cy="329184"/>
+          </a:xfrm>
+          <a:prstGeom prst="rect">
+            <a:avLst/>
+          </a:prstGeom>
+          <a:noFill/>
+        </p:spPr>
+        <p:txBody>
+          <a:bodyPr wrap="square" anchor="t">
+            <a:spAutoFit/>
+          </a:bodyPr>
+          <a:lstStyle/>
+          <a:p>
+            <a:pPr algn="l"/>
+            <a:r>
+              <a:rPr sz="1400" b="1">
+                <a:solidFill>
+                  <a:srgbClr val="F59E0B"/>
+                </a:solidFill>
+                <a:latin typeface="Arial"/>
+              </a:rPr>
+              <a:t>Guidance</a:t>
+            </a:r>
+          </a:p>
+        </p:txBody>
+      </p:sp>
+      <p:sp>
+        <p:nvSpPr>
+          <p:cNvPr id="31" name="TextBox 30"/>
+          <p:cNvSpPr txBox="1"/>
+          <p:nvPr/>
+        </p:nvSpPr>
+        <p:spPr>
+          <a:xfrm>
+            <a:off x="1536192" y="4343400"/>
+            <a:ext cx="2414016" cy="1005839"/>
+          </a:xfrm>
+          <a:prstGeom prst="rect">
+            <a:avLst/>
+          </a:prstGeom>
+          <a:noFill/>
+        </p:spPr>
+        <p:txBody>
+          <a:bodyPr wrap="square" anchor="t">
+            <a:spAutoFit/>
+          </a:bodyPr>
+          <a:lstStyle/>
+          <a:p>
+            <a:pPr algn="l"/>
+            <a:r>
+              <a:rPr sz="1150" b="0">
+                <a:solidFill>
+                  <a:srgbClr val="161B26"/>
+                </a:solidFill>
+                <a:latin typeface="Arial"/>
+              </a:rPr>
+              <a:t>Arrows, order and whitespace control the reading path.</a:t>
+            </a:r>
+          </a:p>
+        </p:txBody>
+      </p:sp>
+      <p:sp>
+        <p:nvSpPr>
+          <p:cNvPr id="32" name="Rounded Rectangle 31"/>
+          <p:cNvSpPr/>
+          <p:nvPr/>
+        </p:nvSpPr>
+        <p:spPr>
+          <a:xfrm>
+            <a:off x="4315968" y="3776472"/>
+            <a:ext cx="3401568" cy="1719072"/>
+          </a:xfrm>
+          <a:prstGeom prst="roundRect">
+            <a:avLst/>
+          </a:prstGeom>
+          <a:solidFill>
+            <a:srgbClr val="F5F8FC"/>
+          </a:solidFill>
+          <a:ln>
+            <a:solidFill>
+              <a:srgbClr val="E2E8F0"/>
+            </a:solidFill>
+          </a:ln>
+        </p:spPr>
+        <p:style>
+          <a:lnRef idx="1">
+            <a:schemeClr val="accent1"/>
+          </a:lnRef>
+          <a:fillRef idx="3">
+            <a:schemeClr val="accent1"/>
+          </a:fillRef>
+          <a:effectRef idx="2">
+            <a:schemeClr val="accent1"/>
+          </a:effectRef>
+          <a:fontRef idx="minor">
+            <a:schemeClr val="lt1"/>
+          </a:fontRef>
+        </p:style>
+        <p:txBody>
+          <a:bodyPr rtlCol="0" anchor="ctr"/>
+          <a:lstStyle/>
+          <a:p>
+            <a:pPr algn="ctr"/>
+          </a:p>
+        </p:txBody>
+      </p:sp>
+      <p:sp>
+        <p:nvSpPr>
+          <p:cNvPr id="33" name="Rectangle 32"/>
+          <p:cNvSpPr/>
+          <p:nvPr/>
+        </p:nvSpPr>
+        <p:spPr>
+          <a:xfrm>
+            <a:off x="4315968" y="3776472"/>
+            <a:ext cx="73152" cy="1719072"/>
+          </a:xfrm>
+          <a:prstGeom prst="rect">
+            <a:avLst/>
+          </a:prstGeom>
+          <a:solidFill>
+            <a:srgbClr val="1F6FEB"/>
+          </a:solidFill>
+          <a:ln>
+            <a:solidFill>
+              <a:srgbClr val="1F6FEB"/>
+            </a:solidFill>
+          </a:ln>
+        </p:spPr>
+        <p:style>
+          <a:lnRef idx="1">
+            <a:schemeClr val="accent1"/>
+          </a:lnRef>
+          <a:fillRef idx="3">
+            <a:schemeClr val="accent1"/>
+          </a:fillRef>
+          <a:effectRef idx="2">
+            <a:schemeClr val="accent1"/>
+          </a:effectRef>
+          <a:fontRef idx="minor">
+            <a:schemeClr val="lt1"/>
+          </a:fontRef>
+        </p:style>
+        <p:txBody>
+          <a:bodyPr rtlCol="0" anchor="ctr"/>
+          <a:lstStyle/>
+          <a:p>
+            <a:pPr algn="ctr"/>
+          </a:p>
+        </p:txBody>
+      </p:sp>
+      <p:sp>
+        <p:nvSpPr>
+          <p:cNvPr id="34" name="Rounded Rectangle 33"/>
+          <p:cNvSpPr/>
+          <p:nvPr/>
+        </p:nvSpPr>
+        <p:spPr>
+          <a:xfrm>
+            <a:off x="4517136" y="3995928"/>
+            <a:ext cx="438912" cy="438912"/>
+          </a:xfrm>
+          <a:prstGeom prst="roundRect">
+            <a:avLst/>
+          </a:prstGeom>
+          <a:solidFill>
+            <a:srgbClr val="1F6FEB"/>
+          </a:solidFill>
+          <a:ln>
+            <a:solidFill>
+              <a:srgbClr val="1F6FEB"/>
+            </a:solidFill>
+          </a:ln>
+        </p:spPr>
+        <p:style>
+          <a:lnRef idx="1">
+            <a:schemeClr val="accent1"/>
+          </a:lnRef>
+          <a:fillRef idx="3">
+            <a:schemeClr val="accent1"/>
+          </a:fillRef>
+          <a:effectRef idx="2">
+            <a:schemeClr val="accent1"/>
+          </a:effectRef>
+          <a:fontRef idx="minor">
+            <a:schemeClr val="lt1"/>
+          </a:fontRef>
+        </p:style>
+        <p:txBody>
+          <a:bodyPr rtlCol="0" anchor="ctr"/>
+          <a:lstStyle/>
+          <a:p>
+            <a:pPr algn="ctr"/>
+          </a:p>
+        </p:txBody>
+      </p:sp>
+      <p:sp>
+        <p:nvSpPr>
+          <p:cNvPr id="35" name="TextBox 34"/>
+          <p:cNvSpPr txBox="1"/>
+          <p:nvPr/>
+        </p:nvSpPr>
+        <p:spPr>
+          <a:xfrm>
+            <a:off x="4517136" y="4005072"/>
+            <a:ext cx="438912" cy="420624"/>
+          </a:xfrm>
+          <a:prstGeom prst="rect">
+            <a:avLst/>
+          </a:prstGeom>
+          <a:noFill/>
+        </p:spPr>
+        <p:txBody>
+          <a:bodyPr wrap="square" anchor="ctr">
+            <a:spAutoFit/>
+          </a:bodyPr>
+          <a:lstStyle/>
+          <a:p>
+            <a:pPr algn="ctr"/>
+            <a:r>
+              <a:rPr sz="1400" b="1">
+                <a:solidFill>
+                  <a:srgbClr val="FFFFFF"/>
+                </a:solidFill>
+                <a:latin typeface="Arial"/>
+              </a:rPr>
+              <a:t>5</a:t>
+            </a:r>
+          </a:p>
+        </p:txBody>
+      </p:sp>
+      <p:sp>
+        <p:nvSpPr>
+          <p:cNvPr id="36" name="TextBox 35"/>
+          <p:cNvSpPr txBox="1"/>
+          <p:nvPr/>
+        </p:nvSpPr>
+        <p:spPr>
+          <a:xfrm>
+            <a:off x="5120640" y="3959352"/>
+            <a:ext cx="2414016" cy="329184"/>
+          </a:xfrm>
+          <a:prstGeom prst="rect">
+            <a:avLst/>
+          </a:prstGeom>
+          <a:noFill/>
+        </p:spPr>
+        <p:txBody>
+          <a:bodyPr wrap="square" anchor="t">
+            <a:spAutoFit/>
+          </a:bodyPr>
+          <a:lstStyle/>
+          <a:p>
+            <a:pPr algn="l"/>
+            <a:r>
+              <a:rPr sz="1400" b="1">
+                <a:solidFill>
+                  <a:srgbClr val="1F6FEB"/>
+                </a:solidFill>
+                <a:latin typeface="Arial"/>
+              </a:rPr>
+              <a:t>Action</a:t>
+            </a:r>
+          </a:p>
+        </p:txBody>
+      </p:sp>
+      <p:sp>
+        <p:nvSpPr>
+          <p:cNvPr id="37" name="TextBox 36"/>
+          <p:cNvSpPr txBox="1"/>
+          <p:nvPr/>
+        </p:nvSpPr>
+        <p:spPr>
+          <a:xfrm>
+            <a:off x="5120640" y="4343400"/>
+            <a:ext cx="2414016" cy="1005839"/>
+          </a:xfrm>
+          <a:prstGeom prst="rect">
+            <a:avLst/>
+          </a:prstGeom>
+          <a:noFill/>
+        </p:spPr>
+        <p:txBody>
+          <a:bodyPr wrap="square" anchor="t">
+            <a:spAutoFit/>
+          </a:bodyPr>
+          <a:lstStyle/>
+          <a:p>
+            <a:pPr algn="l"/>
+            <a:r>
+              <a:rPr sz="1150" b="0">
+                <a:solidFill>
+                  <a:srgbClr val="161B26"/>
+                </a:solidFill>
+                <a:latin typeface="Arial"/>
+              </a:rPr>
+              <a:t>A concise implication or next step.</a:t>
+            </a:r>
+          </a:p>
+        </p:txBody>
+      </p:sp>
+      <p:sp>
+        <p:nvSpPr>
+          <p:cNvPr id="38" name="Rounded Rectangle 37"/>
+          <p:cNvSpPr/>
+          <p:nvPr/>
+        </p:nvSpPr>
+        <p:spPr>
+          <a:xfrm>
+            <a:off x="7900416" y="3776472"/>
+            <a:ext cx="3401568" cy="1719072"/>
+          </a:xfrm>
+          <a:prstGeom prst="roundRect">
+            <a:avLst/>
+          </a:prstGeom>
+          <a:solidFill>
+            <a:srgbClr val="F5F8FC"/>
+          </a:solidFill>
+          <a:ln>
+            <a:solidFill>
+              <a:srgbClr val="E2E8F0"/>
+            </a:solidFill>
+          </a:ln>
+        </p:spPr>
+        <p:style>
+          <a:lnRef idx="1">
+            <a:schemeClr val="accent1"/>
+          </a:lnRef>
+          <a:fillRef idx="3">
+            <a:schemeClr val="accent1"/>
+          </a:fillRef>
+          <a:effectRef idx="2">
+            <a:schemeClr val="accent1"/>
+          </a:effectRef>
+          <a:fontRef idx="minor">
+            <a:schemeClr val="lt1"/>
+          </a:fontRef>
+        </p:style>
+        <p:txBody>
+          <a:bodyPr rtlCol="0" anchor="ctr"/>
+          <a:lstStyle/>
+          <a:p>
+            <a:pPr algn="ctr"/>
+          </a:p>
+        </p:txBody>
+      </p:sp>
+      <p:sp>
+        <p:nvSpPr>
+          <p:cNvPr id="39" name="Rectangle 38"/>
+          <p:cNvSpPr/>
+          <p:nvPr/>
+        </p:nvSpPr>
+        <p:spPr>
+          <a:xfrm>
+            <a:off x="7900416" y="3776472"/>
+            <a:ext cx="73152" cy="1719072"/>
+          </a:xfrm>
+          <a:prstGeom prst="rect">
+            <a:avLst/>
+          </a:prstGeom>
+          <a:solidFill>
+            <a:srgbClr val="10B981"/>
+          </a:solidFill>
+          <a:ln>
+            <a:solidFill>
+              <a:srgbClr val="10B981"/>
+            </a:solidFill>
+          </a:ln>
+        </p:spPr>
+        <p:style>
+          <a:lnRef idx="1">
+            <a:schemeClr val="accent1"/>
+          </a:lnRef>
+          <a:fillRef idx="3">
+            <a:schemeClr val="accent1"/>
+          </a:fillRef>
+          <a:effectRef idx="2">
+            <a:schemeClr val="accent1"/>
+          </a:effectRef>
+          <a:fontRef idx="minor">
+            <a:schemeClr val="lt1"/>
+          </a:fontRef>
+        </p:style>
+        <p:txBody>
+          <a:bodyPr rtlCol="0" anchor="ctr"/>
+          <a:lstStyle/>
+          <a:p>
+            <a:pPr algn="ctr"/>
+          </a:p>
+        </p:txBody>
+      </p:sp>
+      <p:sp>
+        <p:nvSpPr>
+          <p:cNvPr id="40" name="Rounded Rectangle 39"/>
+          <p:cNvSpPr/>
+          <p:nvPr/>
+        </p:nvSpPr>
+        <p:spPr>
+          <a:xfrm>
+            <a:off x="8101584" y="3995928"/>
+            <a:ext cx="438912" cy="438912"/>
+          </a:xfrm>
+          <a:prstGeom prst="roundRect">
+            <a:avLst/>
+          </a:prstGeom>
+          <a:solidFill>
+            <a:srgbClr val="10B981"/>
+          </a:solidFill>
+          <a:ln>
+            <a:solidFill>
+              <a:srgbClr val="10B981"/>
+            </a:solidFill>
+          </a:ln>
+        </p:spPr>
+        <p:style>
+          <a:lnRef idx="1">
+            <a:schemeClr val="accent1"/>
+          </a:lnRef>
+          <a:fillRef idx="3">
+            <a:schemeClr val="accent1"/>
+          </a:fillRef>
+          <a:effectRef idx="2">
+            <a:schemeClr val="accent1"/>
+          </a:effectRef>
+          <a:fontRef idx="minor">
+            <a:schemeClr val="lt1"/>
+          </a:fontRef>
+        </p:style>
+        <p:txBody>
+          <a:bodyPr rtlCol="0" anchor="ctr"/>
+          <a:lstStyle/>
+          <a:p>
+            <a:pPr algn="ctr"/>
+          </a:p>
+        </p:txBody>
+      </p:sp>
+      <p:sp>
+        <p:nvSpPr>
+          <p:cNvPr id="41" name="TextBox 40"/>
+          <p:cNvSpPr txBox="1"/>
+          <p:nvPr/>
+        </p:nvSpPr>
+        <p:spPr>
+          <a:xfrm>
+            <a:off x="8101584" y="4005072"/>
+            <a:ext cx="438912" cy="420624"/>
+          </a:xfrm>
+          <a:prstGeom prst="rect">
+            <a:avLst/>
+          </a:prstGeom>
+          <a:noFill/>
+        </p:spPr>
+        <p:txBody>
+          <a:bodyPr wrap="square" anchor="ctr">
+            <a:spAutoFit/>
+          </a:bodyPr>
+          <a:lstStyle/>
+          <a:p>
+            <a:pPr algn="ctr"/>
+            <a:r>
+              <a:rPr sz="1400" b="1">
+                <a:solidFill>
+                  <a:srgbClr val="FFFFFF"/>
+                </a:solidFill>
+                <a:latin typeface="Arial"/>
+              </a:rPr>
+              <a:t>6</a:t>
+            </a:r>
+          </a:p>
+        </p:txBody>
+      </p:sp>
+      <p:sp>
+        <p:nvSpPr>
+          <p:cNvPr id="42" name="TextBox 41"/>
+          <p:cNvSpPr txBox="1"/>
+          <p:nvPr/>
+        </p:nvSpPr>
+        <p:spPr>
+          <a:xfrm>
+            <a:off x="8705088" y="3959352"/>
+            <a:ext cx="2414016" cy="329184"/>
+          </a:xfrm>
+          <a:prstGeom prst="rect">
+            <a:avLst/>
+          </a:prstGeom>
+          <a:noFill/>
+        </p:spPr>
+        <p:txBody>
+          <a:bodyPr wrap="square" anchor="t">
+            <a:spAutoFit/>
+          </a:bodyPr>
+          <a:lstStyle/>
+          <a:p>
+            <a:pPr algn="l"/>
+            <a:r>
+              <a:rPr sz="1400" b="1">
+                <a:solidFill>
+                  <a:srgbClr val="10B981"/>
+                </a:solidFill>
+                <a:latin typeface="Arial"/>
+              </a:rPr>
+              <a:t>Footer</a:t>
+            </a:r>
+          </a:p>
+        </p:txBody>
+      </p:sp>
+      <p:sp>
+        <p:nvSpPr>
+          <p:cNvPr id="43" name="TextBox 42"/>
+          <p:cNvSpPr txBox="1"/>
+          <p:nvPr/>
+        </p:nvSpPr>
+        <p:spPr>
+          <a:xfrm>
+            <a:off x="8705088" y="4343400"/>
+            <a:ext cx="2414016" cy="1005839"/>
+          </a:xfrm>
+          <a:prstGeom prst="rect">
+            <a:avLst/>
+          </a:prstGeom>
+          <a:noFill/>
+        </p:spPr>
+        <p:txBody>
+          <a:bodyPr wrap="square" anchor="t">
+            <a:spAutoFit/>
+          </a:bodyPr>
+          <a:lstStyle/>
+          <a:p>
+            <a:pPr algn="l"/>
+            <a:r>
+              <a:rPr sz="1150" b="0">
+                <a:solidFill>
+                  <a:srgbClr val="161B26"/>
+                </a:solidFill>
+                <a:latin typeface="Arial"/>
+              </a:rPr>
+              <a:t>Source, owner, date and accessibility notes.</a:t>
+            </a:r>
+          </a:p>
+        </p:txBody>
+      </p:sp>
+    </p:spTree>
+  </p:cSld>
+  <p:clrMapOvr>
+    <a:masterClrMapping/>
+  </p:clrMapOvr>
+</p:sld>
+</file>
+
+<file path=ppt/slides/slide7.xml><?xml version="1.0" encoding="utf-8"?>
+<p:sld xmlns:a="http://schemas.openxmlformats.org/drawingml/2006/main" xmlns:p="http://schemas.openxmlformats.org/presentationml/2006/main" xmlns:r="http://schemas.openxmlformats.org/officeDocument/2006/relationships">
+  <p:cSld>
+    <p:spTree>
+      <p:nvGrpSpPr>
+        <p:cNvPr id="1" name=""/>
+        <p:cNvGrpSpPr/>
+        <p:nvPr/>
+      </p:nvGrpSpPr>
+      <p:grpSpPr/>
+      <p:sp>
+        <p:nvSpPr>
+          <p:cNvPr id="2" name="Rectangle 1"/>
+          <p:cNvSpPr/>
+          <p:nvPr/>
+        </p:nvSpPr>
+        <p:spPr>
+          <a:xfrm>
+            <a:off x="0" y="0"/>
+            <a:ext cx="12191695" cy="6858000"/>
+          </a:xfrm>
+          <a:prstGeom prst="rect">
+            <a:avLst/>
+          </a:prstGeom>
+          <a:solidFill>
+            <a:srgbClr val="FFFFFF"/>
+          </a:solidFill>
+          <a:ln>
+            <a:solidFill>
+              <a:srgbClr val="FFFFFF"/>
+            </a:solidFill>
+          </a:ln>
+        </p:spPr>
+        <p:style>
+          <a:lnRef idx="1">
+            <a:schemeClr val="accent1"/>
+          </a:lnRef>
+          <a:fillRef idx="3">
+            <a:schemeClr val="accent1"/>
+          </a:fillRef>
+          <a:effectRef idx="2">
+            <a:schemeClr val="accent1"/>
+          </a:effectRef>
+          <a:fontRef idx="minor">
+            <a:schemeClr val="lt1"/>
+          </a:fontRef>
+        </p:style>
+        <p:txBody>
+          <a:bodyPr rtlCol="0" anchor="ctr"/>
+          <a:lstStyle/>
+          <a:p>
+            <a:pPr algn="ctr"/>
+          </a:p>
+        </p:txBody>
+      </p:sp>
+      <p:sp>
+        <p:nvSpPr>
+          <p:cNvPr id="3" name="Rectangle 2"/>
+          <p:cNvSpPr/>
+          <p:nvPr/>
+        </p:nvSpPr>
+        <p:spPr>
+          <a:xfrm>
+            <a:off x="0" y="0"/>
+            <a:ext cx="164592" cy="6858000"/>
+          </a:xfrm>
+          <a:prstGeom prst="rect">
+            <a:avLst/>
+          </a:prstGeom>
+          <a:solidFill>
+            <a:srgbClr val="1F6FEB"/>
+          </a:solidFill>
+          <a:ln>
+            <a:solidFill>
+              <a:srgbClr val="1F6FEB"/>
+            </a:solidFill>
+          </a:ln>
+        </p:spPr>
+        <p:style>
+          <a:lnRef idx="1">
+            <a:schemeClr val="accent1"/>
+          </a:lnRef>
+          <a:fillRef idx="3">
+            <a:schemeClr val="accent1"/>
+          </a:fillRef>
+          <a:effectRef idx="2">
+            <a:schemeClr val="accent1"/>
+          </a:effectRef>
+          <a:fontRef idx="minor">
+            <a:schemeClr val="lt1"/>
+          </a:fontRef>
+        </p:style>
+        <p:txBody>
+          <a:bodyPr rtlCol="0" anchor="ctr"/>
+          <a:lstStyle/>
+          <a:p>
+            <a:pPr algn="ctr"/>
+          </a:p>
+        </p:txBody>
+      </p:sp>
+      <p:sp>
+        <p:nvSpPr>
+          <p:cNvPr id="4" name="TextBox 3"/>
+          <p:cNvSpPr txBox="1"/>
+          <p:nvPr/>
+        </p:nvSpPr>
+        <p:spPr>
+          <a:xfrm>
+            <a:off x="658368" y="384048"/>
+            <a:ext cx="10789920" cy="320040"/>
+          </a:xfrm>
+          <a:prstGeom prst="rect">
+            <a:avLst/>
+          </a:prstGeom>
+          <a:noFill/>
+        </p:spPr>
+        <p:txBody>
+          <a:bodyPr wrap="square" anchor="t">
+            <a:spAutoFit/>
+          </a:bodyPr>
+          <a:lstStyle/>
+          <a:p>
+            <a:pPr algn="l"/>
+            <a:r>
+              <a:rPr sz="1100" b="1">
+                <a:solidFill>
+                  <a:srgbClr val="1F6FEB"/>
+                </a:solidFill>
+                <a:latin typeface="Arial"/>
+              </a:rPr>
+              <a:t>ACTIVITY 02 · ACCEPTANCE</a:t>
+            </a:r>
+          </a:p>
+        </p:txBody>
+      </p:sp>
+      <p:sp>
+        <p:nvSpPr>
+          <p:cNvPr id="5" name="TextBox 4"/>
+          <p:cNvSpPr txBox="1"/>
+          <p:nvPr/>
+        </p:nvSpPr>
+        <p:spPr>
+          <a:xfrm>
+            <a:off x="658368" y="749808"/>
+            <a:ext cx="10789920" cy="658368"/>
+          </a:xfrm>
+          <a:prstGeom prst="rect">
+            <a:avLst/>
+          </a:prstGeom>
+          <a:noFill/>
+        </p:spPr>
+        <p:txBody>
+          <a:bodyPr wrap="square" anchor="t">
+            <a:spAutoFit/>
+          </a:bodyPr>
+          <a:lstStyle/>
+          <a:p>
+            <a:pPr algn="l"/>
+            <a:r>
+              <a:rPr sz="2700" b="1">
+                <a:solidFill>
+                  <a:srgbClr val="161B26"/>
+                </a:solidFill>
+                <a:latin typeface="Arial"/>
+              </a:rPr>
+              <a:t>What Good Looks Like</a:t>
+            </a:r>
+          </a:p>
+        </p:txBody>
+      </p:sp>
+      <p:sp>
+        <p:nvSpPr>
+          <p:cNvPr id="6" name="Rectangle 5"/>
+          <p:cNvSpPr/>
+          <p:nvPr/>
+        </p:nvSpPr>
+        <p:spPr>
+          <a:xfrm>
+            <a:off x="658368" y="1444752"/>
+            <a:ext cx="10881360" cy="18288"/>
+          </a:xfrm>
+          <a:prstGeom prst="rect">
+            <a:avLst/>
+          </a:prstGeom>
+          <a:solidFill>
+            <a:srgbClr val="E2E8F0"/>
+          </a:solidFill>
+          <a:ln>
+            <a:solidFill>
+              <a:srgbClr val="E2E8F0"/>
+            </a:solidFill>
+          </a:ln>
+        </p:spPr>
+        <p:style>
+          <a:lnRef idx="1">
+            <a:schemeClr val="accent1"/>
+          </a:lnRef>
+          <a:fillRef idx="3">
+            <a:schemeClr val="accent1"/>
+          </a:fillRef>
+          <a:effectRef idx="2">
+            <a:schemeClr val="accent1"/>
+          </a:effectRef>
+          <a:fontRef idx="minor">
+            <a:schemeClr val="lt1"/>
+          </a:fontRef>
+        </p:style>
+        <p:txBody>
+          <a:bodyPr rtlCol="0" anchor="ctr"/>
+          <a:lstStyle/>
+          <a:p>
+            <a:pPr algn="ctr"/>
+          </a:p>
+        </p:txBody>
+      </p:sp>
+      <p:sp>
+        <p:nvSpPr>
+          <p:cNvPr id="7" name="TextBox 6"/>
+          <p:cNvSpPr txBox="1"/>
+          <p:nvPr/>
+        </p:nvSpPr>
+        <p:spPr>
+          <a:xfrm>
+            <a:off x="658368" y="6473952"/>
+            <a:ext cx="9875520" cy="201168"/>
+          </a:xfrm>
+          <a:prstGeom prst="rect">
+            <a:avLst/>
+          </a:prstGeom>
+          <a:noFill/>
+        </p:spPr>
+        <p:txBody>
+          <a:bodyPr wrap="square" anchor="t">
+            <a:spAutoFit/>
+          </a:bodyPr>
+          <a:lstStyle/>
+          <a:p>
+            <a:pPr algn="l"/>
+            <a:r>
+              <a:rPr sz="800" b="0">
+                <a:solidFill>
+                  <a:srgbClr val="5B6372"/>
+                </a:solidFill>
+                <a:latin typeface="Arial"/>
+              </a:rPr>
+              <a:t>TGS-2026064178 · ACTIVITY PRACTICE · Tertiary Infotech Academy Pte Ltd</a:t>
+            </a:r>
+          </a:p>
+        </p:txBody>
+      </p:sp>
+      <p:sp>
+        <p:nvSpPr>
+          <p:cNvPr id="8" name="Rounded Rectangle 7"/>
+          <p:cNvSpPr/>
+          <p:nvPr/>
+        </p:nvSpPr>
+        <p:spPr>
+          <a:xfrm>
+            <a:off x="749808" y="1810512"/>
+            <a:ext cx="10652760" cy="1005840"/>
+          </a:xfrm>
+          <a:prstGeom prst="roundRect">
+            <a:avLst/>
+          </a:prstGeom>
+          <a:solidFill>
+            <a:srgbClr val="1F6FEB"/>
+          </a:solidFill>
+          <a:ln>
+            <a:solidFill>
+              <a:srgbClr val="1F6FEB"/>
+            </a:solidFill>
+          </a:ln>
+        </p:spPr>
+        <p:style>
+          <a:lnRef idx="1">
+            <a:schemeClr val="accent1"/>
+          </a:lnRef>
+          <a:fillRef idx="3">
+            <a:schemeClr val="accent1"/>
+          </a:fillRef>
+          <a:effectRef idx="2">
+            <a:schemeClr val="accent1"/>
+          </a:effectRef>
+          <a:fontRef idx="minor">
+            <a:schemeClr val="lt1"/>
+          </a:fontRef>
+        </p:style>
+        <p:txBody>
+          <a:bodyPr rtlCol="0" anchor="ctr"/>
+          <a:lstStyle/>
+          <a:p>
+            <a:pPr algn="ctr"/>
+          </a:p>
+        </p:txBody>
+      </p:sp>
+      <p:sp>
+        <p:nvSpPr>
+          <p:cNvPr id="9" name="TextBox 8"/>
+          <p:cNvSpPr txBox="1"/>
+          <p:nvPr/>
+        </p:nvSpPr>
+        <p:spPr>
+          <a:xfrm>
+            <a:off x="1051560" y="2011680"/>
+            <a:ext cx="10058400" cy="566928"/>
+          </a:xfrm>
+          <a:prstGeom prst="rect">
+            <a:avLst/>
+          </a:prstGeom>
+          <a:noFill/>
+        </p:spPr>
+        <p:txBody>
+          <a:bodyPr wrap="square" anchor="ctr">
+            <a:spAutoFit/>
+          </a:bodyPr>
+          <a:lstStyle/>
+          <a:p>
+            <a:pPr algn="ctr"/>
+            <a:r>
+              <a:rPr sz="1900" b="1">
+                <a:solidFill>
+                  <a:srgbClr val="FFFFFF"/>
+                </a:solidFill>
+                <a:latin typeface="Arial"/>
+              </a:rPr>
+              <a:t>A structured Copilot prompt, two comparison-infographic directions and one approved PowerPoint wireframe</a:t>
             </a:r>
           </a:p>
         </p:txBody>
